--- a/data/인공지능/00 - preview.pptx
+++ b/data/인공지능/00 - preview.pptx
@@ -332,7 +332,7 @@
       </p15:notesGuideLst>
     </p:ext>
     <p:ext uri="GoogleSlidesCustomDataVersion2">
-      <go:slidesCustomData xmlns:go="http://customooxmlschemas.google.com/" xmlns:ahyp="http://schemas.microsoft.com/office/drawing/2018/hyperlinkcolor" xmlns:p15="http://schemas.microsoft.com/office/powerpoint/2012/main" xmlns:p14="http://schemas.microsoft.com/office/powerpoint/2010/main" xmlns:com="http://schemas.openxmlformats.org/drawingml/2006/compatibility" xmlns:pvml="urn:schemas-microsoft-com:office:powerpoint" xmlns:v="urn:schemas-microsoft-com:vml" xmlns:o="urn:schemas-microsoft-com:office:office" xmlns:dgm="http://schemas.openxmlformats.org/drawingml/2006/diagram" xmlns:c="http://schemas.openxmlformats.org/drawingml/2006/chart" xmlns:mv="urn:schemas-microsoft-com:mac:vml" xmlns:mc="http://schemas.openxmlformats.org/markup-compatibility/2006" xmlns="" r:id="rId61" roundtripDataSignature="AMtx7mgQh/JTZB+tcnoesXfhZuEldfv5OQ=="/>
+      <go:slidesCustomData xmlns="" xmlns:mc="http://schemas.openxmlformats.org/markup-compatibility/2006" xmlns:mv="urn:schemas-microsoft-com:mac:vml" xmlns:c="http://schemas.openxmlformats.org/drawingml/2006/chart" xmlns:dgm="http://schemas.openxmlformats.org/drawingml/2006/diagram" xmlns:o="urn:schemas-microsoft-com:office:office" xmlns:v="urn:schemas-microsoft-com:vml" xmlns:pvml="urn:schemas-microsoft-com:office:powerpoint" xmlns:com="http://schemas.openxmlformats.org/drawingml/2006/compatibility" xmlns:p14="http://schemas.microsoft.com/office/powerpoint/2010/main" xmlns:p15="http://schemas.microsoft.com/office/powerpoint/2012/main" xmlns:ahyp="http://schemas.microsoft.com/office/drawing/2018/hyperlinkcolor" xmlns:go="http://customooxmlschemas.google.com/" r:id="rId61" roundtripDataSignature="AMtx7mgQh/JTZB+tcnoesXfhZuEldfv5OQ=="/>
     </p:ext>
   </p:extLst>
 </p:presentation>
@@ -9033,7 +9033,7 @@
                 <a:cs typeface="Calibri"/>
                 <a:sym typeface="Calibri"/>
               </a:rPr>
-              <a:t>CHAPTER 0 </a:t>
+              <a:t xml:space="preserve">CHAPTER 0 </a:t>
             </a:r>
             <a:r>
               <a:rPr lang="en-US" altLang="ko-KR" sz="1800" b="0" i="0" u="none" strike="noStrike" cap="none" dirty="0">
@@ -9244,7 +9244,7 @@
             </a:r>
             <a:r>
               <a:rPr lang="ko-KR" sz="2000" dirty="0"/>
-              <a:t>: </a:t>
+              <a:t xml:space="preserve">: </a:t>
             </a:r>
             <a:r>
               <a:rPr lang="ko-KR" altLang="en-US" sz="2000" dirty="0"/>
@@ -9275,7 +9275,7 @@
             </a:r>
             <a:r>
               <a:rPr lang="ko-KR" sz="1700" dirty="0"/>
-              <a:t> 핵심 개념과 실습을 다루는 입문 강의</a:t>
+              <a:t xml:space="preserve"> 핵심 개념과 실습을 다루는 입문 강의</a:t>
             </a:r>
             <a:endParaRPr sz="1700" dirty="0"/>
           </a:p>
@@ -9302,7 +9302,7 @@
             </a:r>
             <a:r>
               <a:rPr lang="ko-KR" sz="1700" dirty="0"/>
-              <a:t> 구글 </a:t>
+              <a:t xml:space="preserve"> 구글 </a:t>
             </a:r>
             <a:r>
               <a:rPr lang="ko-KR" sz="1700" dirty="0" err="1"/>
@@ -9310,7 +9310,7 @@
             </a:r>
             <a:r>
               <a:rPr lang="ko-KR" sz="1700" dirty="0"/>
-              <a:t> 활용한 실습 중심 수업</a:t>
+              <a:t xml:space="preserve"> 활용한 실습 중심 수업</a:t>
             </a:r>
             <a:endParaRPr sz="1700" dirty="0"/>
           </a:p>
@@ -9353,7 +9353,7 @@
             </a:pPr>
             <a:r>
               <a:rPr lang="ko-KR" sz="1700" dirty="0"/>
-              <a:t>인공지능과 </a:t>
+              <a:t xml:space="preserve">인공지능과 </a:t>
             </a:r>
             <a:r>
               <a:rPr lang="ko-KR" sz="1700" dirty="0" err="1"/>
@@ -9361,7 +9361,7 @@
             </a:r>
             <a:r>
               <a:rPr lang="ko-KR" sz="1700" dirty="0"/>
-              <a:t> 개념과 차이를 이해한다</a:t>
+              <a:t xml:space="preserve"> 개념과 차이를 이해한다</a:t>
             </a:r>
             <a:endParaRPr sz="1700" dirty="0"/>
           </a:p>
@@ -9384,7 +9384,7 @@
             </a:pPr>
             <a:r>
               <a:rPr lang="ko-KR" sz="1700" dirty="0"/>
-              <a:t>주요 </a:t>
+              <a:t xml:space="preserve">주요 </a:t>
             </a:r>
             <a:r>
               <a:rPr lang="ko-KR" sz="1700" dirty="0" err="1"/>
@@ -9392,7 +9392,7 @@
             </a:r>
             <a:r>
               <a:rPr lang="ko-KR" sz="1700" dirty="0"/>
-              <a:t> 알고리즘의 원리를 이해하고 구현할 수 있다</a:t>
+              <a:t xml:space="preserve"> 알고리즘의 원리를 이해하고 구현할 수 있다</a:t>
             </a:r>
             <a:endParaRPr sz="1700" dirty="0"/>
           </a:p>
@@ -9419,7 +9419,7 @@
             </a:r>
             <a:r>
               <a:rPr lang="ko-KR" sz="1700" dirty="0"/>
-              <a:t> 활용하여 데이터 분석 문제를 해결할 수 있다</a:t>
+              <a:t xml:space="preserve"> 활용하여 데이터 분석 문제를 해결할 수 있다</a:t>
             </a:r>
             <a:endParaRPr sz="1700" dirty="0"/>
           </a:p>
@@ -9447,6 +9447,29 @@
             <a:endParaRPr sz="1700" dirty="0"/>
           </a:p>
           <a:p>
+            <a:pPr marL="685800" lvl="1" indent="-228631" algn="l" rtl="0">
+              <a:lnSpc>
+                <a:spcPct val="125000"/>
+              </a:lnSpc>
+              <a:spcBef>
+                <a:spcPts val="200"/>
+              </a:spcBef>
+              <a:spcAft>
+                <a:spcPts val="0"/>
+              </a:spcAft>
+              <a:buClr>
+                <a:schemeClr val="dk1"/>
+              </a:buClr>
+              <a:buSzPct val="100000"/>
+              <a:buChar char="⁃"/>
+            </a:pPr>
+            <a:r>
+              <a:rPr lang="ko-KR" sz="1700" dirty="0"/>
+              <a:t>바이브코딩을 활용하여 AI 프로젝트를 기획하고 구현할 수 있다</a:t>
+            </a:r>
+            <a:endParaRPr sz="1700" dirty="0"/>
+          </a:p>
+          <a:p>
             <a:pPr marL="228600" lvl="0" indent="-228600" algn="l" rtl="0">
               <a:lnSpc>
                 <a:spcPct val="125000"/>
@@ -9489,7 +9512,7 @@
             </a:r>
             <a:r>
               <a:rPr lang="ko-KR" sz="1700" dirty="0"/>
-              <a:t> 프로그래밍 기초 (변수, </a:t>
+              <a:t xml:space="preserve"> 프로그래밍 기초 (변수, </a:t>
             </a:r>
             <a:r>
               <a:rPr lang="ko-KR" sz="1700" dirty="0" err="1"/>
@@ -9497,7 +9520,7 @@
             </a:r>
             <a:r>
               <a:rPr lang="ko-KR" sz="1700" dirty="0"/>
-              <a:t>, </a:t>
+              <a:t xml:space="preserve">, </a:t>
             </a:r>
             <a:r>
               <a:rPr lang="ko-KR" sz="1700" dirty="0" err="1"/>
@@ -9571,7 +9594,7 @@
             </a:pPr>
             <a:r>
               <a:rPr lang="ko-KR" sz="1700" dirty="0"/>
-              <a:t>구글 </a:t>
+              <a:t xml:space="preserve">구글 </a:t>
             </a:r>
             <a:r>
               <a:rPr lang="ko-KR" sz="1700" dirty="0" err="1"/>
@@ -9587,7 +9610,7 @@
             </a:r>
             <a:r>
               <a:rPr lang="ko-KR" sz="1700" dirty="0"/>
-              <a:t>): 웹 브라우저에서 </a:t>
+              <a:t xml:space="preserve">): 웹 브라우저에서 </a:t>
             </a:r>
             <a:r>
               <a:rPr lang="ko-KR" sz="1700" dirty="0" err="1"/>
@@ -9595,7 +9618,7 @@
             </a:r>
             <a:r>
               <a:rPr lang="ko-KR" sz="1700" dirty="0"/>
-              <a:t> 코드를 실행할 수 있는 무료 환경</a:t>
+              <a:t xml:space="preserve"> 코드를 실행할 수 있는 무료 환경</a:t>
             </a:r>
             <a:endParaRPr sz="1700" dirty="0"/>
           </a:p>
@@ -9747,7 +9770,7 @@
             </a:r>
             <a:r>
               <a:rPr lang="ko-KR"/>
-              <a:t> </a:t>
+              <a:t xml:space="preserve"> </a:t>
             </a:r>
             <a:r>
               <a:rPr lang="ko-KR" dirty="0"/>
@@ -9809,7 +9832,7 @@
                 <a:cs typeface="Malgun Gothic"/>
                 <a:sym typeface="Malgun Gothic"/>
               </a:rPr>
-              <a:t>CHAPTER 01: </a:t>
+              <a:t xml:space="preserve">CHAPTER 01: </a:t>
             </a:r>
             <a:r>
               <a:rPr lang="ko-KR" altLang="en-US" sz="1800" b="1" dirty="0">
@@ -9853,7 +9876,7 @@
                 <a:cs typeface="Malgun Gothic"/>
                 <a:sym typeface="Malgun Gothic"/>
               </a:rPr>
-              <a:t>인공지능, </a:t>
+              <a:t xml:space="preserve">인공지능, </a:t>
             </a:r>
             <a:r>
               <a:rPr lang="ko-KR" sz="1400" b="0" i="0" u="none" strike="noStrike" cap="none" dirty="0" err="1">
@@ -9877,7 +9900,7 @@
                 <a:cs typeface="Malgun Gothic"/>
                 <a:sym typeface="Malgun Gothic"/>
               </a:rPr>
-              <a:t>, </a:t>
+              <a:t xml:space="preserve">, </a:t>
             </a:r>
             <a:r>
               <a:rPr lang="ko-KR" sz="1400" b="0" i="0" u="none" strike="noStrike" cap="none" dirty="0" err="1">
@@ -9901,7 +9924,7 @@
                 <a:cs typeface="Malgun Gothic"/>
                 <a:sym typeface="Malgun Gothic"/>
               </a:rPr>
-              <a:t> 차이점을 이해합니다.</a:t>
+              <a:t xml:space="preserve"> 차이점을 이해합니다.</a:t>
             </a:r>
             <a:endParaRPr dirty="0"/>
           </a:p>
@@ -9933,7 +9956,7 @@
                 <a:cs typeface="Malgun Gothic"/>
                 <a:sym typeface="Malgun Gothic"/>
               </a:rPr>
-              <a:t>구글 </a:t>
+              <a:t xml:space="preserve">구글 </a:t>
             </a:r>
             <a:r>
               <a:rPr lang="ko-KR" sz="1400" b="0" i="0" u="none" strike="noStrike" cap="none" dirty="0" err="1">
@@ -9957,7 +9980,7 @@
                 <a:cs typeface="Malgun Gothic"/>
                 <a:sym typeface="Malgun Gothic"/>
               </a:rPr>
-              <a:t> 사용법을 배웁니다.</a:t>
+              <a:t xml:space="preserve"> 사용법을 배웁니다.</a:t>
             </a:r>
             <a:endParaRPr dirty="0"/>
           </a:p>
@@ -9989,7 +10012,7 @@
                 <a:cs typeface="Malgun Gothic"/>
                 <a:sym typeface="Malgun Gothic"/>
               </a:rPr>
-              <a:t>첫 번째 </a:t>
+              <a:t xml:space="preserve">첫 번째 </a:t>
             </a:r>
             <a:r>
               <a:rPr lang="ko-KR" sz="1400" b="0" i="0" u="none" strike="noStrike" cap="none" dirty="0" err="1">
@@ -10013,7 +10036,7 @@
                 <a:cs typeface="Malgun Gothic"/>
                 <a:sym typeface="Malgun Gothic"/>
               </a:rPr>
-              <a:t> 프로그램을 만들고 </a:t>
+              <a:t xml:space="preserve"> 프로그램을 만들고 </a:t>
             </a:r>
             <a:r>
               <a:rPr lang="ko-KR" sz="1400" b="0" i="0" u="none" strike="noStrike" cap="none" dirty="0" err="1">
@@ -10037,7 +10060,7 @@
                 <a:cs typeface="Malgun Gothic"/>
                 <a:sym typeface="Malgun Gothic"/>
               </a:rPr>
-              <a:t> 기본 작동 원리를 이해합니다.</a:t>
+              <a:t xml:space="preserve"> 기본 작동 원리를 이해합니다.</a:t>
             </a:r>
             <a:endParaRPr sz="1400" b="0" i="0" u="none" strike="noStrike" cap="none" dirty="0">
               <a:solidFill>
@@ -10121,7 +10144,7 @@
                 <a:cs typeface="Malgun Gothic"/>
                 <a:sym typeface="Malgun Gothic"/>
               </a:rPr>
-              <a:t> 알고리즘에 주입할 데이터를 준비하는 방법을 배웁니다.</a:t>
+              <a:t xml:space="preserve"> 알고리즘에 주입할 데이터를 준비하는 방법을 배웁니다.</a:t>
             </a:r>
             <a:endParaRPr dirty="0"/>
           </a:p>
@@ -10310,7 +10333,7 @@
                 <a:cs typeface="Malgun Gothic"/>
                 <a:sym typeface="Malgun Gothic"/>
               </a:rPr>
-              <a:t>CHAPTER 04: </a:t>
+              <a:t xml:space="preserve">CHAPTER 04: </a:t>
             </a:r>
             <a:r>
               <a:rPr lang="ko-KR" altLang="en-US" sz="1800" b="1" dirty="0">
@@ -10366,7 +10389,7 @@
                 <a:cs typeface="Malgun Gothic"/>
                 <a:sym typeface="Malgun Gothic"/>
               </a:rPr>
-              <a:t>, </a:t>
+              <a:t xml:space="preserve">, </a:t>
             </a:r>
             <a:r>
               <a:rPr lang="ko-KR" altLang="en-US" sz="1400" b="0" i="0" u="none" strike="noStrike" cap="none" dirty="0">
@@ -10466,7 +10489,7 @@
                 <a:cs typeface="Malgun Gothic"/>
                 <a:sym typeface="Malgun Gothic"/>
               </a:rPr>
-              <a:t>CHAPTER 05: </a:t>
+              <a:t xml:space="preserve">CHAPTER 05: </a:t>
             </a:r>
             <a:r>
               <a:rPr lang="ko-KR" altLang="en-US" sz="1800" b="1" dirty="0">
@@ -10554,7 +10577,7 @@
                 <a:cs typeface="Malgun Gothic"/>
                 <a:sym typeface="Malgun Gothic"/>
               </a:rPr>
-              <a:t>알고리즘의 성능을 최대화하기 위한 </a:t>
+              <a:t xml:space="preserve">알고리즘의 성능을 최대화하기 위한 </a:t>
             </a:r>
             <a:r>
               <a:rPr lang="ko-KR" altLang="en-US" sz="1400" b="0" i="0" u="none" strike="noStrike" cap="none" dirty="0" err="1">
@@ -10578,7 +10601,7 @@
                 <a:cs typeface="Malgun Gothic"/>
                 <a:sym typeface="Malgun Gothic"/>
               </a:rPr>
-              <a:t> 튜닝을 실습합니다</a:t>
+              <a:t xml:space="preserve"> 튜닝을 실습합니다</a:t>
             </a:r>
             <a:r>
               <a:rPr lang="en-US" altLang="ko-KR" sz="1400" b="0" i="0" u="none" strike="noStrike" cap="none" dirty="0">
@@ -10666,7 +10689,7 @@
                 <a:cs typeface="Malgun Gothic"/>
                 <a:sym typeface="Malgun Gothic"/>
               </a:rPr>
-              <a:t>CHAPTER 06: </a:t>
+              <a:t xml:space="preserve">CHAPTER 06: </a:t>
             </a:r>
             <a:r>
               <a:rPr lang="ko-KR" altLang="en-US" sz="1800" b="1" dirty="0">
@@ -10710,7 +10733,7 @@
                 <a:cs typeface="Malgun Gothic"/>
                 <a:sym typeface="Malgun Gothic"/>
               </a:rPr>
-              <a:t>타깃이 없는 </a:t>
+              <a:t xml:space="preserve">타깃이 없는 </a:t>
             </a:r>
             <a:r>
               <a:rPr lang="ko-KR" altLang="en-US" sz="1400" b="0" i="0" dirty="0">
@@ -10734,7 +10757,7 @@
                 <a:ea typeface="Malgun Gothic" panose="020B0503020000020004" pitchFamily="50" charset="-127"/>
                 <a:cs typeface="Malgun Gothic" panose="020B0503020000020004" pitchFamily="50" charset="-127"/>
               </a:rPr>
-              <a:t>. </a:t>
+              <a:t xml:space="preserve">. </a:t>
             </a:r>
             <a:endParaRPr lang="ko-KR" altLang="en-US" sz="1400" b="0" i="0" dirty="0">
               <a:solidFill>
@@ -10771,7 +10794,7 @@
                 <a:ea typeface="Malgun Gothic" panose="020B0503020000020004" pitchFamily="50" charset="-127"/>
                 <a:cs typeface="Malgun Gothic" panose="020B0503020000020004" pitchFamily="50" charset="-127"/>
               </a:rPr>
-              <a:t>대표적인 군집 알고리즘인 </a:t>
+              <a:t xml:space="preserve">대표적인 군집 알고리즘인 </a:t>
             </a:r>
             <a:r>
               <a:rPr lang="en-US" altLang="ko-KR" sz="1400" b="0" i="0" dirty="0">
@@ -10795,7 +10818,7 @@
                 <a:ea typeface="Malgun Gothic" panose="020B0503020000020004" pitchFamily="50" charset="-127"/>
                 <a:cs typeface="Malgun Gothic" panose="020B0503020000020004" pitchFamily="50" charset="-127"/>
               </a:rPr>
-              <a:t>평균과 </a:t>
+              <a:t xml:space="preserve">평균과 </a:t>
             </a:r>
             <a:r>
               <a:rPr lang="en-US" altLang="ko-KR" sz="1400" b="0" i="0" dirty="0">
@@ -10978,10 +11001,10 @@
               <a:buNone/>
             </a:pPr>
             <a:r>
-              <a:rPr lang="ko-KR"/>
-              <a:t>SECTION 0-2 교재 소개</a:t>
-            </a:r>
-            <a:endParaRPr/>
+              <a:rPr lang="ko-KR" dirty="0"/>
+              <a:t>교재 소개</a:t>
+            </a:r>
+            <a:endParaRPr dirty="0"/>
           </a:p>
         </p:txBody>
       </p:sp>
@@ -11098,7 +11121,7 @@
             </a:pPr>
             <a:r>
               <a:rPr lang="ko-KR" sz="1700" dirty="0"/>
-              <a:t>혼자 공부하는 </a:t>
+              <a:t xml:space="preserve">혼자 공부하는 </a:t>
             </a:r>
             <a:r>
               <a:rPr lang="ko-KR" sz="1700" dirty="0" err="1"/>
@@ -11106,7 +11129,7 @@
             </a:r>
             <a:r>
               <a:rPr lang="ko-KR" sz="1700" dirty="0"/>
-              <a:t> (개정판)</a:t>
+              <a:t xml:space="preserve"> (개정판)</a:t>
             </a:r>
             <a:endParaRPr sz="1700" dirty="0"/>
           </a:p>
@@ -11129,7 +11152,7 @@
             </a:pPr>
             <a:r>
               <a:rPr lang="ko-KR" sz="1700" dirty="0"/>
-              <a:t>지은이: 박해선 / 출판사: </a:t>
+              <a:t xml:space="preserve">지은이: 박해선 / 출판사: </a:t>
             </a:r>
             <a:r>
               <a:rPr lang="ko-KR" sz="1700" dirty="0" err="1"/>
@@ -11180,7 +11203,7 @@
             </a:r>
             <a:r>
               <a:rPr lang="ko-KR" sz="1700" dirty="0"/>
-              <a:t> (CHAPTER 01~06)</a:t>
+              <a:t xml:space="preserve"> (CHAPTER 01~06)</a:t>
             </a:r>
             <a:endParaRPr lang="en-US" altLang="ko-KR" sz="1700" dirty="0"/>
           </a:p>
@@ -11223,7 +11246,7 @@
             </a:r>
             <a:r>
               <a:rPr lang="ko-KR" sz="1700" dirty="0"/>
-              <a:t> (CHAPTER 07~10)</a:t>
+              <a:t xml:space="preserve"> (CHAPTER 07~10)</a:t>
             </a:r>
             <a:endParaRPr lang="en-US" altLang="ko-KR" sz="1700" dirty="0"/>
           </a:p>
@@ -11248,7 +11271,7 @@
             </a:r>
             <a:r>
               <a:rPr lang="en-US" altLang="ko-KR" sz="1500" dirty="0"/>
-              <a:t> </a:t>
+              <a:t xml:space="preserve"> </a:t>
             </a:r>
             <a:r>
               <a:rPr lang="ko-KR" altLang="en-US" sz="1500" dirty="0" err="1"/>
@@ -11256,7 +11279,7 @@
             </a:r>
             <a:r>
               <a:rPr lang="ko-KR" altLang="en-US" sz="1500" dirty="0"/>
-              <a:t> 교과에서 다루는 범위</a:t>
+              <a:t xml:space="preserve"> 교과에서 다루는 범위</a:t>
             </a:r>
             <a:endParaRPr sz="1500" dirty="0"/>
           </a:p>
@@ -11299,7 +11322,7 @@
             </a:pPr>
             <a:r>
               <a:rPr lang="ko-KR" sz="1700" dirty="0"/>
-              <a:t>CHAPTER 01: </a:t>
+              <a:t xml:space="preserve">CHAPTER 01: </a:t>
             </a:r>
             <a:r>
               <a:rPr lang="ko-KR" altLang="en-US" sz="1700" dirty="0"/>
@@ -11533,10 +11556,14 @@
               <a:buNone/>
             </a:pPr>
             <a:r>
-              <a:rPr lang="ko-KR"/>
-              <a:t>SECTION 0-3 주차별 강의 계획 (1)</a:t>
-            </a:r>
-            <a:endParaRPr/>
+              <a:rPr lang="ko-KR" dirty="0" err="1"/>
+              <a:t>주차별</a:t>
+            </a:r>
+            <a:r>
+              <a:rPr lang="ko-KR" dirty="0"/>
+              <a:t xml:space="preserve"> 강의 계획 (1)</a:t>
+            </a:r>
+            <a:endParaRPr dirty="0"/>
           </a:p>
         </p:txBody>
       </p:sp>
@@ -11653,7 +11680,7 @@
             </a:pPr>
             <a:r>
               <a:rPr lang="ko-KR" sz="1600" dirty="0"/>
-              <a:t>강의 개요, 평가 방법 안내, 구글 </a:t>
+              <a:t xml:space="preserve">강의 개요, 평가 방법 안내, 구글 </a:t>
             </a:r>
             <a:r>
               <a:rPr lang="ko-KR" sz="1600" dirty="0" err="1"/>
@@ -11661,7 +11688,7 @@
             </a:r>
             <a:r>
               <a:rPr lang="ko-KR" sz="1600" dirty="0"/>
-              <a:t> 실습 환경 설정</a:t>
+              <a:t xml:space="preserve"> 실습 환경 설정</a:t>
             </a:r>
             <a:endParaRPr sz="1600" dirty="0"/>
           </a:p>
@@ -11681,7 +11708,7 @@
             </a:pPr>
             <a:r>
               <a:rPr lang="ko-KR" sz="1800" dirty="0"/>
-              <a:t>2주차: CHAPTER 01 </a:t>
+              <a:t xml:space="preserve">2주차: CHAPTER 01 </a:t>
             </a:r>
             <a:r>
               <a:rPr lang="ko-KR" altLang="en-US" sz="1800" dirty="0"/>
@@ -11689,7 +11716,7 @@
             </a:r>
             <a:r>
               <a:rPr lang="ko-KR" sz="1800" dirty="0"/>
-              <a:t> (1)</a:t>
+              <a:t xml:space="preserve"> (1)</a:t>
             </a:r>
             <a:endParaRPr sz="1800" dirty="0"/>
           </a:p>
@@ -11712,7 +11739,7 @@
             </a:pPr>
             <a:r>
               <a:rPr lang="ko-KR" sz="1600" dirty="0"/>
-              <a:t>인공지능과 </a:t>
+              <a:t xml:space="preserve">인공지능과 </a:t>
             </a:r>
             <a:r>
               <a:rPr lang="ko-KR" sz="1600" dirty="0" err="1"/>
@@ -11720,7 +11747,7 @@
             </a:r>
             <a:r>
               <a:rPr lang="ko-KR" sz="1600" dirty="0"/>
-              <a:t> 개념 / </a:t>
+              <a:t xml:space="preserve"> 개념 / </a:t>
             </a:r>
             <a:r>
               <a:rPr lang="ko-KR" sz="1600" dirty="0" err="1"/>
@@ -11728,7 +11755,7 @@
             </a:r>
             <a:r>
               <a:rPr lang="ko-KR" sz="1600" dirty="0"/>
-              <a:t> 주피터 노트북</a:t>
+              <a:t xml:space="preserve"> 주피터 노트북</a:t>
             </a:r>
             <a:endParaRPr sz="1600" dirty="0"/>
           </a:p>
@@ -11748,7 +11775,7 @@
             </a:pPr>
             <a:r>
               <a:rPr lang="ko-KR" sz="1800" dirty="0"/>
-              <a:t>3주차: CHAPTER 01 </a:t>
+              <a:t xml:space="preserve">3주차: CHAPTER 01 </a:t>
             </a:r>
             <a:r>
               <a:rPr lang="ko-KR" altLang="en-US" sz="1800" dirty="0"/>
@@ -11756,7 +11783,7 @@
             </a:r>
             <a:r>
               <a:rPr lang="ko-KR" sz="1800" dirty="0"/>
-              <a:t> (2)</a:t>
+              <a:t xml:space="preserve"> (2)</a:t>
             </a:r>
             <a:endParaRPr sz="1800" dirty="0"/>
           </a:p>
@@ -11779,7 +11806,7 @@
             </a:pPr>
             <a:r>
               <a:rPr lang="ko-KR" sz="1600" dirty="0"/>
-              <a:t>마켓과 </a:t>
+              <a:t xml:space="preserve">마켓과 </a:t>
             </a:r>
             <a:r>
               <a:rPr lang="ko-KR" sz="1600" dirty="0" err="1"/>
@@ -11826,7 +11853,7 @@
             </a:pPr>
             <a:r>
               <a:rPr lang="ko-KR" sz="1600" dirty="0"/>
-              <a:t>훈련 세트와 테스트 세트 / 데이터 </a:t>
+              <a:t xml:space="preserve">훈련 세트와 테스트 세트 / 데이터 </a:t>
             </a:r>
             <a:r>
               <a:rPr lang="ko-KR" sz="1600" dirty="0" err="1"/>
@@ -11936,7 +11963,7 @@
             </a:pPr>
             <a:r>
               <a:rPr lang="ko-KR" sz="1800" dirty="0"/>
-              <a:t>7주차: CHAPTER 04 다양한 분류 알고리즘 (1)</a:t>
+              <a:t>7주차: CHAPTER 04 다양한 분류 알고리즘</a:t>
             </a:r>
             <a:endParaRPr sz="1800" dirty="0"/>
           </a:p>
@@ -11959,7 +11986,7 @@
             </a:pPr>
             <a:r>
               <a:rPr lang="ko-KR" sz="1600" dirty="0"/>
-              <a:t>로지스틱 회귀</a:t>
+              <a:t>로지스틱 회귀 / 확률적 경사 하강법</a:t>
             </a:r>
             <a:endParaRPr sz="1600" dirty="0"/>
           </a:p>
@@ -12057,10 +12084,14 @@
               <a:buNone/>
             </a:pPr>
             <a:r>
-              <a:rPr lang="ko-KR"/>
-              <a:t>SECTION 0-3 주차별 강의 계획 (2)</a:t>
-            </a:r>
-            <a:endParaRPr/>
+              <a:rPr lang="ko-KR" dirty="0" err="1"/>
+              <a:t>주차별</a:t>
+            </a:r>
+            <a:r>
+              <a:rPr lang="ko-KR" dirty="0"/>
+              <a:t xml:space="preserve"> 강의 계획 (2)</a:t>
+            </a:r>
+            <a:endParaRPr dirty="0"/>
           </a:p>
         </p:txBody>
       </p:sp>
@@ -12154,7 +12185,7 @@
             </a:pPr>
             <a:r>
               <a:rPr lang="ko-KR" sz="1800" dirty="0"/>
-              <a:t>9주차: CHAPTER 04 다양한 분류 알고리즘 (2)</a:t>
+              <a:t>9주차: CHAPTER 05 트리 알고리즘 (1)</a:t>
             </a:r>
             <a:endParaRPr sz="1800" dirty="0"/>
           </a:p>
@@ -12177,11 +12208,7 @@
             </a:pPr>
             <a:r>
               <a:rPr lang="ko-KR" sz="1600" dirty="0"/>
-              <a:t>확률적 경사 </a:t>
-            </a:r>
-            <a:r>
-              <a:rPr lang="ko-KR" sz="1600" dirty="0" err="1"/>
-              <a:t>하강법</a:t>
+              <a:t>결정 트리</a:t>
             </a:r>
             <a:endParaRPr sz="1600" dirty="0"/>
           </a:p>
@@ -12201,7 +12228,7 @@
             </a:pPr>
             <a:r>
               <a:rPr lang="ko-KR" sz="1800" dirty="0"/>
-              <a:t>10주차: CHAPTER 05 트리 알고리즘 (1)</a:t>
+              <a:t>10주차: CHAPTER 05 트리 알고리즘 (2)</a:t>
             </a:r>
             <a:endParaRPr sz="1800" dirty="0"/>
           </a:p>
@@ -12224,7 +12251,7 @@
             </a:pPr>
             <a:r>
               <a:rPr lang="ko-KR" sz="1600" dirty="0"/>
-              <a:t>결정 트리</a:t>
+              <a:t>교차 검증과 그리드 서치 / 트리의 앙상블</a:t>
             </a:r>
             <a:endParaRPr sz="1600" dirty="0"/>
           </a:p>
@@ -12244,7 +12271,7 @@
             </a:pPr>
             <a:r>
               <a:rPr lang="ko-KR" sz="1800" dirty="0"/>
-              <a:t>11주차: CHAPTER 05 트리 알고리즘 (2)</a:t>
+              <a:t>11주차: CHAPTER 06 비지도 학습 (1)</a:t>
             </a:r>
             <a:endParaRPr sz="1800" dirty="0"/>
           </a:p>
@@ -12267,11 +12294,7 @@
             </a:pPr>
             <a:r>
               <a:rPr lang="ko-KR" sz="1600" dirty="0"/>
-              <a:t>교차 검증과 그리드 </a:t>
-            </a:r>
-            <a:r>
-              <a:rPr lang="ko-KR" sz="1600" dirty="0" err="1"/>
-              <a:t>서치</a:t>
+              <a:t>군집 알고리즘 / k-평균</a:t>
             </a:r>
             <a:endParaRPr sz="1600" dirty="0"/>
           </a:p>
@@ -12291,7 +12314,7 @@
             </a:pPr>
             <a:r>
               <a:rPr lang="ko-KR" sz="1800" dirty="0"/>
-              <a:t>12주차: CHAPTER 05 트리 알고리즘 (3)</a:t>
+              <a:t>12주차: CHAPTER 06 비지도 학습 (2)</a:t>
             </a:r>
             <a:endParaRPr sz="1800" dirty="0"/>
           </a:p>
@@ -12314,7 +12337,7 @@
             </a:pPr>
             <a:r>
               <a:rPr lang="ko-KR" sz="1600" dirty="0"/>
-              <a:t>트리의 앙상블</a:t>
+              <a:t>주성분 분석</a:t>
             </a:r>
             <a:endParaRPr sz="1600" dirty="0"/>
           </a:p>
@@ -12334,7 +12357,7 @@
             </a:pPr>
             <a:r>
               <a:rPr lang="ko-KR" sz="1800" dirty="0"/>
-              <a:t>13주차: CHAPTER 06 비지도 학습 (1)</a:t>
+              <a:t>13주차: 바이브코딩 AI 프로젝트 (1)</a:t>
             </a:r>
             <a:endParaRPr sz="1800" dirty="0"/>
           </a:p>
@@ -12357,7 +12380,7 @@
             </a:pPr>
             <a:r>
               <a:rPr lang="ko-KR" sz="1600" dirty="0"/>
-              <a:t>군집 알고리즘 / k-평균</a:t>
+              <a:t>프로젝트 주제 선정 및 기획 / AI 도구 활용 실습</a:t>
             </a:r>
             <a:endParaRPr sz="1600" dirty="0"/>
           </a:p>
@@ -12377,7 +12400,7 @@
             </a:pPr>
             <a:r>
               <a:rPr lang="ko-KR" sz="1800" dirty="0"/>
-              <a:t>14주차: CHAPTER 06 비지도 학습 (2)</a:t>
+              <a:t>14주차: 바이브코딩 AI 프로젝트 (2)</a:t>
             </a:r>
             <a:endParaRPr sz="1800" dirty="0"/>
           </a:p>
@@ -12400,7 +12423,7 @@
             </a:pPr>
             <a:r>
               <a:rPr lang="ko-KR" sz="1600" dirty="0"/>
-              <a:t>주성분 분석</a:t>
+              <a:t>프로젝트 구현 및 발표 / 결과물 제출</a:t>
             </a:r>
             <a:endParaRPr sz="1600" dirty="0"/>
           </a:p>
@@ -12498,10 +12521,10 @@
               <a:buNone/>
             </a:pPr>
             <a:r>
-              <a:rPr lang="ko-KR"/>
-              <a:t>SECTION 0-4 평가 방법</a:t>
-            </a:r>
-            <a:endParaRPr/>
+              <a:rPr lang="ko-KR" dirty="0"/>
+              <a:t>평가 방법</a:t>
+            </a:r>
+            <a:endParaRPr dirty="0"/>
           </a:p>
         </p:txBody>
       </p:sp>
@@ -12633,7 +12656,7 @@
             </a:r>
             <a:r>
               <a:rPr lang="en-US" altLang="ko-KR" sz="1700" dirty="0"/>
-              <a:t>: 30</a:t>
+              <a:t>: 20</a:t>
             </a:r>
             <a:r>
               <a:rPr lang="ko-KR" altLang="en-US" sz="1700" dirty="0"/>
@@ -12651,12 +12674,39 @@
               <a:buSzPct val="100000"/>
             </a:pPr>
             <a:r>
+              <a:rPr lang="en-US" altLang="ko-KR" sz="1700" dirty="0"/>
+              <a:t xml:space="preserve">AI </a:t>
+            </a:r>
+            <a:r>
+              <a:rPr lang="ko-KR" altLang="en-US" sz="1700" dirty="0"/>
+              <a:t>프로젝트</a:t>
+            </a:r>
+            <a:r>
+              <a:rPr lang="en-US" altLang="ko-KR" sz="1700" dirty="0"/>
+              <a:t>: 15</a:t>
+            </a:r>
+            <a:r>
+              <a:rPr lang="ko-KR" altLang="en-US" sz="1700" dirty="0"/>
+              <a:t>점</a:t>
+            </a:r>
+          </a:p>
+          <a:p>
+            <a:pPr marL="685800" lvl="1" indent="-228631">
+              <a:lnSpc>
+                <a:spcPct val="125000"/>
+              </a:lnSpc>
+              <a:spcBef>
+                <a:spcPts val="200"/>
+              </a:spcBef>
+              <a:buSzPct val="100000"/>
+            </a:pPr>
+            <a:r>
               <a:rPr lang="ko-KR" altLang="en-US" sz="1700" dirty="0"/>
               <a:t>퀴즈 및 과제</a:t>
             </a:r>
             <a:r>
               <a:rPr lang="en-US" altLang="ko-KR" sz="1700" dirty="0"/>
-              <a:t>: 25</a:t>
+              <a:t>: 20</a:t>
             </a:r>
             <a:r>
               <a:rPr lang="ko-KR" altLang="en-US" sz="1700" dirty="0"/>
@@ -12740,11 +12790,11 @@
             </a:r>
             <a:r>
               <a:rPr lang="en-US" altLang="ko-KR" sz="1700" dirty="0"/>
-              <a:t>: CHAPTER 01~03 </a:t>
+              <a:t xml:space="preserve">: CHAPTER 01~04 </a:t>
             </a:r>
             <a:r>
               <a:rPr lang="ko-KR" altLang="en-US" sz="1700" dirty="0"/>
-              <a:t>범위 </a:t>
+              <a:t xml:space="preserve">범위 </a:t>
             </a:r>
             <a:r>
               <a:rPr lang="en-US" altLang="ko-KR" sz="1700" dirty="0"/>
@@ -12776,15 +12826,15 @@
             </a:r>
             <a:r>
               <a:rPr lang="en-US" altLang="ko-KR" sz="1700" dirty="0"/>
-              <a:t>: CHAPTER 04~06 </a:t>
+              <a:t xml:space="preserve">: CHAPTER 05~06 (50%) + </a:t>
             </a:r>
             <a:r>
               <a:rPr lang="ko-KR" altLang="en-US" sz="1700" dirty="0"/>
-              <a:t>범위 </a:t>
+              <a:t xml:space="preserve">바이브코딩 </a:t>
             </a:r>
             <a:r>
               <a:rPr lang="en-US" altLang="ko-KR" sz="1700" dirty="0"/>
-              <a:t>(15</a:t>
+              <a:t>(50%) (15</a:t>
             </a:r>
             <a:r>
               <a:rPr lang="ko-KR" altLang="en-US" sz="1700" dirty="0"/>
@@ -12823,15 +12873,15 @@
             </a:pPr>
             <a:r>
               <a:rPr lang="ko-KR" altLang="en-US" sz="1700" dirty="0"/>
-              <a:t>매 </a:t>
+              <a:t xml:space="preserve">매 </a:t>
             </a:r>
             <a:r>
               <a:rPr lang="en-US" altLang="ko-KR" sz="1700" dirty="0"/>
-              <a:t>CHAPTER </a:t>
+              <a:t xml:space="preserve">CHAPTER </a:t>
             </a:r>
             <a:r>
               <a:rPr lang="ko-KR" altLang="en-US" sz="1700" dirty="0"/>
-              <a:t>종료 후 코딩 과제 제출 </a:t>
+              <a:t xml:space="preserve">종료 후 코딩 과제 제출 </a:t>
             </a:r>
             <a:r>
               <a:rPr lang="en-US" altLang="ko-KR" sz="1700" dirty="0"/>
@@ -12855,11 +12905,11 @@
             </a:r>
             <a:r>
               <a:rPr lang="en-US" altLang="ko-KR" sz="1700" dirty="0"/>
-              <a:t>: </a:t>
+              <a:t xml:space="preserve">: </a:t>
             </a:r>
             <a:r>
               <a:rPr lang="ko-KR" altLang="en-US" sz="1700" dirty="0"/>
-              <a:t>해당 주차 종료 후 </a:t>
+              <a:t xml:space="preserve">해당 주차 종료 후 </a:t>
             </a:r>
             <a:r>
               <a:rPr lang="en-US" altLang="ko-KR" sz="1700" dirty="0"/>
@@ -12881,6 +12931,55 @@
               <a:buSzPct val="100000"/>
             </a:pPr>
             <a:r>
+              <a:rPr lang="en-US" altLang="ko-KR" dirty="0"/>
+              <a:t xml:space="preserve">AI </a:t>
+            </a:r>
+            <a:r>
+              <a:rPr lang="ko-KR" altLang="en-US" dirty="0"/>
+              <a:t>프로젝트</a:t>
+            </a:r>
+          </a:p>
+          <a:p>
+            <a:pPr marL="685800" lvl="1" indent="-228631">
+              <a:lnSpc>
+                <a:spcPct val="125000"/>
+              </a:lnSpc>
+              <a:spcBef>
+                <a:spcPts val="200"/>
+              </a:spcBef>
+              <a:buSzPct val="100000"/>
+            </a:pPr>
+            <a:r>
+              <a:rPr lang="ko-KR" altLang="en-US" sz="1700" dirty="0"/>
+              <a:t>바이브코딩을 활용한 AI 프로젝트 (13~14주차)</a:t>
+            </a:r>
+          </a:p>
+          <a:p>
+            <a:pPr marL="685800" lvl="1" indent="-228631">
+              <a:lnSpc>
+                <a:spcPct val="125000"/>
+              </a:lnSpc>
+              <a:spcBef>
+                <a:spcPts val="200"/>
+              </a:spcBef>
+              <a:buSzPct val="100000"/>
+            </a:pPr>
+            <a:r>
+              <a:rPr lang="ko-KR" altLang="en-US" sz="1700" dirty="0"/>
+              <a:t>결과물 제출 및 발표 (14주차)</a:t>
+            </a:r>
+          </a:p>
+          <a:p>
+            <a:pPr marL="228600" lvl="0" indent="-228600">
+              <a:lnSpc>
+                <a:spcPct val="125000"/>
+              </a:lnSpc>
+              <a:spcBef>
+                <a:spcPts val="300"/>
+              </a:spcBef>
+              <a:buSzPct val="100000"/>
+            </a:pPr>
+            <a:r>
               <a:rPr lang="ko-KR" altLang="en-US" dirty="0"/>
               <a:t>출석</a:t>
             </a:r>
@@ -12897,7 +12996,7 @@
             </a:pPr>
             <a:r>
               <a:rPr lang="ko-KR" altLang="en-US" sz="1700" dirty="0"/>
-              <a:t>지각 </a:t>
+              <a:t xml:space="preserve">지각 </a:t>
             </a:r>
             <a:r>
               <a:rPr lang="en-US" altLang="ko-KR" sz="1700" dirty="0"/>
@@ -12905,15 +13004,15 @@
             </a:r>
             <a:r>
               <a:rPr lang="ko-KR" altLang="en-US" sz="1700" dirty="0"/>
-              <a:t>회 </a:t>
+              <a:t xml:space="preserve">회 </a:t>
             </a:r>
             <a:r>
               <a:rPr lang="en-US" altLang="ko-KR" sz="1700" dirty="0"/>
-              <a:t>= </a:t>
+              <a:t xml:space="preserve">= </a:t>
             </a:r>
             <a:r>
               <a:rPr lang="ko-KR" altLang="en-US" sz="1700" dirty="0"/>
-              <a:t>결석 </a:t>
+              <a:t xml:space="preserve">결석 </a:t>
             </a:r>
             <a:r>
               <a:rPr lang="en-US" altLang="ko-KR" sz="1700" dirty="0"/>
@@ -12925,11 +13024,11 @@
             </a:r>
             <a:r>
               <a:rPr lang="en-US" altLang="ko-KR" sz="1700" dirty="0"/>
-              <a:t>, </a:t>
+              <a:t xml:space="preserve">, </a:t>
             </a:r>
             <a:r>
               <a:rPr lang="ko-KR" altLang="en-US" sz="1700" dirty="0"/>
-              <a:t>결석 </a:t>
+              <a:t xml:space="preserve">결석 </a:t>
             </a:r>
             <a:r>
               <a:rPr lang="en-US" altLang="ko-KR" sz="1700" dirty="0"/>
@@ -12937,7 +13036,7 @@
             </a:r>
             <a:r>
               <a:rPr lang="ko-KR" altLang="en-US" sz="1700" dirty="0"/>
-              <a:t>회까지 </a:t>
+              <a:t xml:space="preserve">회까지 </a:t>
             </a:r>
             <a:r>
               <a:rPr lang="en-US" altLang="ko-KR" sz="1700" dirty="0"/>
@@ -12949,11 +13048,11 @@
             </a:r>
             <a:r>
               <a:rPr lang="en-US" altLang="ko-KR" sz="1700" dirty="0"/>
-              <a:t>, </a:t>
+              <a:t xml:space="preserve">, </a:t>
             </a:r>
             <a:r>
               <a:rPr lang="ko-KR" altLang="en-US" sz="1700" dirty="0"/>
-              <a:t>결석 </a:t>
+              <a:t xml:space="preserve">결석 </a:t>
             </a:r>
             <a:r>
               <a:rPr lang="en-US" altLang="ko-KR" sz="1700" dirty="0"/>
@@ -12961,7 +13060,7 @@
             </a:r>
             <a:r>
               <a:rPr lang="ko-KR" altLang="en-US" sz="1700" dirty="0"/>
-              <a:t>회부터 결석 </a:t>
+              <a:t xml:space="preserve">회부터 결석 </a:t>
             </a:r>
             <a:r>
               <a:rPr lang="en-US" altLang="ko-KR" sz="1700" dirty="0"/>
@@ -12969,7 +13068,7 @@
             </a:r>
             <a:r>
               <a:rPr lang="ko-KR" altLang="en-US" sz="1700" dirty="0"/>
-              <a:t>회마다 </a:t>
+              <a:t xml:space="preserve">회마다 </a:t>
             </a:r>
             <a:r>
               <a:rPr lang="en-US" altLang="ko-KR" sz="1700" dirty="0"/>
@@ -12981,7 +13080,7 @@
             </a:r>
             <a:r>
               <a:rPr lang="ko-KR" altLang="en-US" sz="1700" dirty="0"/>
-              <a:t> 차감</a:t>
+              <a:t xml:space="preserve"> 차감</a:t>
             </a:r>
           </a:p>
         </p:txBody>
@@ -13058,10 +13157,10 @@
               <a:buNone/>
             </a:pPr>
             <a:r>
-              <a:rPr lang="ko-KR"/>
-              <a:t>SECTION 0-5 수업 규칙 및 유의사항</a:t>
-            </a:r>
-            <a:endParaRPr/>
+              <a:rPr lang="ko-KR" dirty="0"/>
+              <a:t>수업 규칙 및 유의사항</a:t>
+            </a:r>
+            <a:endParaRPr dirty="0"/>
           </a:p>
         </p:txBody>
       </p:sp>
@@ -13178,7 +13277,7 @@
             </a:pPr>
             <a:r>
               <a:rPr lang="ko-KR" sz="1700" dirty="0"/>
-              <a:t>이론 강의 + 실습 (구글 </a:t>
+              <a:t xml:space="preserve">이론 강의 + 실습 (구글 </a:t>
             </a:r>
             <a:r>
               <a:rPr lang="ko-KR" sz="1700" dirty="0" err="1"/>
@@ -13232,7 +13331,7 @@
             </a:pPr>
             <a:r>
               <a:rPr lang="ko-KR" sz="1700" dirty="0"/>
-              <a:t>교재 코드는 구글 </a:t>
+              <a:t xml:space="preserve">교재 코드는 구글 </a:t>
             </a:r>
             <a:r>
               <a:rPr lang="ko-KR" sz="1700" dirty="0" err="1"/>
@@ -13240,7 +13339,7 @@
             </a:r>
             <a:r>
               <a:rPr lang="ko-KR" sz="1700" dirty="0"/>
-              <a:t> 직접 실행하며 학습</a:t>
+              <a:t xml:space="preserve"> 직접 실행하며 학습</a:t>
             </a:r>
             <a:endParaRPr sz="1700" dirty="0"/>
           </a:p>
@@ -13330,7 +13429,7 @@
             </a:r>
             <a:r>
               <a:rPr lang="en-US" altLang="ko-KR" sz="1700" dirty="0"/>
-              <a:t>, </a:t>
+              <a:t xml:space="preserve">, </a:t>
             </a:r>
             <a:r>
               <a:rPr lang="ko-KR" altLang="en-US" sz="1700" dirty="0" err="1"/>
@@ -13338,7 +13437,7 @@
             </a:r>
             <a:r>
               <a:rPr lang="en-US" altLang="ko-KR" sz="1700" dirty="0"/>
-              <a:t> </a:t>
+              <a:t xml:space="preserve"> </a:t>
             </a:r>
             <a:r>
               <a:rPr lang="ko-KR" altLang="en-US" sz="1700" dirty="0"/>
@@ -13365,7 +13464,7 @@
             </a:pPr>
             <a:r>
               <a:rPr lang="en-US" altLang="ko-KR" sz="1700" dirty="0"/>
-              <a:t>e-mail: </a:t>
+              <a:t xml:space="preserve">e-mail: </a:t>
             </a:r>
             <a:r>
               <a:rPr lang="en-US" sz="1700" dirty="0">
@@ -13375,7 +13474,7 @@
             </a:r>
             <a:r>
               <a:rPr lang="en-US" sz="1700" dirty="0"/>
-              <a:t>, </a:t>
+              <a:t xml:space="preserve">, </a:t>
             </a:r>
           </a:p>
           <a:p>

--- a/data/인공지능/00 - preview.pptx
+++ b/data/인공지능/00 - preview.pptx
@@ -332,7 +332,7 @@
       </p15:notesGuideLst>
     </p:ext>
     <p:ext uri="GoogleSlidesCustomDataVersion2">
-      <go:slidesCustomData xmlns="" xmlns:mc="http://schemas.openxmlformats.org/markup-compatibility/2006" xmlns:mv="urn:schemas-microsoft-com:mac:vml" xmlns:c="http://schemas.openxmlformats.org/drawingml/2006/chart" xmlns:dgm="http://schemas.openxmlformats.org/drawingml/2006/diagram" xmlns:o="urn:schemas-microsoft-com:office:office" xmlns:v="urn:schemas-microsoft-com:vml" xmlns:pvml="urn:schemas-microsoft-com:office:powerpoint" xmlns:com="http://schemas.openxmlformats.org/drawingml/2006/compatibility" xmlns:p14="http://schemas.microsoft.com/office/powerpoint/2010/main" xmlns:p15="http://schemas.microsoft.com/office/powerpoint/2012/main" xmlns:ahyp="http://schemas.microsoft.com/office/drawing/2018/hyperlinkcolor" xmlns:go="http://customooxmlschemas.google.com/" r:id="rId61" roundtripDataSignature="AMtx7mgQh/JTZB+tcnoesXfhZuEldfv5OQ=="/>
+      <go:slidesCustomData xmlns:go="http://customooxmlschemas.google.com/" xmlns:ahyp="http://schemas.microsoft.com/office/drawing/2018/hyperlinkcolor" xmlns:p15="http://schemas.microsoft.com/office/powerpoint/2012/main" xmlns:p14="http://schemas.microsoft.com/office/powerpoint/2010/main" xmlns:com="http://schemas.openxmlformats.org/drawingml/2006/compatibility" xmlns:pvml="urn:schemas-microsoft-com:office:powerpoint" xmlns:v="urn:schemas-microsoft-com:vml" xmlns:o="urn:schemas-microsoft-com:office:office" xmlns:dgm="http://schemas.openxmlformats.org/drawingml/2006/diagram" xmlns:c="http://schemas.openxmlformats.org/drawingml/2006/chart" xmlns:mv="urn:schemas-microsoft-com:mac:vml" xmlns:mc="http://schemas.openxmlformats.org/markup-compatibility/2006" xmlns="" r:id="rId61" roundtripDataSignature="AMtx7mgQh/JTZB+tcnoesXfhZuEldfv5OQ=="/>
     </p:ext>
   </p:extLst>
 </p:presentation>
@@ -9033,7 +9033,7 @@
                 <a:cs typeface="Calibri"/>
                 <a:sym typeface="Calibri"/>
               </a:rPr>
-              <a:t xml:space="preserve">CHAPTER 0 </a:t>
+              <a:t>CHAPTER 0 </a:t>
             </a:r>
             <a:r>
               <a:rPr lang="en-US" altLang="ko-KR" sz="1800" b="0" i="0" u="none" strike="noStrike" cap="none" dirty="0">
@@ -9221,7 +9221,7 @@
         </p:spPr>
         <p:txBody>
           <a:bodyPr spcFirstLastPara="1" wrap="square" lIns="91425" tIns="45700" rIns="91425" bIns="45700" anchor="t" anchorCtr="0">
-            <a:normAutofit lnSpcReduction="10000"/>
+            <a:normAutofit fontScale="92500" lnSpcReduction="10000"/>
           </a:bodyPr>
           <a:lstStyle/>
           <a:p>
@@ -9244,7 +9244,7 @@
             </a:r>
             <a:r>
               <a:rPr lang="ko-KR" sz="2000" dirty="0"/>
-              <a:t xml:space="preserve">: </a:t>
+              <a:t>: </a:t>
             </a:r>
             <a:r>
               <a:rPr lang="ko-KR" altLang="en-US" sz="2000" dirty="0"/>
@@ -9275,7 +9275,7 @@
             </a:r>
             <a:r>
               <a:rPr lang="ko-KR" sz="1700" dirty="0"/>
-              <a:t xml:space="preserve"> 핵심 개념과 실습을 다루는 입문 강의</a:t>
+              <a:t> 핵심 개념과 실습을 다루는 입문 강의</a:t>
             </a:r>
             <a:endParaRPr sz="1700" dirty="0"/>
           </a:p>
@@ -9302,7 +9302,7 @@
             </a:r>
             <a:r>
               <a:rPr lang="ko-KR" sz="1700" dirty="0"/>
-              <a:t xml:space="preserve"> 구글 </a:t>
+              <a:t> 구글 </a:t>
             </a:r>
             <a:r>
               <a:rPr lang="ko-KR" sz="1700" dirty="0" err="1"/>
@@ -9310,7 +9310,7 @@
             </a:r>
             <a:r>
               <a:rPr lang="ko-KR" sz="1700" dirty="0"/>
-              <a:t xml:space="preserve"> 활용한 실습 중심 수업</a:t>
+              <a:t> 활용한 실습 중심 수업</a:t>
             </a:r>
             <a:endParaRPr sz="1700" dirty="0"/>
           </a:p>
@@ -9353,7 +9353,7 @@
             </a:pPr>
             <a:r>
               <a:rPr lang="ko-KR" sz="1700" dirty="0"/>
-              <a:t xml:space="preserve">인공지능과 </a:t>
+              <a:t>인공지능과 </a:t>
             </a:r>
             <a:r>
               <a:rPr lang="ko-KR" sz="1700" dirty="0" err="1"/>
@@ -9361,7 +9361,7 @@
             </a:r>
             <a:r>
               <a:rPr lang="ko-KR" sz="1700" dirty="0"/>
-              <a:t xml:space="preserve"> 개념과 차이를 이해한다</a:t>
+              <a:t> 개념과 차이를 이해한다</a:t>
             </a:r>
             <a:endParaRPr sz="1700" dirty="0"/>
           </a:p>
@@ -9384,7 +9384,7 @@
             </a:pPr>
             <a:r>
               <a:rPr lang="ko-KR" sz="1700" dirty="0"/>
-              <a:t xml:space="preserve">주요 </a:t>
+              <a:t>주요 </a:t>
             </a:r>
             <a:r>
               <a:rPr lang="ko-KR" sz="1700" dirty="0" err="1"/>
@@ -9392,7 +9392,7 @@
             </a:r>
             <a:r>
               <a:rPr lang="ko-KR" sz="1700" dirty="0"/>
-              <a:t xml:space="preserve"> 알고리즘의 원리를 이해하고 구현할 수 있다</a:t>
+              <a:t> 알고리즘의 원리를 이해하고 구현할 수 있다</a:t>
             </a:r>
             <a:endParaRPr sz="1700" dirty="0"/>
           </a:p>
@@ -9419,7 +9419,7 @@
             </a:r>
             <a:r>
               <a:rPr lang="ko-KR" sz="1700" dirty="0"/>
-              <a:t xml:space="preserve"> 활용하여 데이터 분석 문제를 해결할 수 있다</a:t>
+              <a:t> 활용하여 데이터 분석 문제를 해결할 수 있다</a:t>
             </a:r>
             <a:endParaRPr sz="1700" dirty="0"/>
           </a:p>
@@ -9512,7 +9512,7 @@
             </a:r>
             <a:r>
               <a:rPr lang="ko-KR" sz="1700" dirty="0"/>
-              <a:t xml:space="preserve"> 프로그래밍 기초 (변수, </a:t>
+              <a:t> 프로그래밍 기초 (변수, </a:t>
             </a:r>
             <a:r>
               <a:rPr lang="ko-KR" sz="1700" dirty="0" err="1"/>
@@ -9520,7 +9520,7 @@
             </a:r>
             <a:r>
               <a:rPr lang="ko-KR" sz="1700" dirty="0"/>
-              <a:t xml:space="preserve">, </a:t>
+              <a:t>, </a:t>
             </a:r>
             <a:r>
               <a:rPr lang="ko-KR" sz="1700" dirty="0" err="1"/>
@@ -9594,7 +9594,7 @@
             </a:pPr>
             <a:r>
               <a:rPr lang="ko-KR" sz="1700" dirty="0"/>
-              <a:t xml:space="preserve">구글 </a:t>
+              <a:t>구글 </a:t>
             </a:r>
             <a:r>
               <a:rPr lang="ko-KR" sz="1700" dirty="0" err="1"/>
@@ -9610,7 +9610,7 @@
             </a:r>
             <a:r>
               <a:rPr lang="ko-KR" sz="1700" dirty="0"/>
-              <a:t xml:space="preserve">): 웹 브라우저에서 </a:t>
+              <a:t>): 웹 브라우저에서 </a:t>
             </a:r>
             <a:r>
               <a:rPr lang="ko-KR" sz="1700" dirty="0" err="1"/>
@@ -9618,7 +9618,7 @@
             </a:r>
             <a:r>
               <a:rPr lang="ko-KR" sz="1700" dirty="0"/>
-              <a:t xml:space="preserve"> 코드를 실행할 수 있는 무료 환경</a:t>
+              <a:t> 코드를 실행할 수 있는 무료 환경</a:t>
             </a:r>
             <a:endParaRPr sz="1700" dirty="0"/>
           </a:p>
@@ -9770,7 +9770,7 @@
             </a:r>
             <a:r>
               <a:rPr lang="ko-KR"/>
-              <a:t xml:space="preserve"> </a:t>
+              <a:t> </a:t>
             </a:r>
             <a:r>
               <a:rPr lang="ko-KR" dirty="0"/>
@@ -9832,7 +9832,7 @@
                 <a:cs typeface="Malgun Gothic"/>
                 <a:sym typeface="Malgun Gothic"/>
               </a:rPr>
-              <a:t xml:space="preserve">CHAPTER 01: </a:t>
+              <a:t>CHAPTER 01: </a:t>
             </a:r>
             <a:r>
               <a:rPr lang="ko-KR" altLang="en-US" sz="1800" b="1" dirty="0">
@@ -9876,7 +9876,7 @@
                 <a:cs typeface="Malgun Gothic"/>
                 <a:sym typeface="Malgun Gothic"/>
               </a:rPr>
-              <a:t xml:space="preserve">인공지능, </a:t>
+              <a:t>인공지능, </a:t>
             </a:r>
             <a:r>
               <a:rPr lang="ko-KR" sz="1400" b="0" i="0" u="none" strike="noStrike" cap="none" dirty="0" err="1">
@@ -9900,7 +9900,7 @@
                 <a:cs typeface="Malgun Gothic"/>
                 <a:sym typeface="Malgun Gothic"/>
               </a:rPr>
-              <a:t xml:space="preserve">, </a:t>
+              <a:t>, </a:t>
             </a:r>
             <a:r>
               <a:rPr lang="ko-KR" sz="1400" b="0" i="0" u="none" strike="noStrike" cap="none" dirty="0" err="1">
@@ -9924,7 +9924,7 @@
                 <a:cs typeface="Malgun Gothic"/>
                 <a:sym typeface="Malgun Gothic"/>
               </a:rPr>
-              <a:t xml:space="preserve"> 차이점을 이해합니다.</a:t>
+              <a:t> 차이점을 이해합니다.</a:t>
             </a:r>
             <a:endParaRPr dirty="0"/>
           </a:p>
@@ -9956,7 +9956,7 @@
                 <a:cs typeface="Malgun Gothic"/>
                 <a:sym typeface="Malgun Gothic"/>
               </a:rPr>
-              <a:t xml:space="preserve">구글 </a:t>
+              <a:t>구글 </a:t>
             </a:r>
             <a:r>
               <a:rPr lang="ko-KR" sz="1400" b="0" i="0" u="none" strike="noStrike" cap="none" dirty="0" err="1">
@@ -9980,7 +9980,7 @@
                 <a:cs typeface="Malgun Gothic"/>
                 <a:sym typeface="Malgun Gothic"/>
               </a:rPr>
-              <a:t xml:space="preserve"> 사용법을 배웁니다.</a:t>
+              <a:t> 사용법을 배웁니다.</a:t>
             </a:r>
             <a:endParaRPr dirty="0"/>
           </a:p>
@@ -10012,7 +10012,7 @@
                 <a:cs typeface="Malgun Gothic"/>
                 <a:sym typeface="Malgun Gothic"/>
               </a:rPr>
-              <a:t xml:space="preserve">첫 번째 </a:t>
+              <a:t>첫 번째 </a:t>
             </a:r>
             <a:r>
               <a:rPr lang="ko-KR" sz="1400" b="0" i="0" u="none" strike="noStrike" cap="none" dirty="0" err="1">
@@ -10036,7 +10036,7 @@
                 <a:cs typeface="Malgun Gothic"/>
                 <a:sym typeface="Malgun Gothic"/>
               </a:rPr>
-              <a:t xml:space="preserve"> 프로그램을 만들고 </a:t>
+              <a:t> 프로그램을 만들고 </a:t>
             </a:r>
             <a:r>
               <a:rPr lang="ko-KR" sz="1400" b="0" i="0" u="none" strike="noStrike" cap="none" dirty="0" err="1">
@@ -10060,7 +10060,7 @@
                 <a:cs typeface="Malgun Gothic"/>
                 <a:sym typeface="Malgun Gothic"/>
               </a:rPr>
-              <a:t xml:space="preserve"> 기본 작동 원리를 이해합니다.</a:t>
+              <a:t> 기본 작동 원리를 이해합니다.</a:t>
             </a:r>
             <a:endParaRPr sz="1400" b="0" i="0" u="none" strike="noStrike" cap="none" dirty="0">
               <a:solidFill>
@@ -10144,7 +10144,7 @@
                 <a:cs typeface="Malgun Gothic"/>
                 <a:sym typeface="Malgun Gothic"/>
               </a:rPr>
-              <a:t xml:space="preserve"> 알고리즘에 주입할 데이터를 준비하는 방법을 배웁니다.</a:t>
+              <a:t> 알고리즘에 주입할 데이터를 준비하는 방법을 배웁니다.</a:t>
             </a:r>
             <a:endParaRPr dirty="0"/>
           </a:p>
@@ -10333,7 +10333,7 @@
                 <a:cs typeface="Malgun Gothic"/>
                 <a:sym typeface="Malgun Gothic"/>
               </a:rPr>
-              <a:t xml:space="preserve">CHAPTER 04: </a:t>
+              <a:t>CHAPTER 04: </a:t>
             </a:r>
             <a:r>
               <a:rPr lang="ko-KR" altLang="en-US" sz="1800" b="1" dirty="0">
@@ -10389,7 +10389,7 @@
                 <a:cs typeface="Malgun Gothic"/>
                 <a:sym typeface="Malgun Gothic"/>
               </a:rPr>
-              <a:t xml:space="preserve">, </a:t>
+              <a:t>, </a:t>
             </a:r>
             <a:r>
               <a:rPr lang="ko-KR" altLang="en-US" sz="1400" b="0" i="0" u="none" strike="noStrike" cap="none" dirty="0">
@@ -10489,7 +10489,7 @@
                 <a:cs typeface="Malgun Gothic"/>
                 <a:sym typeface="Malgun Gothic"/>
               </a:rPr>
-              <a:t xml:space="preserve">CHAPTER 05: </a:t>
+              <a:t>CHAPTER 05: </a:t>
             </a:r>
             <a:r>
               <a:rPr lang="ko-KR" altLang="en-US" sz="1800" b="1" dirty="0">
@@ -10577,7 +10577,7 @@
                 <a:cs typeface="Malgun Gothic"/>
                 <a:sym typeface="Malgun Gothic"/>
               </a:rPr>
-              <a:t xml:space="preserve">알고리즘의 성능을 최대화하기 위한 </a:t>
+              <a:t>알고리즘의 성능을 최대화하기 위한 </a:t>
             </a:r>
             <a:r>
               <a:rPr lang="ko-KR" altLang="en-US" sz="1400" b="0" i="0" u="none" strike="noStrike" cap="none" dirty="0" err="1">
@@ -10601,7 +10601,7 @@
                 <a:cs typeface="Malgun Gothic"/>
                 <a:sym typeface="Malgun Gothic"/>
               </a:rPr>
-              <a:t xml:space="preserve"> 튜닝을 실습합니다</a:t>
+              <a:t> 튜닝을 실습합니다</a:t>
             </a:r>
             <a:r>
               <a:rPr lang="en-US" altLang="ko-KR" sz="1400" b="0" i="0" u="none" strike="noStrike" cap="none" dirty="0">
@@ -10689,7 +10689,7 @@
                 <a:cs typeface="Malgun Gothic"/>
                 <a:sym typeface="Malgun Gothic"/>
               </a:rPr>
-              <a:t xml:space="preserve">CHAPTER 06: </a:t>
+              <a:t>CHAPTER 06: </a:t>
             </a:r>
             <a:r>
               <a:rPr lang="ko-KR" altLang="en-US" sz="1800" b="1" dirty="0">
@@ -10733,7 +10733,7 @@
                 <a:cs typeface="Malgun Gothic"/>
                 <a:sym typeface="Malgun Gothic"/>
               </a:rPr>
-              <a:t xml:space="preserve">타깃이 없는 </a:t>
+              <a:t>타깃이 없는 </a:t>
             </a:r>
             <a:r>
               <a:rPr lang="ko-KR" altLang="en-US" sz="1400" b="0" i="0" dirty="0">
@@ -10757,7 +10757,7 @@
                 <a:ea typeface="Malgun Gothic" panose="020B0503020000020004" pitchFamily="50" charset="-127"/>
                 <a:cs typeface="Malgun Gothic" panose="020B0503020000020004" pitchFamily="50" charset="-127"/>
               </a:rPr>
-              <a:t xml:space="preserve">. </a:t>
+              <a:t>. </a:t>
             </a:r>
             <a:endParaRPr lang="ko-KR" altLang="en-US" sz="1400" b="0" i="0" dirty="0">
               <a:solidFill>
@@ -10794,7 +10794,7 @@
                 <a:ea typeface="Malgun Gothic" panose="020B0503020000020004" pitchFamily="50" charset="-127"/>
                 <a:cs typeface="Malgun Gothic" panose="020B0503020000020004" pitchFamily="50" charset="-127"/>
               </a:rPr>
-              <a:t xml:space="preserve">대표적인 군집 알고리즘인 </a:t>
+              <a:t>대표적인 군집 알고리즘인 </a:t>
             </a:r>
             <a:r>
               <a:rPr lang="en-US" altLang="ko-KR" sz="1400" b="0" i="0" dirty="0">
@@ -10818,7 +10818,7 @@
                 <a:ea typeface="Malgun Gothic" panose="020B0503020000020004" pitchFamily="50" charset="-127"/>
                 <a:cs typeface="Malgun Gothic" panose="020B0503020000020004" pitchFamily="50" charset="-127"/>
               </a:rPr>
-              <a:t xml:space="preserve">평균과 </a:t>
+              <a:t>평균과 </a:t>
             </a:r>
             <a:r>
               <a:rPr lang="en-US" altLang="ko-KR" sz="1400" b="0" i="0" dirty="0">
@@ -11121,7 +11121,7 @@
             </a:pPr>
             <a:r>
               <a:rPr lang="ko-KR" sz="1700" dirty="0"/>
-              <a:t xml:space="preserve">혼자 공부하는 </a:t>
+              <a:t>혼자 공부하는 </a:t>
             </a:r>
             <a:r>
               <a:rPr lang="ko-KR" sz="1700" dirty="0" err="1"/>
@@ -11129,7 +11129,7 @@
             </a:r>
             <a:r>
               <a:rPr lang="ko-KR" sz="1700" dirty="0"/>
-              <a:t xml:space="preserve"> (개정판)</a:t>
+              <a:t> (개정판)</a:t>
             </a:r>
             <a:endParaRPr sz="1700" dirty="0"/>
           </a:p>
@@ -11152,7 +11152,7 @@
             </a:pPr>
             <a:r>
               <a:rPr lang="ko-KR" sz="1700" dirty="0"/>
-              <a:t xml:space="preserve">지은이: 박해선 / 출판사: </a:t>
+              <a:t>지은이: 박해선 / 출판사: </a:t>
             </a:r>
             <a:r>
               <a:rPr lang="ko-KR" sz="1700" dirty="0" err="1"/>
@@ -11203,7 +11203,7 @@
             </a:r>
             <a:r>
               <a:rPr lang="ko-KR" sz="1700" dirty="0"/>
-              <a:t xml:space="preserve"> (CHAPTER 01~06)</a:t>
+              <a:t> (CHAPTER 01~06)</a:t>
             </a:r>
             <a:endParaRPr lang="en-US" altLang="ko-KR" sz="1700" dirty="0"/>
           </a:p>
@@ -11246,7 +11246,7 @@
             </a:r>
             <a:r>
               <a:rPr lang="ko-KR" sz="1700" dirty="0"/>
-              <a:t xml:space="preserve"> (CHAPTER 07~10)</a:t>
+              <a:t> (CHAPTER 07~10)</a:t>
             </a:r>
             <a:endParaRPr lang="en-US" altLang="ko-KR" sz="1700" dirty="0"/>
           </a:p>
@@ -11271,7 +11271,7 @@
             </a:r>
             <a:r>
               <a:rPr lang="en-US" altLang="ko-KR" sz="1500" dirty="0"/>
-              <a:t xml:space="preserve"> </a:t>
+              <a:t> </a:t>
             </a:r>
             <a:r>
               <a:rPr lang="ko-KR" altLang="en-US" sz="1500" dirty="0" err="1"/>
@@ -11279,7 +11279,7 @@
             </a:r>
             <a:r>
               <a:rPr lang="ko-KR" altLang="en-US" sz="1500" dirty="0"/>
-              <a:t xml:space="preserve"> 교과에서 다루는 범위</a:t>
+              <a:t> 교과에서 다루는 범위</a:t>
             </a:r>
             <a:endParaRPr sz="1500" dirty="0"/>
           </a:p>
@@ -11322,7 +11322,7 @@
             </a:pPr>
             <a:r>
               <a:rPr lang="ko-KR" sz="1700" dirty="0"/>
-              <a:t xml:space="preserve">CHAPTER 01: </a:t>
+              <a:t>CHAPTER 01: </a:t>
             </a:r>
             <a:r>
               <a:rPr lang="ko-KR" altLang="en-US" sz="1700" dirty="0"/>
@@ -11561,7 +11561,7 @@
             </a:r>
             <a:r>
               <a:rPr lang="ko-KR" dirty="0"/>
-              <a:t xml:space="preserve"> 강의 계획 (1)</a:t>
+              <a:t> 강의 계획 (1)</a:t>
             </a:r>
             <a:endParaRPr dirty="0"/>
           </a:p>
@@ -11680,7 +11680,7 @@
             </a:pPr>
             <a:r>
               <a:rPr lang="ko-KR" sz="1600" dirty="0"/>
-              <a:t xml:space="preserve">강의 개요, 평가 방법 안내, 구글 </a:t>
+              <a:t>강의 개요, 평가 방법 안내, 구글 </a:t>
             </a:r>
             <a:r>
               <a:rPr lang="ko-KR" sz="1600" dirty="0" err="1"/>
@@ -11688,7 +11688,7 @@
             </a:r>
             <a:r>
               <a:rPr lang="ko-KR" sz="1600" dirty="0"/>
-              <a:t xml:space="preserve"> 실습 환경 설정</a:t>
+              <a:t> 실습 환경 설정</a:t>
             </a:r>
             <a:endParaRPr sz="1600" dirty="0"/>
           </a:p>
@@ -11708,7 +11708,7 @@
             </a:pPr>
             <a:r>
               <a:rPr lang="ko-KR" sz="1800" dirty="0"/>
-              <a:t xml:space="preserve">2주차: CHAPTER 01 </a:t>
+              <a:t>2주차: CHAPTER 01 </a:t>
             </a:r>
             <a:r>
               <a:rPr lang="ko-KR" altLang="en-US" sz="1800" dirty="0"/>
@@ -11716,7 +11716,7 @@
             </a:r>
             <a:r>
               <a:rPr lang="ko-KR" sz="1800" dirty="0"/>
-              <a:t xml:space="preserve"> (1)</a:t>
+              <a:t> (1)</a:t>
             </a:r>
             <a:endParaRPr sz="1800" dirty="0"/>
           </a:p>
@@ -11739,7 +11739,7 @@
             </a:pPr>
             <a:r>
               <a:rPr lang="ko-KR" sz="1600" dirty="0"/>
-              <a:t xml:space="preserve">인공지능과 </a:t>
+              <a:t>인공지능과 </a:t>
             </a:r>
             <a:r>
               <a:rPr lang="ko-KR" sz="1600" dirty="0" err="1"/>
@@ -11747,7 +11747,7 @@
             </a:r>
             <a:r>
               <a:rPr lang="ko-KR" sz="1600" dirty="0"/>
-              <a:t xml:space="preserve"> 개념 / </a:t>
+              <a:t> 개념 / </a:t>
             </a:r>
             <a:r>
               <a:rPr lang="ko-KR" sz="1600" dirty="0" err="1"/>
@@ -11755,7 +11755,7 @@
             </a:r>
             <a:r>
               <a:rPr lang="ko-KR" sz="1600" dirty="0"/>
-              <a:t xml:space="preserve"> 주피터 노트북</a:t>
+              <a:t> 주피터 노트북</a:t>
             </a:r>
             <a:endParaRPr sz="1600" dirty="0"/>
           </a:p>
@@ -11775,7 +11775,7 @@
             </a:pPr>
             <a:r>
               <a:rPr lang="ko-KR" sz="1800" dirty="0"/>
-              <a:t xml:space="preserve">3주차: CHAPTER 01 </a:t>
+              <a:t>3주차: CHAPTER 01 </a:t>
             </a:r>
             <a:r>
               <a:rPr lang="ko-KR" altLang="en-US" sz="1800" dirty="0"/>
@@ -11783,7 +11783,7 @@
             </a:r>
             <a:r>
               <a:rPr lang="ko-KR" sz="1800" dirty="0"/>
-              <a:t xml:space="preserve"> (2)</a:t>
+              <a:t> (2)</a:t>
             </a:r>
             <a:endParaRPr sz="1800" dirty="0"/>
           </a:p>
@@ -11806,7 +11806,7 @@
             </a:pPr>
             <a:r>
               <a:rPr lang="ko-KR" sz="1600" dirty="0"/>
-              <a:t xml:space="preserve">마켓과 </a:t>
+              <a:t>마켓과 </a:t>
             </a:r>
             <a:r>
               <a:rPr lang="ko-KR" sz="1600" dirty="0" err="1"/>
@@ -11853,7 +11853,7 @@
             </a:pPr>
             <a:r>
               <a:rPr lang="ko-KR" sz="1600" dirty="0"/>
-              <a:t xml:space="preserve">훈련 세트와 테스트 세트 / 데이터 </a:t>
+              <a:t>훈련 세트와 테스트 세트 / 데이터 </a:t>
             </a:r>
             <a:r>
               <a:rPr lang="ko-KR" sz="1600" dirty="0" err="1"/>
@@ -12089,7 +12089,7 @@
             </a:r>
             <a:r>
               <a:rPr lang="ko-KR" dirty="0"/>
-              <a:t xml:space="preserve"> 강의 계획 (2)</a:t>
+              <a:t> 강의 계획 (2)</a:t>
             </a:r>
             <a:endParaRPr dirty="0"/>
           </a:p>
@@ -12599,7 +12599,7 @@
         </p:spPr>
         <p:txBody>
           <a:bodyPr spcFirstLastPara="1" wrap="square" lIns="91425" tIns="45700" rIns="91425" bIns="45700" anchor="t" anchorCtr="0">
-            <a:normAutofit lnSpcReduction="10000"/>
+            <a:normAutofit fontScale="85000" lnSpcReduction="20000"/>
           </a:bodyPr>
           <a:lstStyle/>
           <a:p>
@@ -12633,7 +12633,7 @@
             </a:r>
             <a:r>
               <a:rPr lang="en-US" altLang="ko-KR" sz="1700" dirty="0"/>
-              <a:t>: 30</a:t>
+              <a:t>: 35</a:t>
             </a:r>
             <a:r>
               <a:rPr lang="ko-KR" altLang="en-US" sz="1700" dirty="0"/>
@@ -12674,21 +12674,18 @@
               <a:buSzPct val="100000"/>
             </a:pPr>
             <a:r>
+              <a:rPr lang="ko-KR" altLang="en-US" sz="1700" dirty="0"/>
+              <a:t>퀴즈</a:t>
+            </a:r>
+            <a:r>
               <a:rPr lang="en-US" altLang="ko-KR" sz="1700" dirty="0"/>
-              <a:t xml:space="preserve">AI </a:t>
-            </a:r>
-            <a:r>
-              <a:rPr lang="ko-KR" altLang="en-US" sz="1700" dirty="0"/>
-              <a:t>프로젝트</a:t>
-            </a:r>
-            <a:r>
-              <a:rPr lang="en-US" altLang="ko-KR" sz="1700" dirty="0"/>
-              <a:t>: 15</a:t>
+              <a:t>: 10</a:t>
             </a:r>
             <a:r>
               <a:rPr lang="ko-KR" altLang="en-US" sz="1700" dirty="0"/>
               <a:t>점</a:t>
             </a:r>
+            <a:endParaRPr lang="en-US" altLang="ko-KR" sz="1700" dirty="0"/>
           </a:p>
           <a:p>
             <a:pPr marL="685800" lvl="1" indent="-228631">
@@ -12702,7 +12699,7 @@
             </a:pPr>
             <a:r>
               <a:rPr lang="ko-KR" altLang="en-US" sz="1700" dirty="0"/>
-              <a:t>퀴즈 및 과제</a:t>
+              <a:t>기말 프로젝트</a:t>
             </a:r>
             <a:r>
               <a:rPr lang="en-US" altLang="ko-KR" sz="1700" dirty="0"/>
@@ -12790,11 +12787,11 @@
             </a:r>
             <a:r>
               <a:rPr lang="en-US" altLang="ko-KR" sz="1700" dirty="0"/>
-              <a:t xml:space="preserve">: CHAPTER 01~04 </a:t>
+              <a:t>: CHAPTER 01~04 </a:t>
             </a:r>
             <a:r>
               <a:rPr lang="ko-KR" altLang="en-US" sz="1700" dirty="0"/>
-              <a:t xml:space="preserve">범위 </a:t>
+              <a:t>범위 </a:t>
             </a:r>
             <a:r>
               <a:rPr lang="en-US" altLang="ko-KR" sz="1700" dirty="0"/>
@@ -12826,23 +12823,15 @@
             </a:r>
             <a:r>
               <a:rPr lang="en-US" altLang="ko-KR" sz="1700" dirty="0"/>
-              <a:t xml:space="preserve">: CHAPTER 05~06 (50%) + </a:t>
+              <a:t>: CHAPTER 05~06 (50%) + </a:t>
             </a:r>
             <a:r>
               <a:rPr lang="ko-KR" altLang="en-US" sz="1700" dirty="0"/>
-              <a:t xml:space="preserve">바이브코딩 </a:t>
+              <a:t>바이브코딩 </a:t>
             </a:r>
             <a:r>
               <a:rPr lang="en-US" altLang="ko-KR" sz="1700" dirty="0"/>
-              <a:t>(50%) (15</a:t>
-            </a:r>
-            <a:r>
-              <a:rPr lang="ko-KR" altLang="en-US" sz="1700" dirty="0"/>
-              <a:t>주차</a:t>
-            </a:r>
-            <a:r>
-              <a:rPr lang="en-US" altLang="ko-KR" sz="1700" dirty="0"/>
-              <a:t>)</a:t>
+              <a:t>(50%)</a:t>
             </a:r>
             <a:endParaRPr lang="ko-KR" altLang="en-US" sz="1700" dirty="0"/>
           </a:p>
@@ -12873,15 +12862,15 @@
             </a:pPr>
             <a:r>
               <a:rPr lang="ko-KR" altLang="en-US" sz="1700" dirty="0"/>
-              <a:t xml:space="preserve">매 </a:t>
+              <a:t>매 </a:t>
             </a:r>
             <a:r>
               <a:rPr lang="en-US" altLang="ko-KR" sz="1700" dirty="0"/>
-              <a:t xml:space="preserve">CHAPTER </a:t>
+              <a:t>CHAPTER </a:t>
             </a:r>
             <a:r>
               <a:rPr lang="ko-KR" altLang="en-US" sz="1700" dirty="0"/>
-              <a:t xml:space="preserve">종료 후 코딩 과제 제출 </a:t>
+              <a:t>종료 후 코딩 과제 제출 </a:t>
             </a:r>
             <a:r>
               <a:rPr lang="en-US" altLang="ko-KR" sz="1700" dirty="0"/>
@@ -12905,11 +12894,11 @@
             </a:r>
             <a:r>
               <a:rPr lang="en-US" altLang="ko-KR" sz="1700" dirty="0"/>
-              <a:t xml:space="preserve">: </a:t>
+              <a:t>: </a:t>
             </a:r>
             <a:r>
               <a:rPr lang="ko-KR" altLang="en-US" sz="1700" dirty="0"/>
-              <a:t xml:space="preserve">해당 주차 종료 후 </a:t>
+              <a:t>해당 주차 종료 후 </a:t>
             </a:r>
             <a:r>
               <a:rPr lang="en-US" altLang="ko-KR" sz="1700" dirty="0"/>
@@ -12932,7 +12921,7 @@
             </a:pPr>
             <a:r>
               <a:rPr lang="en-US" altLang="ko-KR" dirty="0"/>
-              <a:t xml:space="preserve">AI </a:t>
+              <a:t>AI </a:t>
             </a:r>
             <a:r>
               <a:rPr lang="ko-KR" altLang="en-US" dirty="0"/>
@@ -12996,7 +12985,7 @@
             </a:pPr>
             <a:r>
               <a:rPr lang="ko-KR" altLang="en-US" sz="1700" dirty="0"/>
-              <a:t xml:space="preserve">지각 </a:t>
+              <a:t>지각 </a:t>
             </a:r>
             <a:r>
               <a:rPr lang="en-US" altLang="ko-KR" sz="1700" dirty="0"/>
@@ -13004,15 +12993,15 @@
             </a:r>
             <a:r>
               <a:rPr lang="ko-KR" altLang="en-US" sz="1700" dirty="0"/>
-              <a:t xml:space="preserve">회 </a:t>
+              <a:t>회 </a:t>
             </a:r>
             <a:r>
               <a:rPr lang="en-US" altLang="ko-KR" sz="1700" dirty="0"/>
-              <a:t xml:space="preserve">= </a:t>
+              <a:t>= </a:t>
             </a:r>
             <a:r>
               <a:rPr lang="ko-KR" altLang="en-US" sz="1700" dirty="0"/>
-              <a:t xml:space="preserve">결석 </a:t>
+              <a:t>결석 </a:t>
             </a:r>
             <a:r>
               <a:rPr lang="en-US" altLang="ko-KR" sz="1700" dirty="0"/>
@@ -13024,11 +13013,11 @@
             </a:r>
             <a:r>
               <a:rPr lang="en-US" altLang="ko-KR" sz="1700" dirty="0"/>
-              <a:t xml:space="preserve">, </a:t>
+              <a:t>, </a:t>
             </a:r>
             <a:r>
               <a:rPr lang="ko-KR" altLang="en-US" sz="1700" dirty="0"/>
-              <a:t xml:space="preserve">결석 </a:t>
+              <a:t>결석 </a:t>
             </a:r>
             <a:r>
               <a:rPr lang="en-US" altLang="ko-KR" sz="1700" dirty="0"/>
@@ -13036,7 +13025,7 @@
             </a:r>
             <a:r>
               <a:rPr lang="ko-KR" altLang="en-US" sz="1700" dirty="0"/>
-              <a:t xml:space="preserve">회까지 </a:t>
+              <a:t>회까지 </a:t>
             </a:r>
             <a:r>
               <a:rPr lang="en-US" altLang="ko-KR" sz="1700" dirty="0"/>
@@ -13048,11 +13037,11 @@
             </a:r>
             <a:r>
               <a:rPr lang="en-US" altLang="ko-KR" sz="1700" dirty="0"/>
-              <a:t xml:space="preserve">, </a:t>
+              <a:t>, </a:t>
             </a:r>
             <a:r>
               <a:rPr lang="ko-KR" altLang="en-US" sz="1700" dirty="0"/>
-              <a:t xml:space="preserve">결석 </a:t>
+              <a:t>결석 </a:t>
             </a:r>
             <a:r>
               <a:rPr lang="en-US" altLang="ko-KR" sz="1700" dirty="0"/>
@@ -13060,7 +13049,7 @@
             </a:r>
             <a:r>
               <a:rPr lang="ko-KR" altLang="en-US" sz="1700" dirty="0"/>
-              <a:t xml:space="preserve">회부터 결석 </a:t>
+              <a:t>회부터 결석 </a:t>
             </a:r>
             <a:r>
               <a:rPr lang="en-US" altLang="ko-KR" sz="1700" dirty="0"/>
@@ -13068,7 +13057,7 @@
             </a:r>
             <a:r>
               <a:rPr lang="ko-KR" altLang="en-US" sz="1700" dirty="0"/>
-              <a:t xml:space="preserve">회마다 </a:t>
+              <a:t>회마다 </a:t>
             </a:r>
             <a:r>
               <a:rPr lang="en-US" altLang="ko-KR" sz="1700" dirty="0"/>
@@ -13080,7 +13069,7 @@
             </a:r>
             <a:r>
               <a:rPr lang="ko-KR" altLang="en-US" sz="1700" dirty="0"/>
-              <a:t xml:space="preserve"> 차감</a:t>
+              <a:t> 차감</a:t>
             </a:r>
           </a:p>
         </p:txBody>
@@ -13277,7 +13266,7 @@
             </a:pPr>
             <a:r>
               <a:rPr lang="ko-KR" sz="1700" dirty="0"/>
-              <a:t xml:space="preserve">이론 강의 + 실습 (구글 </a:t>
+              <a:t>이론 강의 + 실습 (구글 </a:t>
             </a:r>
             <a:r>
               <a:rPr lang="ko-KR" sz="1700" dirty="0" err="1"/>
@@ -13331,7 +13320,7 @@
             </a:pPr>
             <a:r>
               <a:rPr lang="ko-KR" sz="1700" dirty="0"/>
-              <a:t xml:space="preserve">교재 코드는 구글 </a:t>
+              <a:t>교재 코드는 구글 </a:t>
             </a:r>
             <a:r>
               <a:rPr lang="ko-KR" sz="1700" dirty="0" err="1"/>
@@ -13339,7 +13328,7 @@
             </a:r>
             <a:r>
               <a:rPr lang="ko-KR" sz="1700" dirty="0"/>
-              <a:t xml:space="preserve"> 직접 실행하며 학습</a:t>
+              <a:t> 직접 실행하며 학습</a:t>
             </a:r>
             <a:endParaRPr sz="1700" dirty="0"/>
           </a:p>
@@ -13429,7 +13418,7 @@
             </a:r>
             <a:r>
               <a:rPr lang="en-US" altLang="ko-KR" sz="1700" dirty="0"/>
-              <a:t xml:space="preserve">, </a:t>
+              <a:t>, </a:t>
             </a:r>
             <a:r>
               <a:rPr lang="ko-KR" altLang="en-US" sz="1700" dirty="0" err="1"/>
@@ -13437,7 +13426,7 @@
             </a:r>
             <a:r>
               <a:rPr lang="en-US" altLang="ko-KR" sz="1700" dirty="0"/>
-              <a:t xml:space="preserve"> </a:t>
+              <a:t> </a:t>
             </a:r>
             <a:r>
               <a:rPr lang="ko-KR" altLang="en-US" sz="1700" dirty="0"/>
@@ -13464,7 +13453,7 @@
             </a:pPr>
             <a:r>
               <a:rPr lang="en-US" altLang="ko-KR" sz="1700" dirty="0"/>
-              <a:t xml:space="preserve">e-mail: </a:t>
+              <a:t>e-mail: </a:t>
             </a:r>
             <a:r>
               <a:rPr lang="en-US" sz="1700" dirty="0">
@@ -13474,7 +13463,7 @@
             </a:r>
             <a:r>
               <a:rPr lang="en-US" sz="1700" dirty="0"/>
-              <a:t xml:space="preserve">, </a:t>
+              <a:t>, </a:t>
             </a:r>
           </a:p>
           <a:p>

--- a/data/인공지능/00 - preview.pptx
+++ b/data/인공지능/00 - preview.pptx
@@ -11714,10 +11714,6 @@
               <a:rPr lang="ko-KR" altLang="en-US" sz="1800" dirty="0"/>
               <a:t>인공지능 개요</a:t>
             </a:r>
-            <a:r>
-              <a:rPr lang="ko-KR" sz="1800" dirty="0"/>
-              <a:t> (1)</a:t>
-            </a:r>
             <a:endParaRPr sz="1800" dirty="0"/>
           </a:p>
           <a:p>
@@ -11774,16 +11770,12 @@
               <a:buChar char="◦"/>
             </a:pPr>
             <a:r>
+              <a:rPr lang="en-US" altLang="ko-KR" sz="1800" dirty="0"/>
+              <a:t>3</a:t>
+            </a:r>
+            <a:r>
               <a:rPr lang="ko-KR" sz="1800" dirty="0"/>
-              <a:t>3주차: CHAPTER 01 </a:t>
-            </a:r>
-            <a:r>
-              <a:rPr lang="ko-KR" altLang="en-US" sz="1800" dirty="0"/>
-              <a:t>인공지능 개요</a:t>
-            </a:r>
-            <a:r>
-              <a:rPr lang="ko-KR" sz="1800" dirty="0"/>
-              <a:t> (2)</a:t>
+              <a:t>주차: CHAPTER 02 데이터 다루기</a:t>
             </a:r>
             <a:endParaRPr sz="1800" dirty="0"/>
           </a:p>
@@ -11806,11 +11798,11 @@
             </a:pPr>
             <a:r>
               <a:rPr lang="ko-KR" sz="1600" dirty="0"/>
-              <a:t>마켓과 </a:t>
+              <a:t>훈련 세트와 테스트 세트 / 데이터 </a:t>
             </a:r>
             <a:r>
               <a:rPr lang="ko-KR" sz="1600" dirty="0" err="1"/>
-              <a:t>머신러닝</a:t>
+              <a:t>전처리</a:t>
             </a:r>
             <a:endParaRPr sz="1600" dirty="0"/>
           </a:p>
@@ -11829,8 +11821,12 @@
               <a:buChar char="◦"/>
             </a:pPr>
             <a:r>
+              <a:rPr lang="en-US" altLang="ko-KR" sz="1800" dirty="0"/>
+              <a:t>4</a:t>
+            </a:r>
+            <a:r>
               <a:rPr lang="ko-KR" sz="1800" dirty="0"/>
-              <a:t>4주차: CHAPTER 02 데이터 다루기</a:t>
+              <a:t>주차: CHAPTER 03 회귀 알고리즘과 모델 규제 (1)</a:t>
             </a:r>
             <a:endParaRPr sz="1800" dirty="0"/>
           </a:p>
@@ -11853,11 +11849,7 @@
             </a:pPr>
             <a:r>
               <a:rPr lang="ko-KR" sz="1600" dirty="0"/>
-              <a:t>훈련 세트와 테스트 세트 / 데이터 </a:t>
-            </a:r>
-            <a:r>
-              <a:rPr lang="ko-KR" sz="1600" dirty="0" err="1"/>
-              <a:t>전처리</a:t>
+              <a:t>k-최근접 이웃 회귀 / 선형 회귀</a:t>
             </a:r>
             <a:endParaRPr sz="1600" dirty="0"/>
           </a:p>
@@ -11876,8 +11868,12 @@
               <a:buChar char="◦"/>
             </a:pPr>
             <a:r>
+              <a:rPr lang="en-US" altLang="ko-KR" sz="1800" dirty="0"/>
+              <a:t>5</a:t>
+            </a:r>
+            <a:r>
               <a:rPr lang="ko-KR" sz="1800" dirty="0"/>
-              <a:t>5주차: CHAPTER 03 회귀 알고리즘과 모델 규제 (1)</a:t>
+              <a:t>주차: CHAPTER 03 회귀 알고리즘과 모델 규제 (2)</a:t>
             </a:r>
             <a:endParaRPr sz="1800" dirty="0"/>
           </a:p>
@@ -11900,7 +11896,7 @@
             </a:pPr>
             <a:r>
               <a:rPr lang="ko-KR" sz="1600" dirty="0"/>
-              <a:t>k-최근접 이웃 회귀 / 선형 회귀</a:t>
+              <a:t>특성 공학과 규제</a:t>
             </a:r>
             <a:endParaRPr sz="1600" dirty="0"/>
           </a:p>
@@ -11919,8 +11915,16 @@
               <a:buChar char="◦"/>
             </a:pPr>
             <a:r>
+              <a:rPr lang="en-US" altLang="ko-KR" sz="1800" dirty="0"/>
+              <a:t>6</a:t>
+            </a:r>
+            <a:r>
               <a:rPr lang="ko-KR" sz="1800" dirty="0"/>
-              <a:t>6주차: CHAPTER 03 회귀 알고리즘과 모델 규제 (2)</a:t>
+              <a:t>주차: CHAPTER 04 다양한 분류 알고리즘</a:t>
+            </a:r>
+            <a:r>
+              <a:rPr lang="en-US" altLang="ko-KR" sz="1800" dirty="0"/>
+              <a:t> (1)</a:t>
             </a:r>
             <a:endParaRPr sz="1800" dirty="0"/>
           </a:p>
@@ -11943,50 +11947,63 @@
             </a:pPr>
             <a:r>
               <a:rPr lang="ko-KR" sz="1600" dirty="0"/>
-              <a:t>특성 공학과 규제</a:t>
-            </a:r>
-            <a:endParaRPr sz="1600" dirty="0"/>
-          </a:p>
-          <a:p>
-            <a:pPr marL="228600" lvl="0" indent="-228600" algn="l" rtl="0">
+              <a:t> 확률적 경사 </a:t>
+            </a:r>
+            <a:r>
+              <a:rPr lang="ko-KR" sz="1600" dirty="0" err="1"/>
+              <a:t>하강법</a:t>
+            </a:r>
+            <a:endParaRPr lang="en-US" altLang="ko-KR" sz="1600" dirty="0"/>
+          </a:p>
+          <a:p>
+            <a:pPr marL="228600" lvl="0" indent="-228600">
               <a:lnSpc>
                 <a:spcPct val="125000"/>
               </a:lnSpc>
               <a:spcBef>
                 <a:spcPts val="300"/>
               </a:spcBef>
-              <a:spcAft>
-                <a:spcPts val="0"/>
-              </a:spcAft>
               <a:buSzPct val="100000"/>
-              <a:buChar char="◦"/>
-            </a:pPr>
-            <a:r>
-              <a:rPr lang="ko-KR" sz="1800" dirty="0"/>
-              <a:t>7주차: CHAPTER 04 다양한 분류 알고리즘</a:t>
-            </a:r>
-            <a:endParaRPr sz="1800" dirty="0"/>
-          </a:p>
-          <a:p>
-            <a:pPr marL="685800" lvl="1" indent="-228631" algn="l" rtl="0">
+            </a:pPr>
+            <a:r>
+              <a:rPr lang="en-US" altLang="ko-KR" sz="1800" dirty="0"/>
+              <a:t>7</a:t>
+            </a:r>
+            <a:r>
+              <a:rPr lang="ko-KR" altLang="en-US" sz="1800" dirty="0"/>
+              <a:t>주차</a:t>
+            </a:r>
+            <a:r>
+              <a:rPr lang="en-US" altLang="ko-KR" sz="1800" dirty="0"/>
+              <a:t>: CHAPTER 04 </a:t>
+            </a:r>
+            <a:r>
+              <a:rPr lang="ko-KR" altLang="en-US" sz="1800" dirty="0"/>
+              <a:t>다양한 분류 알고리즘 </a:t>
+            </a:r>
+            <a:r>
+              <a:rPr lang="en-US" altLang="ko-KR" sz="1800" dirty="0"/>
+              <a:t>(2)</a:t>
+            </a:r>
+            <a:endParaRPr lang="ko-KR" altLang="en-US" sz="1800" dirty="0"/>
+          </a:p>
+          <a:p>
+            <a:pPr marL="685800" lvl="1" indent="-228631">
               <a:lnSpc>
                 <a:spcPct val="125000"/>
               </a:lnSpc>
               <a:spcBef>
                 <a:spcPts val="200"/>
               </a:spcBef>
-              <a:spcAft>
-                <a:spcPts val="0"/>
-              </a:spcAft>
-              <a:buClr>
-                <a:schemeClr val="dk1"/>
-              </a:buClr>
               <a:buSzPct val="100000"/>
-              <a:buChar char="⁃"/>
-            </a:pPr>
-            <a:r>
-              <a:rPr lang="ko-KR" sz="1600" dirty="0"/>
-              <a:t>로지스틱 회귀 / 확률적 경사 하강법</a:t>
+            </a:pPr>
+            <a:r>
+              <a:rPr lang="ko-KR" altLang="en-US" sz="1600" dirty="0"/>
+              <a:t>확률적 경사 </a:t>
+            </a:r>
+            <a:r>
+              <a:rPr lang="ko-KR" altLang="en-US" sz="1600" dirty="0" err="1"/>
+              <a:t>하강법</a:t>
             </a:r>
             <a:endParaRPr sz="1600" dirty="0"/>
           </a:p>
@@ -12153,8 +12170,8 @@
         </p:nvSpPr>
         <p:spPr>
           <a:xfrm>
-            <a:off x="468000" y="1080000"/>
-            <a:ext cx="11624609" cy="5074812"/>
+            <a:off x="468000" y="1079999"/>
+            <a:ext cx="11624609" cy="5757433"/>
           </a:xfrm>
           <a:prstGeom prst="rect">
             <a:avLst/>
@@ -12357,7 +12374,31 @@
             </a:pPr>
             <a:r>
               <a:rPr lang="ko-KR" sz="1800" dirty="0"/>
-              <a:t>13주차: 바이브코딩 AI 프로젝트 (1)</a:t>
+              <a:t>13주차: </a:t>
+            </a:r>
+            <a:r>
+              <a:rPr lang="en-US" altLang="ko-KR" sz="1800" dirty="0"/>
+              <a:t>LLM </a:t>
+            </a:r>
+            <a:r>
+              <a:rPr lang="ko-KR" altLang="en-US" sz="1800" dirty="0" err="1"/>
+              <a:t>바이브코딩을</a:t>
+            </a:r>
+            <a:r>
+              <a:rPr lang="ko-KR" altLang="en-US" sz="1800" dirty="0"/>
+              <a:t> 통한 기말</a:t>
+            </a:r>
+            <a:r>
+              <a:rPr lang="en-US" altLang="ko-KR" sz="1800" dirty="0"/>
+              <a:t> </a:t>
+            </a:r>
+            <a:r>
+              <a:rPr lang="ko-KR" altLang="en-US" sz="1800" dirty="0"/>
+              <a:t>프로젝트</a:t>
+            </a:r>
+            <a:r>
+              <a:rPr lang="ko-KR" sz="1800" dirty="0"/>
+              <a:t> (1)</a:t>
             </a:r>
             <a:endParaRPr sz="1800" dirty="0"/>
           </a:p>
@@ -12385,6 +12426,62 @@
             <a:endParaRPr sz="1600" dirty="0"/>
           </a:p>
           <a:p>
+            <a:pPr marL="228600" lvl="0" indent="-228600">
+              <a:lnSpc>
+                <a:spcPct val="125000"/>
+              </a:lnSpc>
+              <a:spcBef>
+                <a:spcPts val="300"/>
+              </a:spcBef>
+              <a:buSzPct val="100000"/>
+            </a:pPr>
+            <a:r>
+              <a:rPr lang="ko-KR" sz="1800" dirty="0"/>
+              <a:t>14주차: </a:t>
+            </a:r>
+            <a:r>
+              <a:rPr lang="en-US" altLang="ko-KR" sz="1800" dirty="0"/>
+              <a:t>LLM </a:t>
+            </a:r>
+            <a:r>
+              <a:rPr lang="ko-KR" altLang="en-US" sz="1800" dirty="0" err="1"/>
+              <a:t>바이브코딩을</a:t>
+            </a:r>
+            <a:r>
+              <a:rPr lang="ko-KR" altLang="en-US" sz="1800" dirty="0"/>
+              <a:t> 통한 기말</a:t>
+            </a:r>
+            <a:r>
+              <a:rPr lang="en-US" altLang="ko-KR" sz="1800" dirty="0"/>
+              <a:t> </a:t>
+            </a:r>
+            <a:r>
+              <a:rPr lang="ko-KR" altLang="en-US" sz="1800" dirty="0"/>
+              <a:t>프로젝트</a:t>
+            </a:r>
+            <a:r>
+              <a:rPr lang="ko-KR" sz="1800" dirty="0"/>
+              <a:t> (2)</a:t>
+            </a:r>
+            <a:endParaRPr lang="en-US" altLang="ko-KR" sz="1800" dirty="0"/>
+          </a:p>
+          <a:p>
+            <a:pPr marL="685800" lvl="1" indent="-228600">
+              <a:lnSpc>
+                <a:spcPct val="125000"/>
+              </a:lnSpc>
+              <a:spcBef>
+                <a:spcPts val="300"/>
+              </a:spcBef>
+              <a:buSzPct val="100000"/>
+            </a:pPr>
+            <a:r>
+              <a:rPr lang="ko-KR" altLang="en-US" sz="1600" dirty="0"/>
+              <a:t>프로젝트 수행</a:t>
+            </a:r>
+            <a:endParaRPr lang="en-US" altLang="ko-KR" sz="1600" dirty="0"/>
+          </a:p>
+          <a:p>
             <a:pPr marL="228600" lvl="0" indent="-228600" algn="l" rtl="0">
               <a:lnSpc>
                 <a:spcPct val="125000"/>
@@ -12400,32 +12497,36 @@
             </a:pPr>
             <a:r>
               <a:rPr lang="ko-KR" sz="1800" dirty="0"/>
-              <a:t>14주차: 바이브코딩 AI 프로젝트 (2)</a:t>
-            </a:r>
-            <a:endParaRPr sz="1800" dirty="0"/>
-          </a:p>
-          <a:p>
-            <a:pPr marL="685800" lvl="1" indent="-228631" algn="l" rtl="0">
+              <a:t>15주차: </a:t>
+            </a:r>
+            <a:r>
+              <a:rPr lang="ko-KR" altLang="en-US" sz="1800" dirty="0"/>
+              <a:t>보강 및 기말 프로젝트 </a:t>
+            </a:r>
+            <a:r>
+              <a:rPr lang="en-US" altLang="ko-KR" sz="1800" dirty="0"/>
+              <a:t>(3)</a:t>
+            </a:r>
+            <a:r>
+              <a:rPr lang="ko-KR" altLang="en-US" sz="1800" dirty="0"/>
+              <a:t> 수행</a:t>
+            </a:r>
+            <a:endParaRPr lang="en-US" altLang="ko-KR" sz="1800" dirty="0"/>
+          </a:p>
+          <a:p>
+            <a:pPr marL="685800" lvl="1" indent="-228600">
               <a:lnSpc>
                 <a:spcPct val="125000"/>
               </a:lnSpc>
               <a:spcBef>
-                <a:spcPts val="200"/>
-              </a:spcBef>
-              <a:spcAft>
-                <a:spcPts val="0"/>
-              </a:spcAft>
-              <a:buClr>
-                <a:schemeClr val="dk1"/>
-              </a:buClr>
+                <a:spcPts val="300"/>
+              </a:spcBef>
               <a:buSzPct val="100000"/>
-              <a:buChar char="⁃"/>
-            </a:pPr>
-            <a:r>
-              <a:rPr lang="ko-KR" sz="1600" dirty="0"/>
-              <a:t>프로젝트 구현 및 발표 / 결과물 제출</a:t>
-            </a:r>
-            <a:endParaRPr sz="1600" dirty="0"/>
+            </a:pPr>
+            <a:r>
+              <a:rPr lang="ko-KR" altLang="en-US" sz="1600" dirty="0"/>
+              <a:t>프로젝트 제출</a:t>
+            </a:r>
           </a:p>
           <a:p>
             <a:pPr marL="228600" lvl="0" indent="-228600" algn="l" rtl="0">
@@ -12442,8 +12543,20 @@
               <a:buChar char="◦"/>
             </a:pPr>
             <a:r>
-              <a:rPr lang="ko-KR" sz="1800" dirty="0"/>
-              <a:t>15주차: 기말고사</a:t>
+              <a:rPr lang="en-US" altLang="ko-KR" sz="1800" dirty="0"/>
+              <a:t>16</a:t>
+            </a:r>
+            <a:r>
+              <a:rPr lang="ko-KR" altLang="en-US" sz="1800" dirty="0"/>
+              <a:t>주차</a:t>
+            </a:r>
+            <a:r>
+              <a:rPr lang="en-US" altLang="ko-KR" sz="1800" dirty="0"/>
+              <a:t>: </a:t>
+            </a:r>
+            <a:r>
+              <a:rPr lang="ko-KR" altLang="en-US" sz="1800" dirty="0"/>
+              <a:t>기말고사</a:t>
             </a:r>
             <a:endParaRPr sz="1800" dirty="0"/>
           </a:p>
@@ -12586,8 +12699,8 @@
         </p:nvSpPr>
         <p:spPr>
           <a:xfrm>
-            <a:off x="468000" y="1080000"/>
-            <a:ext cx="11624609" cy="5074812"/>
+            <a:off x="468000" y="1079999"/>
+            <a:ext cx="11624609" cy="5670043"/>
           </a:xfrm>
           <a:prstGeom prst="rect">
             <a:avLst/>
@@ -12599,7 +12712,7 @@
         </p:spPr>
         <p:txBody>
           <a:bodyPr spcFirstLastPara="1" wrap="square" lIns="91425" tIns="45700" rIns="91425" bIns="45700" anchor="t" anchorCtr="0">
-            <a:normAutofit fontScale="85000" lnSpcReduction="20000"/>
+            <a:normAutofit fontScale="92500" lnSpcReduction="10000"/>
           </a:bodyPr>
           <a:lstStyle/>
           <a:p>
@@ -12633,7 +12746,7 @@
             </a:r>
             <a:r>
               <a:rPr lang="en-US" altLang="ko-KR" sz="1700" dirty="0"/>
-              <a:t>: 35</a:t>
+              <a:t>: 30</a:t>
             </a:r>
             <a:r>
               <a:rPr lang="ko-KR" altLang="en-US" sz="1700" dirty="0"/>
@@ -12656,7 +12769,7 @@
             </a:r>
             <a:r>
               <a:rPr lang="en-US" altLang="ko-KR" sz="1700" dirty="0"/>
-              <a:t>: 20</a:t>
+              <a:t>: 25</a:t>
             </a:r>
             <a:r>
               <a:rPr lang="ko-KR" altLang="en-US" sz="1700" dirty="0"/>
@@ -12679,13 +12792,56 @@
             </a:r>
             <a:r>
               <a:rPr lang="en-US" altLang="ko-KR" sz="1700" dirty="0"/>
-              <a:t>: 10</a:t>
+              <a:t>: 15</a:t>
+            </a:r>
+            <a:r>
+              <a:rPr lang="ko-KR" altLang="en-US" sz="1700" dirty="0"/>
+              <a:t>점 </a:t>
+            </a:r>
+            <a:r>
+              <a:rPr lang="en-US" altLang="ko-KR" sz="1700" dirty="0"/>
+              <a:t>(</a:t>
+            </a:r>
+            <a:r>
+              <a:rPr lang="ko-KR" altLang="en-US" sz="1700" dirty="0"/>
+              <a:t>총 </a:t>
+            </a:r>
+            <a:r>
+              <a:rPr lang="en-US" altLang="ko-KR" sz="1700" dirty="0"/>
+              <a:t>3</a:t>
+            </a:r>
+            <a:r>
+              <a:rPr lang="ko-KR" altLang="en-US" sz="1700" dirty="0"/>
+              <a:t>번</a:t>
+            </a:r>
+            <a:r>
+              <a:rPr lang="en-US" altLang="ko-KR" sz="1700" dirty="0"/>
+              <a:t>, </a:t>
+            </a:r>
+            <a:r>
+              <a:rPr lang="ko-KR" altLang="en-US" sz="1700" dirty="0"/>
+              <a:t>각 </a:t>
+            </a:r>
+            <a:r>
+              <a:rPr lang="en-US" altLang="ko-KR" sz="1700" dirty="0"/>
+              <a:t>5</a:t>
             </a:r>
             <a:r>
               <a:rPr lang="ko-KR" altLang="en-US" sz="1700" dirty="0"/>
               <a:t>점</a:t>
             </a:r>
-            <a:endParaRPr lang="en-US" altLang="ko-KR" sz="1700" dirty="0"/>
+            <a:r>
+              <a:rPr lang="en-US" altLang="ko-KR" sz="1700" dirty="0"/>
+              <a:t>×3</a:t>
+            </a:r>
+            <a:r>
+              <a:rPr lang="ko-KR" altLang="en-US" sz="1700" dirty="0"/>
+              <a:t>회</a:t>
+            </a:r>
+            <a:r>
+              <a:rPr lang="en-US" altLang="ko-KR" sz="1700" dirty="0"/>
+              <a:t>)</a:t>
+            </a:r>
           </a:p>
           <a:p>
             <a:pPr marL="685800" lvl="1" indent="-228631">
@@ -12703,7 +12859,39 @@
             </a:r>
             <a:r>
               <a:rPr lang="en-US" altLang="ko-KR" sz="1700" dirty="0"/>
-              <a:t>: 20</a:t>
+              <a:t>: 25</a:t>
+            </a:r>
+            <a:r>
+              <a:rPr lang="ko-KR" altLang="en-US" sz="1700"/>
+              <a:t>점</a:t>
+            </a:r>
+            <a:endParaRPr lang="ko-KR" altLang="en-US" sz="1700" dirty="0"/>
+          </a:p>
+          <a:p>
+            <a:pPr marL="685800" lvl="1" indent="-228631">
+              <a:lnSpc>
+                <a:spcPct val="125000"/>
+              </a:lnSpc>
+              <a:spcBef>
+                <a:spcPts val="200"/>
+              </a:spcBef>
+              <a:buSzPct val="100000"/>
+            </a:pPr>
+            <a:r>
+              <a:rPr lang="ko-KR" altLang="en-US" sz="1700" dirty="0"/>
+              <a:t>출석 </a:t>
+            </a:r>
+            <a:r>
+              <a:rPr lang="en-US" altLang="ko-KR" sz="1700" dirty="0"/>
+              <a:t>+ </a:t>
+            </a:r>
+            <a:r>
+              <a:rPr lang="ko-KR" altLang="en-US" sz="1700" dirty="0"/>
+              <a:t>핵심역량평가</a:t>
+            </a:r>
+            <a:r>
+              <a:rPr lang="en-US" altLang="ko-KR" sz="1700" dirty="0"/>
+              <a:t>: 10</a:t>
             </a:r>
             <a:r>
               <a:rPr lang="ko-KR" altLang="en-US" sz="1700" dirty="0"/>
@@ -12711,52 +12899,6 @@
             </a:r>
           </a:p>
           <a:p>
-            <a:pPr marL="685800" lvl="1" indent="-228631">
-              <a:lnSpc>
-                <a:spcPct val="125000"/>
-              </a:lnSpc>
-              <a:spcBef>
-                <a:spcPts val="200"/>
-              </a:spcBef>
-              <a:buSzPct val="100000"/>
-            </a:pPr>
-            <a:r>
-              <a:rPr lang="ko-KR" altLang="en-US" sz="1700" dirty="0"/>
-              <a:t>출석</a:t>
-            </a:r>
-            <a:r>
-              <a:rPr lang="en-US" altLang="ko-KR" sz="1700" dirty="0"/>
-              <a:t>: 10</a:t>
-            </a:r>
-            <a:r>
-              <a:rPr lang="ko-KR" altLang="en-US" sz="1700" dirty="0"/>
-              <a:t>점</a:t>
-            </a:r>
-          </a:p>
-          <a:p>
-            <a:pPr marL="685800" lvl="1" indent="-228631">
-              <a:lnSpc>
-                <a:spcPct val="125000"/>
-              </a:lnSpc>
-              <a:spcBef>
-                <a:spcPts val="200"/>
-              </a:spcBef>
-              <a:buSzPct val="100000"/>
-            </a:pPr>
-            <a:r>
-              <a:rPr lang="ko-KR" altLang="en-US" sz="1700" dirty="0"/>
-              <a:t>핵심역량평가</a:t>
-            </a:r>
-            <a:r>
-              <a:rPr lang="en-US" altLang="ko-KR" sz="1700" dirty="0"/>
-              <a:t>: 5</a:t>
-            </a:r>
-            <a:r>
-              <a:rPr lang="ko-KR" altLang="en-US" sz="1700" dirty="0"/>
-              <a:t>점</a:t>
-            </a:r>
-          </a:p>
-          <a:p>
             <a:pPr marL="228600" lvl="0" indent="-228600">
               <a:lnSpc>
                 <a:spcPct val="125000"/>
@@ -12920,8 +13062,12 @@
               <a:buSzPct val="100000"/>
             </a:pPr>
             <a:r>
+              <a:rPr lang="ko-KR" altLang="en-US" dirty="0"/>
+              <a:t>기말</a:t>
+            </a:r>
+            <a:r>
               <a:rPr lang="en-US" altLang="ko-KR" dirty="0"/>
-              <a:t>AI </a:t>
+              <a:t> </a:t>
             </a:r>
             <a:r>
               <a:rPr lang="ko-KR" altLang="en-US" dirty="0"/>
@@ -12940,7 +13086,7 @@
             </a:pPr>
             <a:r>
               <a:rPr lang="ko-KR" altLang="en-US" sz="1700" dirty="0"/>
-              <a:t>바이브코딩을 활용한 AI 프로젝트 (13~14주차)</a:t>
+              <a:t>기말 프로젝트 (13~14주차)</a:t>
             </a:r>
           </a:p>
           <a:p>
@@ -13025,15 +13171,15 @@
             </a:r>
             <a:r>
               <a:rPr lang="ko-KR" altLang="en-US" sz="1700" dirty="0"/>
-              <a:t>회까지 </a:t>
+              <a:t>회까지는 </a:t>
             </a:r>
             <a:r>
               <a:rPr lang="en-US" altLang="ko-KR" sz="1700" dirty="0"/>
-              <a:t>10</a:t>
+              <a:t>5</a:t>
             </a:r>
             <a:r>
               <a:rPr lang="ko-KR" altLang="en-US" sz="1700" dirty="0"/>
-              <a:t>점</a:t>
+              <a:t>점 만점</a:t>
             </a:r>
             <a:r>
               <a:rPr lang="en-US" altLang="ko-KR" sz="1700" dirty="0"/>
@@ -13053,7 +13199,7 @@
             </a:r>
             <a:r>
               <a:rPr lang="en-US" altLang="ko-KR" sz="1700" dirty="0"/>
-              <a:t>1</a:t>
+              <a:t>2</a:t>
             </a:r>
             <a:r>
               <a:rPr lang="ko-KR" altLang="en-US" sz="1700" dirty="0"/>
@@ -13461,10 +13607,7 @@
               </a:rPr>
               <a:t>sangdon.park@dju.kr</a:t>
             </a:r>
-            <a:r>
-              <a:rPr lang="en-US" sz="1700" dirty="0"/>
-              <a:t>, </a:t>
-            </a:r>
+            <a:endParaRPr lang="en-US" sz="1700" dirty="0"/>
           </a:p>
           <a:p>
             <a:pPr marL="228600" lvl="0" indent="-228600" algn="l" rtl="0">

--- a/data/인공지능/00 - preview.pptx
+++ b/data/인공지능/00 - preview.pptx
@@ -12769,7 +12769,7 @@
             </a:r>
             <a:r>
               <a:rPr lang="en-US" altLang="ko-KR" sz="1700" dirty="0"/>
-              <a:t>: 25</a:t>
+              <a:t>: 30</a:t>
             </a:r>
             <a:r>
               <a:rPr lang="ko-KR" altLang="en-US" sz="1700" dirty="0"/>
@@ -12792,7 +12792,7 @@
             </a:r>
             <a:r>
               <a:rPr lang="en-US" altLang="ko-KR" sz="1700" dirty="0"/>
-              <a:t>: 15</a:t>
+              <a:t>: 10</a:t>
             </a:r>
             <a:r>
               <a:rPr lang="ko-KR" altLang="en-US" sz="1700" dirty="0"/>
@@ -12859,13 +12859,12 @@
             </a:r>
             <a:r>
               <a:rPr lang="en-US" altLang="ko-KR" sz="1700" dirty="0"/>
-              <a:t>: 25</a:t>
-            </a:r>
-            <a:r>
-              <a:rPr lang="ko-KR" altLang="en-US" sz="1700"/>
+              <a:t>: 20</a:t>
+            </a:r>
+            <a:r>
+              <a:rPr lang="ko-KR" altLang="en-US" sz="1700" dirty="0"/>
               <a:t>점</a:t>
             </a:r>
-            <a:endParaRPr lang="ko-KR" altLang="en-US" sz="1700" dirty="0"/>
           </a:p>
           <a:p>
             <a:pPr marL="685800" lvl="1" indent="-228631">

--- a/data/인공지능/00 - preview.pptx
+++ b/data/인공지능/00 - preview.pptx
@@ -332,7 +332,7 @@
       </p15:notesGuideLst>
     </p:ext>
     <p:ext uri="GoogleSlidesCustomDataVersion2">
-      <go:slidesCustomData xmlns:go="http://customooxmlschemas.google.com/" xmlns:ahyp="http://schemas.microsoft.com/office/drawing/2018/hyperlinkcolor" xmlns:p15="http://schemas.microsoft.com/office/powerpoint/2012/main" xmlns:p14="http://schemas.microsoft.com/office/powerpoint/2010/main" xmlns:com="http://schemas.openxmlformats.org/drawingml/2006/compatibility" xmlns:pvml="urn:schemas-microsoft-com:office:powerpoint" xmlns:v="urn:schemas-microsoft-com:vml" xmlns:o="urn:schemas-microsoft-com:office:office" xmlns:dgm="http://schemas.openxmlformats.org/drawingml/2006/diagram" xmlns:c="http://schemas.openxmlformats.org/drawingml/2006/chart" xmlns:mv="urn:schemas-microsoft-com:mac:vml" xmlns:mc="http://schemas.openxmlformats.org/markup-compatibility/2006" xmlns="" r:id="rId61" roundtripDataSignature="AMtx7mgQh/JTZB+tcnoesXfhZuEldfv5OQ=="/>
+      <go:slidesCustomData xmlns="" xmlns:mc="http://schemas.openxmlformats.org/markup-compatibility/2006" xmlns:mv="urn:schemas-microsoft-com:mac:vml" xmlns:c="http://schemas.openxmlformats.org/drawingml/2006/chart" xmlns:dgm="http://schemas.openxmlformats.org/drawingml/2006/diagram" xmlns:o="urn:schemas-microsoft-com:office:office" xmlns:v="urn:schemas-microsoft-com:vml" xmlns:pvml="urn:schemas-microsoft-com:office:powerpoint" xmlns:com="http://schemas.openxmlformats.org/drawingml/2006/compatibility" xmlns:p14="http://schemas.microsoft.com/office/powerpoint/2010/main" xmlns:p15="http://schemas.microsoft.com/office/powerpoint/2012/main" xmlns:ahyp="http://schemas.microsoft.com/office/drawing/2018/hyperlinkcolor" xmlns:go="http://customooxmlschemas.google.com/" r:id="rId61" roundtripDataSignature="AMtx7mgQh/JTZB+tcnoesXfhZuEldfv5OQ=="/>
     </p:ext>
   </p:extLst>
 </p:presentation>
@@ -12798,64 +12798,25 @@
               <a:rPr lang="ko-KR" altLang="en-US" sz="1700" dirty="0"/>
               <a:t>점 </a:t>
             </a:r>
-            <a:r>
-              <a:rPr lang="en-US" altLang="ko-KR" sz="1700" dirty="0"/>
-              <a:t>(</a:t>
+            <a:endParaRPr lang="en-US" altLang="ko-KR" sz="1700"/>
+          </a:p>
+          <a:p>
+            <a:pPr marL="685800" lvl="1" indent="-228631">
+              <a:lnSpc>
+                <a:spcPct val="125000"/>
+              </a:lnSpc>
+              <a:spcBef>
+                <a:spcPts val="200"/>
+              </a:spcBef>
+              <a:buSzPct val="100000"/>
+            </a:pPr>
+            <a:r>
+              <a:rPr lang="ko-KR" altLang="en-US" sz="1700"/>
+              <a:t>기말 </a:t>
             </a:r>
             <a:r>
               <a:rPr lang="ko-KR" altLang="en-US" sz="1700" dirty="0"/>
-              <a:t>총 </a:t>
-            </a:r>
-            <a:r>
-              <a:rPr lang="en-US" altLang="ko-KR" sz="1700" dirty="0"/>
-              <a:t>3</a:t>
-            </a:r>
-            <a:r>
-              <a:rPr lang="ko-KR" altLang="en-US" sz="1700" dirty="0"/>
-              <a:t>번</a:t>
-            </a:r>
-            <a:r>
-              <a:rPr lang="en-US" altLang="ko-KR" sz="1700" dirty="0"/>
-              <a:t>, </a:t>
-            </a:r>
-            <a:r>
-              <a:rPr lang="ko-KR" altLang="en-US" sz="1700" dirty="0"/>
-              <a:t>각 </a:t>
-            </a:r>
-            <a:r>
-              <a:rPr lang="en-US" altLang="ko-KR" sz="1700" dirty="0"/>
-              <a:t>5</a:t>
-            </a:r>
-            <a:r>
-              <a:rPr lang="ko-KR" altLang="en-US" sz="1700" dirty="0"/>
-              <a:t>점</a:t>
-            </a:r>
-            <a:r>
-              <a:rPr lang="en-US" altLang="ko-KR" sz="1700" dirty="0"/>
-              <a:t>×3</a:t>
-            </a:r>
-            <a:r>
-              <a:rPr lang="ko-KR" altLang="en-US" sz="1700" dirty="0"/>
-              <a:t>회</a:t>
-            </a:r>
-            <a:r>
-              <a:rPr lang="en-US" altLang="ko-KR" sz="1700" dirty="0"/>
-              <a:t>)</a:t>
-            </a:r>
-          </a:p>
-          <a:p>
-            <a:pPr marL="685800" lvl="1" indent="-228631">
-              <a:lnSpc>
-                <a:spcPct val="125000"/>
-              </a:lnSpc>
-              <a:spcBef>
-                <a:spcPts val="200"/>
-              </a:spcBef>
-              <a:buSzPct val="100000"/>
-            </a:pPr>
-            <a:r>
-              <a:rPr lang="ko-KR" altLang="en-US" sz="1700" dirty="0"/>
-              <a:t>기말 프로젝트</a:t>
+              <a:t>프로젝트</a:t>
             </a:r>
             <a:r>
               <a:rPr lang="en-US" altLang="ko-KR" sz="1700" dirty="0"/>

--- a/data/인공지능/00 - preview.pptx
+++ b/data/인공지능/00 - preview.pptx
@@ -332,7 +332,7 @@
       </p15:notesGuideLst>
     </p:ext>
     <p:ext uri="GoogleSlidesCustomDataVersion2">
-      <go:slidesCustomData xmlns="" xmlns:mc="http://schemas.openxmlformats.org/markup-compatibility/2006" xmlns:mv="urn:schemas-microsoft-com:mac:vml" xmlns:c="http://schemas.openxmlformats.org/drawingml/2006/chart" xmlns:dgm="http://schemas.openxmlformats.org/drawingml/2006/diagram" xmlns:o="urn:schemas-microsoft-com:office:office" xmlns:v="urn:schemas-microsoft-com:vml" xmlns:pvml="urn:schemas-microsoft-com:office:powerpoint" xmlns:com="http://schemas.openxmlformats.org/drawingml/2006/compatibility" xmlns:p14="http://schemas.microsoft.com/office/powerpoint/2010/main" xmlns:p15="http://schemas.microsoft.com/office/powerpoint/2012/main" xmlns:ahyp="http://schemas.microsoft.com/office/drawing/2018/hyperlinkcolor" xmlns:go="http://customooxmlschemas.google.com/" r:id="rId61" roundtripDataSignature="AMtx7mgQh/JTZB+tcnoesXfhZuEldfv5OQ=="/>
+      <go:slidesCustomData xmlns:go="http://customooxmlschemas.google.com/" xmlns:ahyp="http://schemas.microsoft.com/office/drawing/2018/hyperlinkcolor" xmlns:p15="http://schemas.microsoft.com/office/powerpoint/2012/main" xmlns:p14="http://schemas.microsoft.com/office/powerpoint/2010/main" xmlns:com="http://schemas.openxmlformats.org/drawingml/2006/compatibility" xmlns:pvml="urn:schemas-microsoft-com:office:powerpoint" xmlns:v="urn:schemas-microsoft-com:vml" xmlns:o="urn:schemas-microsoft-com:office:office" xmlns:dgm="http://schemas.openxmlformats.org/drawingml/2006/diagram" xmlns:c="http://schemas.openxmlformats.org/drawingml/2006/chart" xmlns:mv="urn:schemas-microsoft-com:mac:vml" xmlns:mc="http://schemas.openxmlformats.org/markup-compatibility/2006" xmlns="" r:id="rId61" roundtripDataSignature="AMtx7mgQh/JTZB+tcnoesXfhZuEldfv5OQ=="/>
     </p:ext>
   </p:extLst>
 </p:presentation>
@@ -11626,7 +11626,7 @@
         <p:spPr>
           <a:xfrm>
             <a:off x="468000" y="1080000"/>
-            <a:ext cx="11624609" cy="5074812"/>
+            <a:ext cx="6021577" cy="5074812"/>
           </a:xfrm>
           <a:prstGeom prst="rect">
             <a:avLst/>
@@ -11656,10 +11656,10 @@
               <a:buChar char="◦"/>
             </a:pPr>
             <a:r>
-              <a:rPr lang="ko-KR" sz="1800" dirty="0"/>
+              <a:rPr lang="ko-KR" sz="1600" dirty="0"/>
               <a:t>1주차: 강의 소개 및 환경 설정</a:t>
             </a:r>
-            <a:endParaRPr sz="1800" dirty="0"/>
+            <a:endParaRPr sz="1600" dirty="0"/>
           </a:p>
           <a:p>
             <a:pPr marL="685800" lvl="1" indent="-228631" algn="l" rtl="0">
@@ -11679,18 +11679,18 @@
               <a:buChar char="⁃"/>
             </a:pPr>
             <a:r>
-              <a:rPr lang="ko-KR" sz="1600" dirty="0"/>
+              <a:rPr lang="ko-KR" sz="1400" dirty="0"/>
               <a:t>강의 개요, 평가 방법 안내, 구글 </a:t>
             </a:r>
             <a:r>
-              <a:rPr lang="ko-KR" sz="1600" dirty="0" err="1"/>
+              <a:rPr lang="ko-KR" sz="1400" dirty="0" err="1"/>
               <a:t>코랩</a:t>
             </a:r>
             <a:r>
-              <a:rPr lang="ko-KR" sz="1600" dirty="0"/>
+              <a:rPr lang="ko-KR" sz="1400" dirty="0"/>
               <a:t> 실습 환경 설정</a:t>
             </a:r>
-            <a:endParaRPr sz="1600" dirty="0"/>
+            <a:endParaRPr sz="1400" dirty="0"/>
           </a:p>
           <a:p>
             <a:pPr marL="228600" lvl="0" indent="-228600" algn="l" rtl="0">
@@ -11707,14 +11707,105 @@
               <a:buChar char="◦"/>
             </a:pPr>
             <a:r>
-              <a:rPr lang="ko-KR" sz="1800" dirty="0"/>
+              <a:rPr lang="ko-KR" sz="1600" dirty="0"/>
               <a:t>2주차: CHAPTER 01 </a:t>
             </a:r>
             <a:r>
-              <a:rPr lang="ko-KR" altLang="en-US" sz="1800" dirty="0"/>
+              <a:rPr lang="ko-KR" altLang="en-US" sz="1600" dirty="0"/>
               <a:t>인공지능 개요</a:t>
             </a:r>
-            <a:endParaRPr sz="1800" dirty="0"/>
+            <a:endParaRPr sz="1600" dirty="0"/>
+          </a:p>
+          <a:p>
+            <a:pPr marL="685800" lvl="1" indent="-228631">
+              <a:lnSpc>
+                <a:spcPct val="125000"/>
+              </a:lnSpc>
+              <a:spcBef>
+                <a:spcPts val="200"/>
+              </a:spcBef>
+              <a:buSzPct val="100000"/>
+            </a:pPr>
+            <a:r>
+              <a:rPr lang="ko-KR" sz="1400" dirty="0"/>
+              <a:t>인공지능과 </a:t>
+            </a:r>
+            <a:r>
+              <a:rPr lang="ko-KR" sz="1400" dirty="0" err="1"/>
+              <a:t>머신러닝</a:t>
+            </a:r>
+            <a:r>
+              <a:rPr lang="ko-KR" sz="1400" dirty="0"/>
+              <a:t> 개념 / </a:t>
+            </a:r>
+            <a:r>
+              <a:rPr lang="ko-KR" sz="1400" dirty="0" err="1"/>
+              <a:t>코랩과</a:t>
+            </a:r>
+            <a:r>
+              <a:rPr lang="ko-KR" sz="1400" dirty="0"/>
+              <a:t> 주피터 노트북</a:t>
+            </a:r>
+            <a:endParaRPr lang="ko-KR" altLang="en-US" sz="1400" dirty="0"/>
+          </a:p>
+          <a:p>
+            <a:pPr marL="685800" lvl="1" indent="-228631">
+              <a:lnSpc>
+                <a:spcPct val="125000"/>
+              </a:lnSpc>
+              <a:spcBef>
+                <a:spcPts val="200"/>
+              </a:spcBef>
+              <a:buSzPct val="100000"/>
+            </a:pPr>
+            <a:r>
+              <a:rPr lang="en-US" altLang="ko-KR" sz="1400" dirty="0"/>
+              <a:t>GitHub </a:t>
+            </a:r>
+            <a:r>
+              <a:rPr lang="ko-KR" altLang="en-US" sz="1400" dirty="0"/>
+              <a:t>가입</a:t>
+            </a:r>
+            <a:r>
+              <a:rPr lang="en-US" altLang="ko-KR" sz="1400" dirty="0"/>
+              <a:t>, Git </a:t>
+            </a:r>
+            <a:r>
+              <a:rPr lang="ko-KR" altLang="en-US" sz="1400" dirty="0"/>
+              <a:t>설정</a:t>
+            </a:r>
+            <a:r>
+              <a:rPr lang="en-US" altLang="ko-KR" sz="1400" dirty="0"/>
+              <a:t>, GitHub Classroom </a:t>
+            </a:r>
+            <a:r>
+              <a:rPr lang="ko-KR" altLang="en-US" sz="1400" dirty="0"/>
+              <a:t>과제 제출 실습</a:t>
+            </a:r>
+          </a:p>
+          <a:p>
+            <a:pPr marL="228600" lvl="0" indent="-228600" algn="l" rtl="0">
+              <a:lnSpc>
+                <a:spcPct val="125000"/>
+              </a:lnSpc>
+              <a:spcBef>
+                <a:spcPts val="300"/>
+              </a:spcBef>
+              <a:spcAft>
+                <a:spcPts val="0"/>
+              </a:spcAft>
+              <a:buSzPct val="100000"/>
+              <a:buChar char="◦"/>
+            </a:pPr>
+            <a:r>
+              <a:rPr lang="en-US" altLang="ko-KR" sz="1600" dirty="0"/>
+              <a:t>3</a:t>
+            </a:r>
+            <a:r>
+              <a:rPr lang="ko-KR" sz="1600" dirty="0"/>
+              <a:t>주차: CHAPTER 02 데이터 다루기</a:t>
+            </a:r>
+            <a:endParaRPr sz="1600" dirty="0"/>
           </a:p>
           <a:p>
             <a:pPr marL="685800" lvl="1" indent="-228631" algn="l" rtl="0">
@@ -11734,26 +11825,14 @@
               <a:buChar char="⁃"/>
             </a:pPr>
             <a:r>
-              <a:rPr lang="ko-KR" sz="1600" dirty="0"/>
-              <a:t>인공지능과 </a:t>
-            </a:r>
-            <a:r>
-              <a:rPr lang="ko-KR" sz="1600" dirty="0" err="1"/>
-              <a:t>머신러닝</a:t>
-            </a:r>
-            <a:r>
-              <a:rPr lang="ko-KR" sz="1600" dirty="0"/>
-              <a:t> 개념 / </a:t>
-            </a:r>
-            <a:r>
-              <a:rPr lang="ko-KR" sz="1600" dirty="0" err="1"/>
-              <a:t>코랩과</a:t>
-            </a:r>
-            <a:r>
-              <a:rPr lang="ko-KR" sz="1600" dirty="0"/>
-              <a:t> 주피터 노트북</a:t>
-            </a:r>
-            <a:endParaRPr sz="1600" dirty="0"/>
+              <a:rPr lang="ko-KR" sz="1400" dirty="0"/>
+              <a:t>훈련 세트와 테스트 세트 / 데이터 </a:t>
+            </a:r>
+            <a:r>
+              <a:rPr lang="ko-KR" sz="1400" dirty="0" err="1"/>
+              <a:t>전처리</a:t>
+            </a:r>
+            <a:endParaRPr sz="1400" dirty="0"/>
           </a:p>
           <a:p>
             <a:pPr marL="228600" lvl="0" indent="-228600" algn="l" rtl="0">
@@ -11770,14 +11849,14 @@
               <a:buChar char="◦"/>
             </a:pPr>
             <a:r>
-              <a:rPr lang="en-US" altLang="ko-KR" sz="1800" dirty="0"/>
-              <a:t>3</a:t>
-            </a:r>
-            <a:r>
-              <a:rPr lang="ko-KR" sz="1800" dirty="0"/>
-              <a:t>주차: CHAPTER 02 데이터 다루기</a:t>
-            </a:r>
-            <a:endParaRPr sz="1800" dirty="0"/>
+              <a:rPr lang="en-US" altLang="ko-KR" sz="1600" dirty="0"/>
+              <a:t>4</a:t>
+            </a:r>
+            <a:r>
+              <a:rPr lang="ko-KR" sz="1600" dirty="0"/>
+              <a:t>주차: CHAPTER 03 회귀 알고리즘과 모델 규제 (1)</a:t>
+            </a:r>
+            <a:endParaRPr sz="1600" dirty="0"/>
           </a:p>
           <a:p>
             <a:pPr marL="685800" lvl="1" indent="-228631" algn="l" rtl="0">
@@ -11797,14 +11876,10 @@
               <a:buChar char="⁃"/>
             </a:pPr>
             <a:r>
-              <a:rPr lang="ko-KR" sz="1600" dirty="0"/>
-              <a:t>훈련 세트와 테스트 세트 / 데이터 </a:t>
-            </a:r>
-            <a:r>
-              <a:rPr lang="ko-KR" sz="1600" dirty="0" err="1"/>
-              <a:t>전처리</a:t>
-            </a:r>
-            <a:endParaRPr sz="1600" dirty="0"/>
+              <a:rPr lang="ko-KR" sz="1400" dirty="0"/>
+              <a:t>k-최근접 이웃 회귀 / 선형 회귀</a:t>
+            </a:r>
+            <a:endParaRPr sz="1400" dirty="0"/>
           </a:p>
           <a:p>
             <a:pPr marL="228600" lvl="0" indent="-228600" algn="l" rtl="0">
@@ -11821,14 +11896,14 @@
               <a:buChar char="◦"/>
             </a:pPr>
             <a:r>
-              <a:rPr lang="en-US" altLang="ko-KR" sz="1800" dirty="0"/>
-              <a:t>4</a:t>
-            </a:r>
-            <a:r>
-              <a:rPr lang="ko-KR" sz="1800" dirty="0"/>
-              <a:t>주차: CHAPTER 03 회귀 알고리즘과 모델 규제 (1)</a:t>
-            </a:r>
-            <a:endParaRPr sz="1800" dirty="0"/>
+              <a:rPr lang="en-US" altLang="ko-KR" sz="1600" dirty="0"/>
+              <a:t>5</a:t>
+            </a:r>
+            <a:r>
+              <a:rPr lang="ko-KR" sz="1600" dirty="0"/>
+              <a:t>주차: CHAPTER 03 회귀 알고리즘과 모델 규제 (2)</a:t>
+            </a:r>
+            <a:endParaRPr sz="1600" dirty="0"/>
           </a:p>
           <a:p>
             <a:pPr marL="685800" lvl="1" indent="-228631" algn="l" rtl="0">
@@ -11848,10 +11923,10 @@
               <a:buChar char="⁃"/>
             </a:pPr>
             <a:r>
-              <a:rPr lang="ko-KR" sz="1600" dirty="0"/>
-              <a:t>k-최근접 이웃 회귀 / 선형 회귀</a:t>
-            </a:r>
-            <a:endParaRPr sz="1600" dirty="0"/>
+              <a:rPr lang="ko-KR" sz="1400" dirty="0"/>
+              <a:t>특성 공학과 규제</a:t>
+            </a:r>
+            <a:endParaRPr sz="1400" dirty="0"/>
           </a:p>
           <a:p>
             <a:pPr marL="228600" lvl="0" indent="-228600" algn="l" rtl="0">
@@ -11868,37 +11943,86 @@
               <a:buChar char="◦"/>
             </a:pPr>
             <a:r>
-              <a:rPr lang="en-US" altLang="ko-KR" sz="1800" dirty="0"/>
-              <a:t>5</a:t>
-            </a:r>
-            <a:r>
-              <a:rPr lang="ko-KR" sz="1800" dirty="0"/>
-              <a:t>주차: CHAPTER 03 회귀 알고리즘과 모델 규제 (2)</a:t>
-            </a:r>
-            <a:endParaRPr sz="1800" dirty="0"/>
-          </a:p>
-          <a:p>
-            <a:pPr marL="685800" lvl="1" indent="-228631" algn="l" rtl="0">
+              <a:rPr lang="en-US" altLang="ko-KR" sz="1600" dirty="0"/>
+              <a:t>6</a:t>
+            </a:r>
+            <a:r>
+              <a:rPr lang="ko-KR" sz="1600" dirty="0"/>
+              <a:t>주차: CHAPTER 04 다양한 분류 알고리즘</a:t>
+            </a:r>
+            <a:r>
+              <a:rPr lang="en-US" altLang="ko-KR" sz="1600" dirty="0"/>
+              <a:t> (1)</a:t>
+            </a:r>
+            <a:endParaRPr sz="1600" dirty="0"/>
+          </a:p>
+          <a:p>
+            <a:pPr marL="685800" lvl="1" indent="-228631">
               <a:lnSpc>
                 <a:spcPct val="125000"/>
               </a:lnSpc>
               <a:spcBef>
                 <a:spcPts val="200"/>
               </a:spcBef>
-              <a:spcAft>
-                <a:spcPts val="0"/>
-              </a:spcAft>
-              <a:buClr>
-                <a:schemeClr val="dk1"/>
-              </a:buClr>
               <a:buSzPct val="100000"/>
-              <a:buChar char="⁃"/>
-            </a:pPr>
-            <a:r>
-              <a:rPr lang="ko-KR" sz="1600" dirty="0"/>
-              <a:t>특성 공학과 규제</a:t>
-            </a:r>
-            <a:endParaRPr sz="1600" dirty="0"/>
+            </a:pPr>
+            <a:r>
+              <a:rPr lang="ko-KR" altLang="ko-KR" sz="1400" dirty="0"/>
+              <a:t>로지스틱 회귀</a:t>
+            </a:r>
+            <a:endParaRPr lang="en-US" altLang="ko-KR" sz="1400" dirty="0"/>
+          </a:p>
+          <a:p>
+            <a:pPr marL="228600" lvl="0" indent="-228600">
+              <a:lnSpc>
+                <a:spcPct val="125000"/>
+              </a:lnSpc>
+              <a:spcBef>
+                <a:spcPts val="300"/>
+              </a:spcBef>
+              <a:buSzPct val="100000"/>
+            </a:pPr>
+            <a:r>
+              <a:rPr lang="en-US" altLang="ko-KR" sz="1600" dirty="0"/>
+              <a:t>7</a:t>
+            </a:r>
+            <a:r>
+              <a:rPr lang="ko-KR" altLang="en-US" sz="1600" dirty="0"/>
+              <a:t>주차</a:t>
+            </a:r>
+            <a:r>
+              <a:rPr lang="en-US" altLang="ko-KR" sz="1600" dirty="0"/>
+              <a:t>: CHAPTER 04 </a:t>
+            </a:r>
+            <a:r>
+              <a:rPr lang="ko-KR" altLang="en-US" sz="1600" dirty="0"/>
+              <a:t>다양한 분류 알고리즘 </a:t>
+            </a:r>
+            <a:r>
+              <a:rPr lang="en-US" altLang="ko-KR" sz="1600" dirty="0"/>
+              <a:t>(2)</a:t>
+            </a:r>
+            <a:endParaRPr lang="ko-KR" altLang="en-US" sz="1600" dirty="0"/>
+          </a:p>
+          <a:p>
+            <a:pPr marL="685800" lvl="1" indent="-228631">
+              <a:lnSpc>
+                <a:spcPct val="125000"/>
+              </a:lnSpc>
+              <a:spcBef>
+                <a:spcPts val="200"/>
+              </a:spcBef>
+              <a:buSzPct val="100000"/>
+            </a:pPr>
+            <a:r>
+              <a:rPr lang="ko-KR" altLang="en-US" sz="1400" dirty="0"/>
+              <a:t>확률적 경사 </a:t>
+            </a:r>
+            <a:r>
+              <a:rPr lang="ko-KR" altLang="en-US" sz="1400" dirty="0" err="1"/>
+              <a:t>하강법</a:t>
+            </a:r>
+            <a:endParaRPr sz="1400" dirty="0"/>
           </a:p>
           <a:p>
             <a:pPr marL="228600" lvl="0" indent="-228600" algn="l" rtl="0">
@@ -11915,48 +12039,340 @@
               <a:buChar char="◦"/>
             </a:pPr>
             <a:r>
-              <a:rPr lang="en-US" altLang="ko-KR" sz="1800" dirty="0"/>
-              <a:t>6</a:t>
-            </a:r>
-            <a:r>
-              <a:rPr lang="ko-KR" sz="1800" dirty="0"/>
-              <a:t>주차: CHAPTER 04 다양한 분류 알고리즘</a:t>
-            </a:r>
-            <a:r>
-              <a:rPr lang="en-US" altLang="ko-KR" sz="1800" dirty="0"/>
-              <a:t> (1)</a:t>
-            </a:r>
-            <a:endParaRPr sz="1800" dirty="0"/>
-          </a:p>
-          <a:p>
-            <a:pPr marL="685800" lvl="1" indent="-228631" algn="l" rtl="0">
+              <a:rPr lang="ko-KR" sz="1600" dirty="0"/>
+              <a:t>8주차: 중간고사</a:t>
+            </a:r>
+            <a:endParaRPr sz="1600" dirty="0"/>
+          </a:p>
+        </p:txBody>
+      </p:sp>
+      <p:sp>
+        <p:nvSpPr>
+          <p:cNvPr id="5" name="Body">
+            <a:extLst>
+              <a:ext uri="{FF2B5EF4-FFF2-40B4-BE49-F238E27FC236}">
+                <a16:creationId xmlns:a16="http://schemas.microsoft.com/office/drawing/2014/main" id="{DB813456-0909-4479-8924-7461D7B7FEAB}"/>
+              </a:ext>
+            </a:extLst>
+          </p:cNvPr>
+          <p:cNvSpPr txBox="1">
+            <a:spLocks/>
+          </p:cNvSpPr>
+          <p:nvPr/>
+        </p:nvSpPr>
+        <p:spPr>
+          <a:xfrm>
+            <a:off x="6811787" y="1079999"/>
+            <a:ext cx="5080383" cy="5757433"/>
+          </a:xfrm>
+          <a:prstGeom prst="rect">
+            <a:avLst/>
+          </a:prstGeom>
+          <a:noFill/>
+          <a:ln>
+            <a:noFill/>
+          </a:ln>
+        </p:spPr>
+        <p:txBody>
+          <a:bodyPr spcFirstLastPara="1" wrap="square" lIns="91425" tIns="45700" rIns="91425" bIns="45700" anchor="t" anchorCtr="0">
+            <a:normAutofit/>
+          </a:bodyPr>
+          <a:lstStyle>
+            <a:defPPr marR="0" lvl="0" algn="l" rtl="0">
+              <a:lnSpc>
+                <a:spcPct val="100000"/>
+              </a:lnSpc>
+              <a:spcBef>
+                <a:spcPts val="0"/>
+              </a:spcBef>
+              <a:spcAft>
+                <a:spcPts val="0"/>
+              </a:spcAft>
+            </a:defPPr>
+            <a:lvl1pPr marL="457200" marR="0" lvl="0" indent="-355600" algn="l" rtl="0">
+              <a:lnSpc>
+                <a:spcPct val="120000"/>
+              </a:lnSpc>
+              <a:spcBef>
+                <a:spcPts val="1000"/>
+              </a:spcBef>
+              <a:spcAft>
+                <a:spcPts val="0"/>
+              </a:spcAft>
+              <a:buClr>
+                <a:srgbClr val="4BB0A0"/>
+              </a:buClr>
+              <a:buSzPts val="2000"/>
+              <a:buFont typeface="Arial"/>
+              <a:buChar char="◦"/>
+              <a:defRPr sz="2000" b="0" i="0" u="none" strike="noStrike" cap="none">
+                <a:solidFill>
+                  <a:schemeClr val="dk1"/>
+                </a:solidFill>
+                <a:latin typeface="Malgun Gothic"/>
+                <a:ea typeface="Malgun Gothic"/>
+                <a:cs typeface="Malgun Gothic"/>
+                <a:sym typeface="Malgun Gothic"/>
+              </a:defRPr>
+            </a:lvl1pPr>
+            <a:lvl2pPr marL="914400" marR="0" lvl="1" indent="-342900" algn="l" rtl="0">
+              <a:lnSpc>
+                <a:spcPct val="120000"/>
+              </a:lnSpc>
+              <a:spcBef>
+                <a:spcPts val="500"/>
+              </a:spcBef>
+              <a:spcAft>
+                <a:spcPts val="0"/>
+              </a:spcAft>
+              <a:buClr>
+                <a:schemeClr val="dk1"/>
+              </a:buClr>
+              <a:buSzPts val="1800"/>
+              <a:buFont typeface="Arial"/>
+              <a:buChar char="⁃"/>
+              <a:defRPr sz="1800" b="0" i="0" u="none" strike="noStrike" cap="none">
+                <a:solidFill>
+                  <a:schemeClr val="dk1"/>
+                </a:solidFill>
+                <a:latin typeface="Malgun Gothic"/>
+                <a:ea typeface="Malgun Gothic"/>
+                <a:cs typeface="Malgun Gothic"/>
+                <a:sym typeface="Malgun Gothic"/>
+              </a:defRPr>
+            </a:lvl2pPr>
+            <a:lvl3pPr marL="1371600" marR="0" lvl="2" indent="-330200" algn="l" rtl="0">
+              <a:lnSpc>
+                <a:spcPct val="120000"/>
+              </a:lnSpc>
+              <a:spcBef>
+                <a:spcPts val="500"/>
+              </a:spcBef>
+              <a:spcAft>
+                <a:spcPts val="0"/>
+              </a:spcAft>
+              <a:buClr>
+                <a:schemeClr val="dk1"/>
+              </a:buClr>
+              <a:buSzPts val="1600"/>
+              <a:buFont typeface="Arial"/>
+              <a:buChar char="•"/>
+              <a:defRPr sz="1600" b="0" i="0" u="none" strike="noStrike" cap="none">
+                <a:solidFill>
+                  <a:schemeClr val="dk1"/>
+                </a:solidFill>
+                <a:latin typeface="Malgun Gothic"/>
+                <a:ea typeface="Malgun Gothic"/>
+                <a:cs typeface="Malgun Gothic"/>
+                <a:sym typeface="Malgun Gothic"/>
+              </a:defRPr>
+            </a:lvl3pPr>
+            <a:lvl4pPr marL="1828800" marR="0" lvl="3" indent="-317500" algn="l" rtl="0">
+              <a:lnSpc>
+                <a:spcPct val="120000"/>
+              </a:lnSpc>
+              <a:spcBef>
+                <a:spcPts val="500"/>
+              </a:spcBef>
+              <a:spcAft>
+                <a:spcPts val="0"/>
+              </a:spcAft>
+              <a:buClr>
+                <a:schemeClr val="dk1"/>
+              </a:buClr>
+              <a:buSzPts val="1400"/>
+              <a:buFont typeface="Arial"/>
+              <a:buChar char="•"/>
+              <a:defRPr sz="1400" b="0" i="0" u="none" strike="noStrike" cap="none">
+                <a:solidFill>
+                  <a:schemeClr val="dk1"/>
+                </a:solidFill>
+                <a:latin typeface="Malgun Gothic"/>
+                <a:ea typeface="Malgun Gothic"/>
+                <a:cs typeface="Malgun Gothic"/>
+                <a:sym typeface="Malgun Gothic"/>
+              </a:defRPr>
+            </a:lvl4pPr>
+            <a:lvl5pPr marL="2286000" marR="0" lvl="4" indent="-317500" algn="l" rtl="0">
+              <a:lnSpc>
+                <a:spcPct val="120000"/>
+              </a:lnSpc>
+              <a:spcBef>
+                <a:spcPts val="500"/>
+              </a:spcBef>
+              <a:spcAft>
+                <a:spcPts val="0"/>
+              </a:spcAft>
+              <a:buClr>
+                <a:schemeClr val="dk1"/>
+              </a:buClr>
+              <a:buSzPts val="1400"/>
+              <a:buFont typeface="Arial"/>
+              <a:buChar char="•"/>
+              <a:defRPr sz="1400" b="0" i="0" u="none" strike="noStrike" cap="none">
+                <a:solidFill>
+                  <a:schemeClr val="dk1"/>
+                </a:solidFill>
+                <a:latin typeface="Malgun Gothic"/>
+                <a:ea typeface="Malgun Gothic"/>
+                <a:cs typeface="Malgun Gothic"/>
+                <a:sym typeface="Malgun Gothic"/>
+              </a:defRPr>
+            </a:lvl5pPr>
+            <a:lvl6pPr marL="2743200" marR="0" lvl="5" indent="-342900" algn="l" rtl="0">
+              <a:lnSpc>
+                <a:spcPct val="90000"/>
+              </a:lnSpc>
+              <a:spcBef>
+                <a:spcPts val="500"/>
+              </a:spcBef>
+              <a:spcAft>
+                <a:spcPts val="0"/>
+              </a:spcAft>
+              <a:buClr>
+                <a:schemeClr val="dk1"/>
+              </a:buClr>
+              <a:buSzPts val="1800"/>
+              <a:buFont typeface="Arial"/>
+              <a:buChar char="•"/>
+              <a:defRPr sz="1800" b="0" i="0" u="none" strike="noStrike" cap="none">
+                <a:solidFill>
+                  <a:schemeClr val="dk1"/>
+                </a:solidFill>
+                <a:latin typeface="Calibri"/>
+                <a:ea typeface="Calibri"/>
+                <a:cs typeface="Calibri"/>
+                <a:sym typeface="Calibri"/>
+              </a:defRPr>
+            </a:lvl6pPr>
+            <a:lvl7pPr marL="3200400" marR="0" lvl="6" indent="-342900" algn="l" rtl="0">
+              <a:lnSpc>
+                <a:spcPct val="90000"/>
+              </a:lnSpc>
+              <a:spcBef>
+                <a:spcPts val="500"/>
+              </a:spcBef>
+              <a:spcAft>
+                <a:spcPts val="0"/>
+              </a:spcAft>
+              <a:buClr>
+                <a:schemeClr val="dk1"/>
+              </a:buClr>
+              <a:buSzPts val="1800"/>
+              <a:buFont typeface="Arial"/>
+              <a:buChar char="•"/>
+              <a:defRPr sz="1800" b="0" i="0" u="none" strike="noStrike" cap="none">
+                <a:solidFill>
+                  <a:schemeClr val="dk1"/>
+                </a:solidFill>
+                <a:latin typeface="Calibri"/>
+                <a:ea typeface="Calibri"/>
+                <a:cs typeface="Calibri"/>
+                <a:sym typeface="Calibri"/>
+              </a:defRPr>
+            </a:lvl7pPr>
+            <a:lvl8pPr marL="3657600" marR="0" lvl="7" indent="-342900" algn="l" rtl="0">
+              <a:lnSpc>
+                <a:spcPct val="90000"/>
+              </a:lnSpc>
+              <a:spcBef>
+                <a:spcPts val="500"/>
+              </a:spcBef>
+              <a:spcAft>
+                <a:spcPts val="0"/>
+              </a:spcAft>
+              <a:buClr>
+                <a:schemeClr val="dk1"/>
+              </a:buClr>
+              <a:buSzPts val="1800"/>
+              <a:buFont typeface="Arial"/>
+              <a:buChar char="•"/>
+              <a:defRPr sz="1800" b="0" i="0" u="none" strike="noStrike" cap="none">
+                <a:solidFill>
+                  <a:schemeClr val="dk1"/>
+                </a:solidFill>
+                <a:latin typeface="Calibri"/>
+                <a:ea typeface="Calibri"/>
+                <a:cs typeface="Calibri"/>
+                <a:sym typeface="Calibri"/>
+              </a:defRPr>
+            </a:lvl8pPr>
+            <a:lvl9pPr marL="4114800" marR="0" lvl="8" indent="-342900" algn="l" rtl="0">
+              <a:lnSpc>
+                <a:spcPct val="90000"/>
+              </a:lnSpc>
+              <a:spcBef>
+                <a:spcPts val="500"/>
+              </a:spcBef>
+              <a:spcAft>
+                <a:spcPts val="0"/>
+              </a:spcAft>
+              <a:buClr>
+                <a:schemeClr val="dk1"/>
+              </a:buClr>
+              <a:buSzPts val="1800"/>
+              <a:buFont typeface="Arial"/>
+              <a:buChar char="•"/>
+              <a:defRPr sz="1800" b="0" i="0" u="none" strike="noStrike" cap="none">
+                <a:solidFill>
+                  <a:schemeClr val="dk1"/>
+                </a:solidFill>
+                <a:latin typeface="Calibri"/>
+                <a:ea typeface="Calibri"/>
+                <a:cs typeface="Calibri"/>
+                <a:sym typeface="Calibri"/>
+              </a:defRPr>
+            </a:lvl9pPr>
+          </a:lstStyle>
+          <a:p>
+            <a:pPr marL="228600" indent="-228600">
               <a:lnSpc>
                 <a:spcPct val="125000"/>
               </a:lnSpc>
               <a:spcBef>
+                <a:spcPts val="300"/>
+              </a:spcBef>
+              <a:buSzPct val="100000"/>
+            </a:pPr>
+            <a:r>
+              <a:rPr lang="en-US" altLang="ko-KR" sz="1600" dirty="0"/>
+              <a:t>9</a:t>
+            </a:r>
+            <a:r>
+              <a:rPr lang="ko-KR" altLang="en-US" sz="1600" dirty="0"/>
+              <a:t>주차</a:t>
+            </a:r>
+            <a:r>
+              <a:rPr lang="en-US" altLang="ko-KR" sz="1600" dirty="0"/>
+              <a:t>: CHAPTER 05 </a:t>
+            </a:r>
+            <a:r>
+              <a:rPr lang="ko-KR" altLang="en-US" sz="1600" dirty="0"/>
+              <a:t>트리 알고리즘 </a:t>
+            </a:r>
+            <a:r>
+              <a:rPr lang="en-US" altLang="ko-KR" sz="1600" dirty="0"/>
+              <a:t>(1)</a:t>
+            </a:r>
+            <a:endParaRPr lang="ko-KR" altLang="en-US" sz="1600" dirty="0"/>
+          </a:p>
+          <a:p>
+            <a:pPr marL="685800" lvl="1" indent="-228631">
+              <a:lnSpc>
+                <a:spcPct val="125000"/>
+              </a:lnSpc>
+              <a:spcBef>
                 <a:spcPts val="200"/>
               </a:spcBef>
-              <a:spcAft>
-                <a:spcPts val="0"/>
-              </a:spcAft>
-              <a:buClr>
-                <a:schemeClr val="dk1"/>
-              </a:buClr>
               <a:buSzPct val="100000"/>
-              <a:buChar char="⁃"/>
-            </a:pPr>
-            <a:r>
-              <a:rPr lang="ko-KR" sz="1600" dirty="0"/>
-              <a:t> 확률적 경사 </a:t>
-            </a:r>
-            <a:r>
-              <a:rPr lang="ko-KR" sz="1600" dirty="0" err="1"/>
-              <a:t>하강법</a:t>
-            </a:r>
-            <a:endParaRPr lang="en-US" altLang="ko-KR" sz="1600" dirty="0"/>
-          </a:p>
-          <a:p>
-            <a:pPr marL="228600" lvl="0" indent="-228600">
+            </a:pPr>
+            <a:r>
+              <a:rPr lang="ko-KR" altLang="en-US" sz="1400" dirty="0"/>
+              <a:t>결정 트리</a:t>
+            </a:r>
+          </a:p>
+          <a:p>
+            <a:pPr marL="228600" indent="-228600">
               <a:lnSpc>
                 <a:spcPct val="125000"/>
               </a:lnSpc>
@@ -11966,26 +12382,26 @@
               <a:buSzPct val="100000"/>
             </a:pPr>
             <a:r>
-              <a:rPr lang="en-US" altLang="ko-KR" sz="1800" dirty="0"/>
-              <a:t>7</a:t>
-            </a:r>
-            <a:r>
-              <a:rPr lang="ko-KR" altLang="en-US" sz="1800" dirty="0"/>
+              <a:rPr lang="en-US" altLang="ko-KR" sz="1600" dirty="0"/>
+              <a:t>10</a:t>
+            </a:r>
+            <a:r>
+              <a:rPr lang="ko-KR" altLang="en-US" sz="1600" dirty="0"/>
               <a:t>주차</a:t>
             </a:r>
             <a:r>
-              <a:rPr lang="en-US" altLang="ko-KR" sz="1800" dirty="0"/>
-              <a:t>: CHAPTER 04 </a:t>
-            </a:r>
-            <a:r>
-              <a:rPr lang="ko-KR" altLang="en-US" sz="1800" dirty="0"/>
-              <a:t>다양한 분류 알고리즘 </a:t>
-            </a:r>
-            <a:r>
-              <a:rPr lang="en-US" altLang="ko-KR" sz="1800" dirty="0"/>
+              <a:rPr lang="en-US" altLang="ko-KR" sz="1600" dirty="0"/>
+              <a:t>: CHAPTER 05 </a:t>
+            </a:r>
+            <a:r>
+              <a:rPr lang="ko-KR" altLang="en-US" sz="1600" dirty="0"/>
+              <a:t>트리 알고리즘 </a:t>
+            </a:r>
+            <a:r>
+              <a:rPr lang="en-US" altLang="ko-KR" sz="1600" dirty="0"/>
               <a:t>(2)</a:t>
             </a:r>
-            <a:endParaRPr lang="ko-KR" altLang="en-US" sz="1800" dirty="0"/>
+            <a:endParaRPr lang="ko-KR" altLang="en-US" sz="1600" dirty="0"/>
           </a:p>
           <a:p>
             <a:pPr marL="685800" lvl="1" indent="-228631">
@@ -11998,34 +12414,314 @@
               <a:buSzPct val="100000"/>
             </a:pPr>
             <a:r>
+              <a:rPr lang="ko-KR" altLang="en-US" sz="1400" dirty="0"/>
+              <a:t>교차 검증과 그리드 </a:t>
+            </a:r>
+            <a:r>
+              <a:rPr lang="ko-KR" altLang="en-US" sz="1400" dirty="0" err="1"/>
+              <a:t>서치</a:t>
+            </a:r>
+            <a:r>
+              <a:rPr lang="ko-KR" altLang="en-US" sz="1400" dirty="0"/>
+              <a:t> </a:t>
+            </a:r>
+            <a:r>
+              <a:rPr lang="en-US" altLang="ko-KR" sz="1400" dirty="0"/>
+              <a:t>/ </a:t>
+            </a:r>
+            <a:r>
+              <a:rPr lang="ko-KR" altLang="en-US" sz="1400" dirty="0"/>
+              <a:t>트리의 앙상블</a:t>
+            </a:r>
+          </a:p>
+          <a:p>
+            <a:pPr marL="228600" indent="-228600">
+              <a:lnSpc>
+                <a:spcPct val="125000"/>
+              </a:lnSpc>
+              <a:spcBef>
+                <a:spcPts val="300"/>
+              </a:spcBef>
+              <a:buSzPct val="100000"/>
+            </a:pPr>
+            <a:r>
+              <a:rPr lang="en-US" altLang="ko-KR" sz="1600" dirty="0"/>
+              <a:t>11</a:t>
+            </a:r>
+            <a:r>
               <a:rPr lang="ko-KR" altLang="en-US" sz="1600" dirty="0"/>
-              <a:t>확률적 경사 </a:t>
+              <a:t>주차</a:t>
+            </a:r>
+            <a:r>
+              <a:rPr lang="en-US" altLang="ko-KR" sz="1600" dirty="0"/>
+              <a:t>: CHAPTER 06 </a:t>
+            </a:r>
+            <a:r>
+              <a:rPr lang="ko-KR" altLang="en-US" sz="1600" dirty="0"/>
+              <a:t>비지도 학습 </a:t>
+            </a:r>
+            <a:r>
+              <a:rPr lang="en-US" altLang="ko-KR" sz="1600" dirty="0"/>
+              <a:t>(1)</a:t>
+            </a:r>
+            <a:endParaRPr lang="ko-KR" altLang="en-US" sz="1600" dirty="0"/>
+          </a:p>
+          <a:p>
+            <a:pPr marL="685800" lvl="1" indent="-228631">
+              <a:lnSpc>
+                <a:spcPct val="125000"/>
+              </a:lnSpc>
+              <a:spcBef>
+                <a:spcPts val="200"/>
+              </a:spcBef>
+              <a:buSzPct val="100000"/>
+            </a:pPr>
+            <a:r>
+              <a:rPr lang="ko-KR" altLang="en-US" sz="1400" dirty="0"/>
+              <a:t>군집 알고리즘 </a:t>
+            </a:r>
+            <a:r>
+              <a:rPr lang="en-US" altLang="ko-KR" sz="1400" dirty="0"/>
+              <a:t>/ k-</a:t>
+            </a:r>
+            <a:r>
+              <a:rPr lang="ko-KR" altLang="en-US" sz="1400" dirty="0"/>
+              <a:t>평균</a:t>
+            </a:r>
+          </a:p>
+          <a:p>
+            <a:pPr marL="228600" indent="-228600">
+              <a:lnSpc>
+                <a:spcPct val="125000"/>
+              </a:lnSpc>
+              <a:spcBef>
+                <a:spcPts val="300"/>
+              </a:spcBef>
+              <a:buSzPct val="100000"/>
+            </a:pPr>
+            <a:r>
+              <a:rPr lang="en-US" altLang="ko-KR" sz="1600" dirty="0"/>
+              <a:t>12</a:t>
+            </a:r>
+            <a:r>
+              <a:rPr lang="ko-KR" altLang="en-US" sz="1600" dirty="0"/>
+              <a:t>주차</a:t>
+            </a:r>
+            <a:r>
+              <a:rPr lang="en-US" altLang="ko-KR" sz="1600" dirty="0"/>
+              <a:t>: CHAPTER 06 </a:t>
+            </a:r>
+            <a:r>
+              <a:rPr lang="ko-KR" altLang="en-US" sz="1600" dirty="0"/>
+              <a:t>비지도 학습 </a:t>
+            </a:r>
+            <a:r>
+              <a:rPr lang="en-US" altLang="ko-KR" sz="1600" dirty="0"/>
+              <a:t>(2)</a:t>
+            </a:r>
+            <a:endParaRPr lang="ko-KR" altLang="en-US" sz="1600" dirty="0"/>
+          </a:p>
+          <a:p>
+            <a:pPr marL="685800" lvl="1" indent="-228631">
+              <a:lnSpc>
+                <a:spcPct val="125000"/>
+              </a:lnSpc>
+              <a:spcBef>
+                <a:spcPts val="200"/>
+              </a:spcBef>
+              <a:buSzPct val="100000"/>
+            </a:pPr>
+            <a:r>
+              <a:rPr lang="ko-KR" altLang="en-US" sz="1400" dirty="0"/>
+              <a:t>주성분 분석</a:t>
+            </a:r>
+          </a:p>
+          <a:p>
+            <a:pPr marL="228600" indent="-228600">
+              <a:lnSpc>
+                <a:spcPct val="125000"/>
+              </a:lnSpc>
+              <a:spcBef>
+                <a:spcPts val="300"/>
+              </a:spcBef>
+              <a:buSzPct val="100000"/>
+            </a:pPr>
+            <a:r>
+              <a:rPr lang="en-US" altLang="ko-KR" sz="1600" dirty="0"/>
+              <a:t>13</a:t>
+            </a:r>
+            <a:r>
+              <a:rPr lang="ko-KR" altLang="en-US" sz="1600" dirty="0"/>
+              <a:t>주차</a:t>
+            </a:r>
+            <a:r>
+              <a:rPr lang="en-US" altLang="ko-KR" sz="1600" dirty="0"/>
+              <a:t>: LLM </a:t>
             </a:r>
             <a:r>
               <a:rPr lang="ko-KR" altLang="en-US" sz="1600" dirty="0" err="1"/>
-              <a:t>하강법</a:t>
-            </a:r>
-            <a:endParaRPr sz="1600" dirty="0"/>
-          </a:p>
-          <a:p>
-            <a:pPr marL="228600" lvl="0" indent="-228600" algn="l" rtl="0">
+              <a:t>바이브코딩을</a:t>
+            </a:r>
+            <a:r>
+              <a:rPr lang="ko-KR" altLang="en-US" sz="1600" dirty="0"/>
+              <a:t> 통한 기말 프로젝트 </a:t>
+            </a:r>
+            <a:r>
+              <a:rPr lang="en-US" altLang="ko-KR" sz="1600" dirty="0"/>
+              <a:t>(1)</a:t>
+            </a:r>
+            <a:endParaRPr lang="ko-KR" altLang="en-US" sz="1600" dirty="0"/>
+          </a:p>
+          <a:p>
+            <a:pPr marL="685800" lvl="1" indent="-228631">
               <a:lnSpc>
                 <a:spcPct val="125000"/>
               </a:lnSpc>
               <a:spcBef>
+                <a:spcPts val="200"/>
+              </a:spcBef>
+              <a:buSzPct val="100000"/>
+            </a:pPr>
+            <a:r>
+              <a:rPr lang="ko-KR" altLang="en-US" sz="1400" dirty="0"/>
+              <a:t>프로젝트 주제 선정 및 기획 </a:t>
+            </a:r>
+            <a:r>
+              <a:rPr lang="en-US" altLang="ko-KR" sz="1400" dirty="0"/>
+              <a:t>/ AI </a:t>
+            </a:r>
+            <a:r>
+              <a:rPr lang="ko-KR" altLang="en-US" sz="1400" dirty="0"/>
+              <a:t>도구 활용 실습</a:t>
+            </a:r>
+          </a:p>
+          <a:p>
+            <a:pPr marL="228600" indent="-228600">
+              <a:lnSpc>
+                <a:spcPct val="125000"/>
+              </a:lnSpc>
+              <a:spcBef>
                 <a:spcPts val="300"/>
               </a:spcBef>
-              <a:spcAft>
-                <a:spcPts val="0"/>
-              </a:spcAft>
               <a:buSzPct val="100000"/>
-              <a:buChar char="◦"/>
-            </a:pPr>
-            <a:r>
-              <a:rPr lang="ko-KR" sz="1800" dirty="0"/>
-              <a:t>8주차: 중간고사</a:t>
-            </a:r>
-            <a:endParaRPr sz="1800" dirty="0"/>
+            </a:pPr>
+            <a:r>
+              <a:rPr lang="en-US" altLang="ko-KR" sz="1600" dirty="0"/>
+              <a:t>14</a:t>
+            </a:r>
+            <a:r>
+              <a:rPr lang="ko-KR" altLang="en-US" sz="1600" dirty="0"/>
+              <a:t>주차</a:t>
+            </a:r>
+            <a:r>
+              <a:rPr lang="en-US" altLang="ko-KR" sz="1600" dirty="0"/>
+              <a:t>: LLM </a:t>
+            </a:r>
+            <a:r>
+              <a:rPr lang="ko-KR" altLang="en-US" sz="1600" dirty="0" err="1"/>
+              <a:t>바이브코딩을</a:t>
+            </a:r>
+            <a:r>
+              <a:rPr lang="ko-KR" altLang="en-US" sz="1600" dirty="0"/>
+              <a:t> 통한 기말 프로젝트 </a:t>
+            </a:r>
+            <a:r>
+              <a:rPr lang="en-US" altLang="ko-KR" sz="1600" dirty="0"/>
+              <a:t>(2)</a:t>
+            </a:r>
+            <a:endParaRPr lang="ko-KR" altLang="en-US" sz="1600" dirty="0"/>
+          </a:p>
+          <a:p>
+            <a:pPr marL="685800" lvl="1" indent="-228600">
+              <a:lnSpc>
+                <a:spcPct val="125000"/>
+              </a:lnSpc>
+              <a:spcBef>
+                <a:spcPts val="300"/>
+              </a:spcBef>
+              <a:buSzPct val="100000"/>
+            </a:pPr>
+            <a:r>
+              <a:rPr lang="ko-KR" altLang="en-US" sz="1400" dirty="0"/>
+              <a:t>프로젝트 수행</a:t>
+            </a:r>
+          </a:p>
+          <a:p>
+            <a:pPr marL="228600" indent="-228600">
+              <a:lnSpc>
+                <a:spcPct val="125000"/>
+              </a:lnSpc>
+              <a:spcBef>
+                <a:spcPts val="300"/>
+              </a:spcBef>
+              <a:buSzPct val="100000"/>
+            </a:pPr>
+            <a:r>
+              <a:rPr lang="en-US" altLang="ko-KR" sz="1600" dirty="0"/>
+              <a:t>15</a:t>
+            </a:r>
+            <a:r>
+              <a:rPr lang="ko-KR" altLang="en-US" sz="1600" dirty="0"/>
+              <a:t>주차</a:t>
+            </a:r>
+            <a:r>
+              <a:rPr lang="en-US" altLang="ko-KR" sz="1600" dirty="0"/>
+              <a:t>: </a:t>
+            </a:r>
+            <a:r>
+              <a:rPr lang="ko-KR" altLang="en-US" sz="1600" dirty="0"/>
+              <a:t>보강 및 기말 프로젝트 </a:t>
+            </a:r>
+            <a:r>
+              <a:rPr lang="en-US" altLang="ko-KR" sz="1600" dirty="0"/>
+              <a:t>(3)</a:t>
+            </a:r>
+            <a:r>
+              <a:rPr lang="ko-KR" altLang="en-US" sz="1600" dirty="0"/>
+              <a:t> 수행</a:t>
+            </a:r>
+          </a:p>
+          <a:p>
+            <a:pPr marL="685800" lvl="1" indent="-228600">
+              <a:lnSpc>
+                <a:spcPct val="125000"/>
+              </a:lnSpc>
+              <a:spcBef>
+                <a:spcPts val="300"/>
+              </a:spcBef>
+              <a:buSzPct val="100000"/>
+            </a:pPr>
+            <a:r>
+              <a:rPr lang="ko-KR" altLang="en-US" sz="1400" dirty="0"/>
+              <a:t>프로젝트 제출</a:t>
+            </a:r>
+          </a:p>
+          <a:p>
+            <a:pPr marL="228600" indent="-228600">
+              <a:lnSpc>
+                <a:spcPct val="125000"/>
+              </a:lnSpc>
+              <a:spcBef>
+                <a:spcPts val="300"/>
+              </a:spcBef>
+              <a:buSzPct val="100000"/>
+            </a:pPr>
+            <a:r>
+              <a:rPr lang="en-US" altLang="ko-KR" sz="1600" dirty="0"/>
+              <a:t>16</a:t>
+            </a:r>
+            <a:r>
+              <a:rPr lang="ko-KR" altLang="en-US" sz="1600" dirty="0"/>
+              <a:t>주차</a:t>
+            </a:r>
+            <a:r>
+              <a:rPr lang="en-US" altLang="ko-KR" sz="1600" dirty="0"/>
+              <a:t>: </a:t>
+            </a:r>
+            <a:r>
+              <a:rPr lang="ko-KR" altLang="en-US" sz="1600" dirty="0"/>
+              <a:t>기말고사</a:t>
+            </a:r>
           </a:p>
         </p:txBody>
       </p:sp>
@@ -12201,10 +12897,10 @@
               <a:buChar char="◦"/>
             </a:pPr>
             <a:r>
-              <a:rPr lang="ko-KR" sz="1800" dirty="0"/>
+              <a:rPr lang="ko-KR" sz="1600" dirty="0"/>
               <a:t>9주차: CHAPTER 05 트리 알고리즘 (1)</a:t>
             </a:r>
-            <a:endParaRPr sz="1800" dirty="0"/>
+            <a:endParaRPr sz="1600" dirty="0"/>
           </a:p>
           <a:p>
             <a:pPr marL="685800" lvl="1" indent="-228631" algn="l" rtl="0">
@@ -12224,10 +12920,10 @@
               <a:buChar char="⁃"/>
             </a:pPr>
             <a:r>
-              <a:rPr lang="ko-KR" sz="1600" dirty="0"/>
+              <a:rPr lang="ko-KR" sz="1400" dirty="0"/>
               <a:t>결정 트리</a:t>
             </a:r>
-            <a:endParaRPr sz="1600" dirty="0"/>
+            <a:endParaRPr sz="1400" dirty="0"/>
           </a:p>
           <a:p>
             <a:pPr marL="228600" lvl="0" indent="-228600" algn="l" rtl="0">
@@ -12244,10 +12940,10 @@
               <a:buChar char="◦"/>
             </a:pPr>
             <a:r>
-              <a:rPr lang="ko-KR" sz="1800" dirty="0"/>
+              <a:rPr lang="ko-KR" sz="1600" dirty="0"/>
               <a:t>10주차: CHAPTER 05 트리 알고리즘 (2)</a:t>
             </a:r>
-            <a:endParaRPr sz="1800" dirty="0"/>
+            <a:endParaRPr sz="1600" dirty="0"/>
           </a:p>
           <a:p>
             <a:pPr marL="685800" lvl="1" indent="-228631" algn="l" rtl="0">
@@ -12267,10 +12963,10 @@
               <a:buChar char="⁃"/>
             </a:pPr>
             <a:r>
-              <a:rPr lang="ko-KR" sz="1600" dirty="0"/>
+              <a:rPr lang="ko-KR" sz="1400" dirty="0"/>
               <a:t>교차 검증과 그리드 서치 / 트리의 앙상블</a:t>
             </a:r>
-            <a:endParaRPr sz="1600" dirty="0"/>
+            <a:endParaRPr sz="1400" dirty="0"/>
           </a:p>
           <a:p>
             <a:pPr marL="228600" lvl="0" indent="-228600" algn="l" rtl="0">
@@ -12287,10 +12983,10 @@
               <a:buChar char="◦"/>
             </a:pPr>
             <a:r>
-              <a:rPr lang="ko-KR" sz="1800" dirty="0"/>
+              <a:rPr lang="ko-KR" sz="1600" dirty="0"/>
               <a:t>11주차: CHAPTER 06 비지도 학습 (1)</a:t>
             </a:r>
-            <a:endParaRPr sz="1800" dirty="0"/>
+            <a:endParaRPr sz="1600" dirty="0"/>
           </a:p>
           <a:p>
             <a:pPr marL="685800" lvl="1" indent="-228631" algn="l" rtl="0">
@@ -12310,10 +13006,10 @@
               <a:buChar char="⁃"/>
             </a:pPr>
             <a:r>
-              <a:rPr lang="ko-KR" sz="1600" dirty="0"/>
+              <a:rPr lang="ko-KR" sz="1400" dirty="0"/>
               <a:t>군집 알고리즘 / k-평균</a:t>
             </a:r>
-            <a:endParaRPr sz="1600" dirty="0"/>
+            <a:endParaRPr sz="1400" dirty="0"/>
           </a:p>
           <a:p>
             <a:pPr marL="228600" lvl="0" indent="-228600" algn="l" rtl="0">
@@ -12330,10 +13026,10 @@
               <a:buChar char="◦"/>
             </a:pPr>
             <a:r>
-              <a:rPr lang="ko-KR" sz="1800" dirty="0"/>
+              <a:rPr lang="ko-KR" sz="1600" dirty="0"/>
               <a:t>12주차: CHAPTER 06 비지도 학습 (2)</a:t>
             </a:r>
-            <a:endParaRPr sz="1800" dirty="0"/>
+            <a:endParaRPr sz="1600" dirty="0"/>
           </a:p>
           <a:p>
             <a:pPr marL="685800" lvl="1" indent="-228631" algn="l" rtl="0">
@@ -12353,10 +13049,10 @@
               <a:buChar char="⁃"/>
             </a:pPr>
             <a:r>
-              <a:rPr lang="ko-KR" sz="1600" dirty="0"/>
+              <a:rPr lang="ko-KR" sz="1400" dirty="0"/>
               <a:t>주성분 분석</a:t>
             </a:r>
-            <a:endParaRPr sz="1600" dirty="0"/>
+            <a:endParaRPr sz="1400" dirty="0"/>
           </a:p>
           <a:p>
             <a:pPr marL="228600" lvl="0" indent="-228600" algn="l" rtl="0">
@@ -12373,34 +13069,34 @@
               <a:buChar char="◦"/>
             </a:pPr>
             <a:r>
-              <a:rPr lang="ko-KR" sz="1800" dirty="0"/>
+              <a:rPr lang="ko-KR" sz="1600" dirty="0"/>
               <a:t>13주차: </a:t>
             </a:r>
             <a:r>
-              <a:rPr lang="en-US" altLang="ko-KR" sz="1800" dirty="0"/>
+              <a:rPr lang="en-US" altLang="ko-KR" sz="1600" dirty="0"/>
               <a:t>LLM </a:t>
             </a:r>
             <a:r>
-              <a:rPr lang="ko-KR" altLang="en-US" sz="1800" dirty="0" err="1"/>
+              <a:rPr lang="ko-KR" altLang="en-US" sz="1600" dirty="0" err="1"/>
               <a:t>바이브코딩을</a:t>
             </a:r>
             <a:r>
-              <a:rPr lang="ko-KR" altLang="en-US" sz="1800" dirty="0"/>
+              <a:rPr lang="ko-KR" altLang="en-US" sz="1600" dirty="0"/>
               <a:t> 통한 기말</a:t>
             </a:r>
             <a:r>
-              <a:rPr lang="en-US" altLang="ko-KR" sz="1800" dirty="0"/>
+              <a:rPr lang="en-US" altLang="ko-KR" sz="1600" dirty="0"/>
               <a:t> </a:t>
             </a:r>
             <a:r>
-              <a:rPr lang="ko-KR" altLang="en-US" sz="1800" dirty="0"/>
+              <a:rPr lang="ko-KR" altLang="en-US" sz="1600" dirty="0"/>
               <a:t>프로젝트</a:t>
             </a:r>
             <a:r>
-              <a:rPr lang="ko-KR" sz="1800" dirty="0"/>
+              <a:rPr lang="ko-KR" sz="1600" dirty="0"/>
               <a:t> (1)</a:t>
             </a:r>
-            <a:endParaRPr sz="1800" dirty="0"/>
+            <a:endParaRPr sz="1600" dirty="0"/>
           </a:p>
           <a:p>
             <a:pPr marL="685800" lvl="1" indent="-228631" algn="l" rtl="0">
@@ -12420,13 +13116,53 @@
               <a:buChar char="⁃"/>
             </a:pPr>
             <a:r>
+              <a:rPr lang="ko-KR" sz="1400" dirty="0"/>
+              <a:t>프로젝트 주제 선정 및 기획 / AI 도구 활용 실습</a:t>
+            </a:r>
+            <a:endParaRPr sz="1400" dirty="0"/>
+          </a:p>
+          <a:p>
+            <a:pPr marL="228600" lvl="0" indent="-228600">
+              <a:lnSpc>
+                <a:spcPct val="125000"/>
+              </a:lnSpc>
+              <a:spcBef>
+                <a:spcPts val="300"/>
+              </a:spcBef>
+              <a:buSzPct val="100000"/>
+            </a:pPr>
+            <a:r>
               <a:rPr lang="ko-KR" sz="1600" dirty="0"/>
-              <a:t>프로젝트 주제 선정 및 기획 / AI 도구 활용 실습</a:t>
-            </a:r>
-            <a:endParaRPr sz="1600" dirty="0"/>
-          </a:p>
-          <a:p>
-            <a:pPr marL="228600" lvl="0" indent="-228600">
+              <a:t>14주차: </a:t>
+            </a:r>
+            <a:r>
+              <a:rPr lang="en-US" altLang="ko-KR" sz="1600" dirty="0"/>
+              <a:t>LLM </a:t>
+            </a:r>
+            <a:r>
+              <a:rPr lang="ko-KR" altLang="en-US" sz="1600" dirty="0" err="1"/>
+              <a:t>바이브코딩을</a:t>
+            </a:r>
+            <a:r>
+              <a:rPr lang="ko-KR" altLang="en-US" sz="1600" dirty="0"/>
+              <a:t> 통한 기말</a:t>
+            </a:r>
+            <a:r>
+              <a:rPr lang="en-US" altLang="ko-KR" sz="1600" dirty="0"/>
+              <a:t> </a:t>
+            </a:r>
+            <a:r>
+              <a:rPr lang="ko-KR" altLang="en-US" sz="1600" dirty="0"/>
+              <a:t>프로젝트</a:t>
+            </a:r>
+            <a:r>
+              <a:rPr lang="ko-KR" sz="1600" dirty="0"/>
+              <a:t> (2)</a:t>
+            </a:r>
+            <a:endParaRPr lang="en-US" altLang="ko-KR" sz="1600" dirty="0"/>
+          </a:p>
+          <a:p>
+            <a:pPr marL="685800" lvl="1" indent="-228600">
               <a:lnSpc>
                 <a:spcPct val="125000"/>
               </a:lnSpc>
@@ -12436,50 +13172,10 @@
               <a:buSzPct val="100000"/>
             </a:pPr>
             <a:r>
-              <a:rPr lang="ko-KR" sz="1800" dirty="0"/>
-              <a:t>14주차: </a:t>
-            </a:r>
-            <a:r>
-              <a:rPr lang="en-US" altLang="ko-KR" sz="1800" dirty="0"/>
-              <a:t>LLM </a:t>
-            </a:r>
-            <a:r>
-              <a:rPr lang="ko-KR" altLang="en-US" sz="1800" dirty="0" err="1"/>
-              <a:t>바이브코딩을</a:t>
-            </a:r>
-            <a:r>
-              <a:rPr lang="ko-KR" altLang="en-US" sz="1800" dirty="0"/>
-              <a:t> 통한 기말</a:t>
-            </a:r>
-            <a:r>
-              <a:rPr lang="en-US" altLang="ko-KR" sz="1800" dirty="0"/>
-              <a:t> </a:t>
-            </a:r>
-            <a:r>
-              <a:rPr lang="ko-KR" altLang="en-US" sz="1800" dirty="0"/>
-              <a:t>프로젝트</a:t>
-            </a:r>
-            <a:r>
-              <a:rPr lang="ko-KR" sz="1800" dirty="0"/>
-              <a:t> (2)</a:t>
-            </a:r>
-            <a:endParaRPr lang="en-US" altLang="ko-KR" sz="1800" dirty="0"/>
-          </a:p>
-          <a:p>
-            <a:pPr marL="685800" lvl="1" indent="-228600">
-              <a:lnSpc>
-                <a:spcPct val="125000"/>
-              </a:lnSpc>
-              <a:spcBef>
-                <a:spcPts val="300"/>
-              </a:spcBef>
-              <a:buSzPct val="100000"/>
-            </a:pPr>
-            <a:r>
-              <a:rPr lang="ko-KR" altLang="en-US" sz="1600" dirty="0"/>
+              <a:rPr lang="ko-KR" altLang="en-US" sz="1400" dirty="0"/>
               <a:t>프로젝트 수행</a:t>
             </a:r>
-            <a:endParaRPr lang="en-US" altLang="ko-KR" sz="1600" dirty="0"/>
+            <a:endParaRPr lang="en-US" altLang="ko-KR" sz="1400" dirty="0"/>
           </a:p>
           <a:p>
             <a:pPr marL="228600" lvl="0" indent="-228600" algn="l" rtl="0">
@@ -12496,22 +13192,22 @@
               <a:buChar char="◦"/>
             </a:pPr>
             <a:r>
-              <a:rPr lang="ko-KR" sz="1800" dirty="0"/>
+              <a:rPr lang="ko-KR" sz="1600" dirty="0"/>
               <a:t>15주차: </a:t>
             </a:r>
             <a:r>
-              <a:rPr lang="ko-KR" altLang="en-US" sz="1800" dirty="0"/>
+              <a:rPr lang="ko-KR" altLang="en-US" sz="1600" dirty="0"/>
               <a:t>보강 및 기말 프로젝트 </a:t>
             </a:r>
             <a:r>
-              <a:rPr lang="en-US" altLang="ko-KR" sz="1800" dirty="0"/>
+              <a:rPr lang="en-US" altLang="ko-KR" sz="1600" dirty="0"/>
               <a:t>(3)</a:t>
             </a:r>
             <a:r>
-              <a:rPr lang="ko-KR" altLang="en-US" sz="1800" dirty="0"/>
+              <a:rPr lang="ko-KR" altLang="en-US" sz="1600" dirty="0"/>
               <a:t> 수행</a:t>
             </a:r>
-            <a:endParaRPr lang="en-US" altLang="ko-KR" sz="1800" dirty="0"/>
+            <a:endParaRPr lang="en-US" altLang="ko-KR" sz="1600" dirty="0"/>
           </a:p>
           <a:p>
             <a:pPr marL="685800" lvl="1" indent="-228600">
@@ -12524,7 +13220,7 @@
               <a:buSzPct val="100000"/>
             </a:pPr>
             <a:r>
-              <a:rPr lang="ko-KR" altLang="en-US" sz="1600" dirty="0"/>
+              <a:rPr lang="ko-KR" altLang="en-US" sz="1400" dirty="0"/>
               <a:t>프로젝트 제출</a:t>
             </a:r>
           </a:p>
@@ -12543,22 +13239,22 @@
               <a:buChar char="◦"/>
             </a:pPr>
             <a:r>
-              <a:rPr lang="en-US" altLang="ko-KR" sz="1800" dirty="0"/>
+              <a:rPr lang="en-US" altLang="ko-KR" sz="1600" dirty="0"/>
               <a:t>16</a:t>
             </a:r>
             <a:r>
-              <a:rPr lang="ko-KR" altLang="en-US" sz="1800" dirty="0"/>
+              <a:rPr lang="ko-KR" altLang="en-US" sz="1600" dirty="0"/>
               <a:t>주차</a:t>
             </a:r>
             <a:r>
-              <a:rPr lang="en-US" altLang="ko-KR" sz="1800" dirty="0"/>
+              <a:rPr lang="en-US" altLang="ko-KR" sz="1600" dirty="0"/>
               <a:t>: </a:t>
             </a:r>
             <a:r>
-              <a:rPr lang="ko-KR" altLang="en-US" sz="1800" dirty="0"/>
+              <a:rPr lang="ko-KR" altLang="en-US" sz="1600" dirty="0"/>
               <a:t>기말고사</a:t>
             </a:r>
-            <a:endParaRPr sz="1800" dirty="0"/>
+            <a:endParaRPr sz="1600" dirty="0"/>
           </a:p>
         </p:txBody>
       </p:sp>
@@ -12798,7 +13494,7 @@
               <a:rPr lang="ko-KR" altLang="en-US" sz="1700" dirty="0"/>
               <a:t>점 </a:t>
             </a:r>
-            <a:endParaRPr lang="en-US" altLang="ko-KR" sz="1700"/>
+            <a:endParaRPr lang="en-US" altLang="ko-KR" sz="1700" dirty="0"/>
           </a:p>
           <a:p>
             <a:pPr marL="685800" lvl="1" indent="-228631">
@@ -12811,12 +13507,8 @@
               <a:buSzPct val="100000"/>
             </a:pPr>
             <a:r>
-              <a:rPr lang="ko-KR" altLang="en-US" sz="1700"/>
-              <a:t>기말 </a:t>
-            </a:r>
-            <a:r>
               <a:rPr lang="ko-KR" altLang="en-US" sz="1700" dirty="0"/>
-              <a:t>프로젝트</a:t>
+              <a:t>기말 프로젝트</a:t>
             </a:r>
             <a:r>
               <a:rPr lang="en-US" altLang="ko-KR" sz="1700" dirty="0"/>

--- a/data/인공지능/00 - preview.pptx
+++ b/data/인공지능/00 - preview.pptx
@@ -5,7 +5,7 @@
     <p:sldMasterId id="2147483648" r:id="rId1"/>
   </p:sldMasterIdLst>
   <p:notesMasterIdLst>
-    <p:notesMasterId r:id="rId10"/>
+    <p:notesMasterId r:id="rId9"/>
   </p:notesMasterIdLst>
   <p:sldIdLst>
     <p:sldId id="257" r:id="rId2"/>
@@ -13,29 +13,28 @@
     <p:sldId id="260" r:id="rId4"/>
     <p:sldId id="304" r:id="rId5"/>
     <p:sldId id="305" r:id="rId6"/>
-    <p:sldId id="306" r:id="rId7"/>
-    <p:sldId id="307" r:id="rId8"/>
-    <p:sldId id="308" r:id="rId9"/>
+    <p:sldId id="307" r:id="rId7"/>
+    <p:sldId id="308" r:id="rId8"/>
   </p:sldIdLst>
   <p:sldSz cx="12192000" cy="6858000"/>
   <p:notesSz cx="6858000" cy="9144000"/>
   <p:embeddedFontLst>
     <p:embeddedFont>
       <p:font typeface="Malgun Gothic" panose="020B0503020000020004" pitchFamily="50" charset="-127"/>
-      <p:regular r:id="rId11"/>
-      <p:bold r:id="rId12"/>
+      <p:regular r:id="rId10"/>
+      <p:bold r:id="rId11"/>
     </p:embeddedFont>
     <p:embeddedFont>
       <p:font typeface="Calibri" panose="020F0502020204030204" pitchFamily="34" charset="0"/>
-      <p:regular r:id="rId13"/>
-      <p:bold r:id="rId14"/>
-      <p:italic r:id="rId15"/>
-      <p:boldItalic r:id="rId16"/>
+      <p:regular r:id="rId12"/>
+      <p:bold r:id="rId13"/>
+      <p:italic r:id="rId14"/>
+      <p:boldItalic r:id="rId15"/>
     </p:embeddedFont>
     <p:embeddedFont>
       <p:font typeface="Noto Sans Symbols" pitchFamily="2" charset="0"/>
-      <p:regular r:id="rId17"/>
-      <p:bold r:id="rId18"/>
+      <p:regular r:id="rId16"/>
+      <p:bold r:id="rId17"/>
     </p:embeddedFont>
   </p:embeddedFontLst>
   <p:defaultTextStyle>
@@ -11561,7 +11560,15 @@
             </a:r>
             <a:r>
               <a:rPr lang="ko-KR" dirty="0"/>
-              <a:t> 강의 계획 (1)</a:t>
+              <a:t> </a:t>
+            </a:r>
+            <a:r>
+              <a:rPr lang="ko-KR"/>
+              <a:t>강의 계</a:t>
+            </a:r>
+            <a:r>
+              <a:rPr lang="ko-KR" altLang="en-US"/>
+              <a:t>획</a:t>
             </a:r>
             <a:endParaRPr dirty="0"/>
           </a:p>
@@ -12063,7 +12070,7 @@
         <p:spPr>
           <a:xfrm>
             <a:off x="6811787" y="1079999"/>
-            <a:ext cx="5080383" cy="5757433"/>
+            <a:ext cx="5080383" cy="5074813"/>
           </a:xfrm>
           <a:prstGeom prst="rect">
             <a:avLst/>
@@ -12797,12 +12804,8 @@
               <a:buNone/>
             </a:pPr>
             <a:r>
-              <a:rPr lang="ko-KR" dirty="0" err="1"/>
-              <a:t>주차별</a:t>
-            </a:r>
-            <a:r>
               <a:rPr lang="ko-KR" dirty="0"/>
-              <a:t> 강의 계획 (2)</a:t>
+              <a:t>평가 방법</a:t>
             </a:r>
             <a:endParaRPr dirty="0"/>
           </a:p>
@@ -12867,7 +12870,7 @@
         <p:spPr>
           <a:xfrm>
             <a:off x="468000" y="1079999"/>
-            <a:ext cx="11624609" cy="5757433"/>
+            <a:ext cx="11624609" cy="5670043"/>
           </a:xfrm>
           <a:prstGeom prst="rect">
             <a:avLst/>
@@ -12879,249 +12882,10 @@
         </p:spPr>
         <p:txBody>
           <a:bodyPr spcFirstLastPara="1" wrap="square" lIns="91425" tIns="45700" rIns="91425" bIns="45700" anchor="t" anchorCtr="0">
-            <a:normAutofit/>
+            <a:normAutofit fontScale="92500" lnSpcReduction="10000"/>
           </a:bodyPr>
           <a:lstStyle/>
           <a:p>
-            <a:pPr marL="228600" lvl="0" indent="-228600" algn="l" rtl="0">
-              <a:lnSpc>
-                <a:spcPct val="125000"/>
-              </a:lnSpc>
-              <a:spcBef>
-                <a:spcPts val="300"/>
-              </a:spcBef>
-              <a:spcAft>
-                <a:spcPts val="0"/>
-              </a:spcAft>
-              <a:buSzPct val="100000"/>
-              <a:buChar char="◦"/>
-            </a:pPr>
-            <a:r>
-              <a:rPr lang="ko-KR" sz="1600" dirty="0"/>
-              <a:t>9주차: CHAPTER 05 트리 알고리즘 (1)</a:t>
-            </a:r>
-            <a:endParaRPr sz="1600" dirty="0"/>
-          </a:p>
-          <a:p>
-            <a:pPr marL="685800" lvl="1" indent="-228631" algn="l" rtl="0">
-              <a:lnSpc>
-                <a:spcPct val="125000"/>
-              </a:lnSpc>
-              <a:spcBef>
-                <a:spcPts val="200"/>
-              </a:spcBef>
-              <a:spcAft>
-                <a:spcPts val="0"/>
-              </a:spcAft>
-              <a:buClr>
-                <a:schemeClr val="dk1"/>
-              </a:buClr>
-              <a:buSzPct val="100000"/>
-              <a:buChar char="⁃"/>
-            </a:pPr>
-            <a:r>
-              <a:rPr lang="ko-KR" sz="1400" dirty="0"/>
-              <a:t>결정 트리</a:t>
-            </a:r>
-            <a:endParaRPr sz="1400" dirty="0"/>
-          </a:p>
-          <a:p>
-            <a:pPr marL="228600" lvl="0" indent="-228600" algn="l" rtl="0">
-              <a:lnSpc>
-                <a:spcPct val="125000"/>
-              </a:lnSpc>
-              <a:spcBef>
-                <a:spcPts val="300"/>
-              </a:spcBef>
-              <a:spcAft>
-                <a:spcPts val="0"/>
-              </a:spcAft>
-              <a:buSzPct val="100000"/>
-              <a:buChar char="◦"/>
-            </a:pPr>
-            <a:r>
-              <a:rPr lang="ko-KR" sz="1600" dirty="0"/>
-              <a:t>10주차: CHAPTER 05 트리 알고리즘 (2)</a:t>
-            </a:r>
-            <a:endParaRPr sz="1600" dirty="0"/>
-          </a:p>
-          <a:p>
-            <a:pPr marL="685800" lvl="1" indent="-228631" algn="l" rtl="0">
-              <a:lnSpc>
-                <a:spcPct val="125000"/>
-              </a:lnSpc>
-              <a:spcBef>
-                <a:spcPts val="200"/>
-              </a:spcBef>
-              <a:spcAft>
-                <a:spcPts val="0"/>
-              </a:spcAft>
-              <a:buClr>
-                <a:schemeClr val="dk1"/>
-              </a:buClr>
-              <a:buSzPct val="100000"/>
-              <a:buChar char="⁃"/>
-            </a:pPr>
-            <a:r>
-              <a:rPr lang="ko-KR" sz="1400" dirty="0"/>
-              <a:t>교차 검증과 그리드 서치 / 트리의 앙상블</a:t>
-            </a:r>
-            <a:endParaRPr sz="1400" dirty="0"/>
-          </a:p>
-          <a:p>
-            <a:pPr marL="228600" lvl="0" indent="-228600" algn="l" rtl="0">
-              <a:lnSpc>
-                <a:spcPct val="125000"/>
-              </a:lnSpc>
-              <a:spcBef>
-                <a:spcPts val="300"/>
-              </a:spcBef>
-              <a:spcAft>
-                <a:spcPts val="0"/>
-              </a:spcAft>
-              <a:buSzPct val="100000"/>
-              <a:buChar char="◦"/>
-            </a:pPr>
-            <a:r>
-              <a:rPr lang="ko-KR" sz="1600" dirty="0"/>
-              <a:t>11주차: CHAPTER 06 비지도 학습 (1)</a:t>
-            </a:r>
-            <a:endParaRPr sz="1600" dirty="0"/>
-          </a:p>
-          <a:p>
-            <a:pPr marL="685800" lvl="1" indent="-228631" algn="l" rtl="0">
-              <a:lnSpc>
-                <a:spcPct val="125000"/>
-              </a:lnSpc>
-              <a:spcBef>
-                <a:spcPts val="200"/>
-              </a:spcBef>
-              <a:spcAft>
-                <a:spcPts val="0"/>
-              </a:spcAft>
-              <a:buClr>
-                <a:schemeClr val="dk1"/>
-              </a:buClr>
-              <a:buSzPct val="100000"/>
-              <a:buChar char="⁃"/>
-            </a:pPr>
-            <a:r>
-              <a:rPr lang="ko-KR" sz="1400" dirty="0"/>
-              <a:t>군집 알고리즘 / k-평균</a:t>
-            </a:r>
-            <a:endParaRPr sz="1400" dirty="0"/>
-          </a:p>
-          <a:p>
-            <a:pPr marL="228600" lvl="0" indent="-228600" algn="l" rtl="0">
-              <a:lnSpc>
-                <a:spcPct val="125000"/>
-              </a:lnSpc>
-              <a:spcBef>
-                <a:spcPts val="300"/>
-              </a:spcBef>
-              <a:spcAft>
-                <a:spcPts val="0"/>
-              </a:spcAft>
-              <a:buSzPct val="100000"/>
-              <a:buChar char="◦"/>
-            </a:pPr>
-            <a:r>
-              <a:rPr lang="ko-KR" sz="1600" dirty="0"/>
-              <a:t>12주차: CHAPTER 06 비지도 학습 (2)</a:t>
-            </a:r>
-            <a:endParaRPr sz="1600" dirty="0"/>
-          </a:p>
-          <a:p>
-            <a:pPr marL="685800" lvl="1" indent="-228631" algn="l" rtl="0">
-              <a:lnSpc>
-                <a:spcPct val="125000"/>
-              </a:lnSpc>
-              <a:spcBef>
-                <a:spcPts val="200"/>
-              </a:spcBef>
-              <a:spcAft>
-                <a:spcPts val="0"/>
-              </a:spcAft>
-              <a:buClr>
-                <a:schemeClr val="dk1"/>
-              </a:buClr>
-              <a:buSzPct val="100000"/>
-              <a:buChar char="⁃"/>
-            </a:pPr>
-            <a:r>
-              <a:rPr lang="ko-KR" sz="1400" dirty="0"/>
-              <a:t>주성분 분석</a:t>
-            </a:r>
-            <a:endParaRPr sz="1400" dirty="0"/>
-          </a:p>
-          <a:p>
-            <a:pPr marL="228600" lvl="0" indent="-228600" algn="l" rtl="0">
-              <a:lnSpc>
-                <a:spcPct val="125000"/>
-              </a:lnSpc>
-              <a:spcBef>
-                <a:spcPts val="300"/>
-              </a:spcBef>
-              <a:spcAft>
-                <a:spcPts val="0"/>
-              </a:spcAft>
-              <a:buSzPct val="100000"/>
-              <a:buChar char="◦"/>
-            </a:pPr>
-            <a:r>
-              <a:rPr lang="ko-KR" sz="1600" dirty="0"/>
-              <a:t>13주차: </a:t>
-            </a:r>
-            <a:r>
-              <a:rPr lang="en-US" altLang="ko-KR" sz="1600" dirty="0"/>
-              <a:t>LLM </a:t>
-            </a:r>
-            <a:r>
-              <a:rPr lang="ko-KR" altLang="en-US" sz="1600" dirty="0" err="1"/>
-              <a:t>바이브코딩을</a:t>
-            </a:r>
-            <a:r>
-              <a:rPr lang="ko-KR" altLang="en-US" sz="1600" dirty="0"/>
-              <a:t> 통한 기말</a:t>
-            </a:r>
-            <a:r>
-              <a:rPr lang="en-US" altLang="ko-KR" sz="1600" dirty="0"/>
-              <a:t> </a:t>
-            </a:r>
-            <a:r>
-              <a:rPr lang="ko-KR" altLang="en-US" sz="1600" dirty="0"/>
-              <a:t>프로젝트</a:t>
-            </a:r>
-            <a:r>
-              <a:rPr lang="ko-KR" sz="1600" dirty="0"/>
-              <a:t> (1)</a:t>
-            </a:r>
-            <a:endParaRPr sz="1600" dirty="0"/>
-          </a:p>
-          <a:p>
-            <a:pPr marL="685800" lvl="1" indent="-228631" algn="l" rtl="0">
-              <a:lnSpc>
-                <a:spcPct val="125000"/>
-              </a:lnSpc>
-              <a:spcBef>
-                <a:spcPts val="200"/>
-              </a:spcBef>
-              <a:spcAft>
-                <a:spcPts val="0"/>
-              </a:spcAft>
-              <a:buClr>
-                <a:schemeClr val="dk1"/>
-              </a:buClr>
-              <a:buSzPct val="100000"/>
-              <a:buChar char="⁃"/>
-            </a:pPr>
-            <a:r>
-              <a:rPr lang="ko-KR" sz="1400" dirty="0"/>
-              <a:t>프로젝트 주제 선정 및 기획 / AI 도구 활용 실습</a:t>
-            </a:r>
-            <a:endParaRPr sz="1400" dirty="0"/>
-          </a:p>
-          <a:p>
             <a:pPr marL="228600" lvl="0" indent="-228600">
               <a:lnSpc>
                 <a:spcPct val="125000"/>
@@ -13132,129 +12896,453 @@
               <a:buSzPct val="100000"/>
             </a:pPr>
             <a:r>
-              <a:rPr lang="ko-KR" sz="1600" dirty="0"/>
-              <a:t>14주차: </a:t>
-            </a:r>
-            <a:r>
-              <a:rPr lang="en-US" altLang="ko-KR" sz="1600" dirty="0"/>
-              <a:t>LLM </a:t>
-            </a:r>
-            <a:r>
-              <a:rPr lang="ko-KR" altLang="en-US" sz="1600" dirty="0" err="1"/>
-              <a:t>바이브코딩을</a:t>
-            </a:r>
-            <a:r>
-              <a:rPr lang="ko-KR" altLang="en-US" sz="1600" dirty="0"/>
-              <a:t> 통한 기말</a:t>
-            </a:r>
-            <a:r>
-              <a:rPr lang="en-US" altLang="ko-KR" sz="1600" dirty="0"/>
-              <a:t> </a:t>
-            </a:r>
-            <a:r>
-              <a:rPr lang="ko-KR" altLang="en-US" sz="1600" dirty="0"/>
-              <a:t>프로젝트</a:t>
-            </a:r>
-            <a:r>
-              <a:rPr lang="ko-KR" sz="1600" dirty="0"/>
-              <a:t> (2)</a:t>
-            </a:r>
-            <a:endParaRPr lang="en-US" altLang="ko-KR" sz="1600" dirty="0"/>
-          </a:p>
-          <a:p>
-            <a:pPr marL="685800" lvl="1" indent="-228600">
+              <a:rPr lang="ko-KR" altLang="en-US" dirty="0"/>
+              <a:t>평가 항목 및 배점</a:t>
+            </a:r>
+          </a:p>
+          <a:p>
+            <a:pPr marL="685800" lvl="1" indent="-228631">
               <a:lnSpc>
                 <a:spcPct val="125000"/>
               </a:lnSpc>
               <a:spcBef>
-                <a:spcPts val="300"/>
+                <a:spcPts val="200"/>
               </a:spcBef>
               <a:buSzPct val="100000"/>
             </a:pPr>
             <a:r>
-              <a:rPr lang="ko-KR" altLang="en-US" sz="1400" dirty="0"/>
-              <a:t>프로젝트 수행</a:t>
-            </a:r>
-            <a:endParaRPr lang="en-US" altLang="ko-KR" sz="1400" dirty="0"/>
-          </a:p>
-          <a:p>
-            <a:pPr marL="228600" lvl="0" indent="-228600" algn="l" rtl="0">
+              <a:rPr lang="ko-KR" altLang="en-US" sz="1700" dirty="0"/>
+              <a:t>중간고사</a:t>
+            </a:r>
+            <a:r>
+              <a:rPr lang="en-US" altLang="ko-KR" sz="1700" dirty="0"/>
+              <a:t>: 30</a:t>
+            </a:r>
+            <a:r>
+              <a:rPr lang="ko-KR" altLang="en-US" sz="1700" dirty="0"/>
+              <a:t>점</a:t>
+            </a:r>
+          </a:p>
+          <a:p>
+            <a:pPr marL="685800" lvl="1" indent="-228631">
               <a:lnSpc>
                 <a:spcPct val="125000"/>
               </a:lnSpc>
               <a:spcBef>
-                <a:spcPts val="300"/>
-              </a:spcBef>
-              <a:spcAft>
-                <a:spcPts val="0"/>
-              </a:spcAft>
-              <a:buSzPct val="100000"/>
-              <a:buChar char="◦"/>
-            </a:pPr>
-            <a:r>
-              <a:rPr lang="ko-KR" sz="1600" dirty="0"/>
-              <a:t>15주차: </a:t>
-            </a:r>
-            <a:r>
-              <a:rPr lang="ko-KR" altLang="en-US" sz="1600" dirty="0"/>
-              <a:t>보강 및 기말 프로젝트 </a:t>
-            </a:r>
-            <a:r>
-              <a:rPr lang="en-US" altLang="ko-KR" sz="1600" dirty="0"/>
-              <a:t>(3)</a:t>
-            </a:r>
-            <a:r>
-              <a:rPr lang="ko-KR" altLang="en-US" sz="1600" dirty="0"/>
-              <a:t> 수행</a:t>
-            </a:r>
-            <a:endParaRPr lang="en-US" altLang="ko-KR" sz="1600" dirty="0"/>
-          </a:p>
-          <a:p>
-            <a:pPr marL="685800" lvl="1" indent="-228600">
-              <a:lnSpc>
-                <a:spcPct val="125000"/>
-              </a:lnSpc>
-              <a:spcBef>
-                <a:spcPts val="300"/>
+                <a:spcPts val="200"/>
               </a:spcBef>
               <a:buSzPct val="100000"/>
             </a:pPr>
             <a:r>
-              <a:rPr lang="ko-KR" altLang="en-US" sz="1400" dirty="0"/>
-              <a:t>프로젝트 제출</a:t>
-            </a:r>
-          </a:p>
-          <a:p>
-            <a:pPr marL="228600" lvl="0" indent="-228600" algn="l" rtl="0">
+              <a:rPr lang="ko-KR" altLang="en-US" sz="1700" dirty="0"/>
+              <a:t>기말고사</a:t>
+            </a:r>
+            <a:r>
+              <a:rPr lang="en-US" altLang="ko-KR" sz="1700" dirty="0"/>
+              <a:t>: 30</a:t>
+            </a:r>
+            <a:r>
+              <a:rPr lang="ko-KR" altLang="en-US" sz="1700" dirty="0"/>
+              <a:t>점</a:t>
+            </a:r>
+          </a:p>
+          <a:p>
+            <a:pPr marL="685800" lvl="1" indent="-228631">
               <a:lnSpc>
                 <a:spcPct val="125000"/>
               </a:lnSpc>
               <a:spcBef>
+                <a:spcPts val="200"/>
+              </a:spcBef>
+              <a:buSzPct val="100000"/>
+            </a:pPr>
+            <a:r>
+              <a:rPr lang="ko-KR" altLang="en-US" sz="1700" dirty="0"/>
+              <a:t>퀴즈</a:t>
+            </a:r>
+            <a:r>
+              <a:rPr lang="en-US" altLang="ko-KR" sz="1700" dirty="0"/>
+              <a:t>: 10</a:t>
+            </a:r>
+            <a:r>
+              <a:rPr lang="ko-KR" altLang="en-US" sz="1700" dirty="0"/>
+              <a:t>점 </a:t>
+            </a:r>
+            <a:endParaRPr lang="en-US" altLang="ko-KR" sz="1700" dirty="0"/>
+          </a:p>
+          <a:p>
+            <a:pPr marL="685800" lvl="1" indent="-228631">
+              <a:lnSpc>
+                <a:spcPct val="125000"/>
+              </a:lnSpc>
+              <a:spcBef>
+                <a:spcPts val="200"/>
+              </a:spcBef>
+              <a:buSzPct val="100000"/>
+            </a:pPr>
+            <a:r>
+              <a:rPr lang="ko-KR" altLang="en-US" sz="1700" dirty="0"/>
+              <a:t>기말 프로젝트</a:t>
+            </a:r>
+            <a:r>
+              <a:rPr lang="en-US" altLang="ko-KR" sz="1700" dirty="0"/>
+              <a:t>: 20</a:t>
+            </a:r>
+            <a:r>
+              <a:rPr lang="ko-KR" altLang="en-US" sz="1700" dirty="0"/>
+              <a:t>점</a:t>
+            </a:r>
+          </a:p>
+          <a:p>
+            <a:pPr marL="685800" lvl="1" indent="-228631">
+              <a:lnSpc>
+                <a:spcPct val="125000"/>
+              </a:lnSpc>
+              <a:spcBef>
+                <a:spcPts val="200"/>
+              </a:spcBef>
+              <a:buSzPct val="100000"/>
+            </a:pPr>
+            <a:r>
+              <a:rPr lang="ko-KR" altLang="en-US" sz="1700" dirty="0"/>
+              <a:t>출석 </a:t>
+            </a:r>
+            <a:r>
+              <a:rPr lang="en-US" altLang="ko-KR" sz="1700" dirty="0"/>
+              <a:t>+ </a:t>
+            </a:r>
+            <a:r>
+              <a:rPr lang="ko-KR" altLang="en-US" sz="1700" dirty="0"/>
+              <a:t>핵심역량평가</a:t>
+            </a:r>
+            <a:r>
+              <a:rPr lang="en-US" altLang="ko-KR" sz="1700" dirty="0"/>
+              <a:t>: 10</a:t>
+            </a:r>
+            <a:r>
+              <a:rPr lang="ko-KR" altLang="en-US" sz="1700" dirty="0"/>
+              <a:t>점</a:t>
+            </a:r>
+          </a:p>
+          <a:p>
+            <a:pPr marL="228600" lvl="0" indent="-228600">
+              <a:lnSpc>
+                <a:spcPct val="125000"/>
+              </a:lnSpc>
+              <a:spcBef>
                 <a:spcPts val="300"/>
               </a:spcBef>
-              <a:spcAft>
-                <a:spcPts val="0"/>
-              </a:spcAft>
               <a:buSzPct val="100000"/>
-              <a:buChar char="◦"/>
             </a:pPr>
             <a:r>
-              <a:rPr lang="en-US" altLang="ko-KR" sz="1600" dirty="0"/>
-              <a:t>16</a:t>
-            </a:r>
-            <a:r>
-              <a:rPr lang="ko-KR" altLang="en-US" sz="1600" dirty="0"/>
+              <a:rPr lang="ko-KR" altLang="en-US" dirty="0"/>
+              <a:t>시험</a:t>
+            </a:r>
+          </a:p>
+          <a:p>
+            <a:pPr marL="685800" lvl="1" indent="-228631">
+              <a:lnSpc>
+                <a:spcPct val="125000"/>
+              </a:lnSpc>
+              <a:spcBef>
+                <a:spcPts val="200"/>
+              </a:spcBef>
+              <a:buSzPct val="100000"/>
+            </a:pPr>
+            <a:r>
+              <a:rPr lang="ko-KR" altLang="en-US" sz="1700" dirty="0"/>
+              <a:t>중간고사</a:t>
+            </a:r>
+            <a:r>
+              <a:rPr lang="en-US" altLang="ko-KR" sz="1700" dirty="0"/>
+              <a:t>: CHAPTER 01~04 </a:t>
+            </a:r>
+            <a:r>
+              <a:rPr lang="ko-KR" altLang="en-US" sz="1700" dirty="0"/>
+              <a:t>범위 </a:t>
+            </a:r>
+            <a:r>
+              <a:rPr lang="en-US" altLang="ko-KR" sz="1700" dirty="0"/>
+              <a:t>(8</a:t>
+            </a:r>
+            <a:r>
+              <a:rPr lang="ko-KR" altLang="en-US" sz="1700" dirty="0"/>
               <a:t>주차</a:t>
             </a:r>
             <a:r>
-              <a:rPr lang="en-US" altLang="ko-KR" sz="1600" dirty="0"/>
+              <a:rPr lang="en-US" altLang="ko-KR" sz="1700" dirty="0"/>
+              <a:t>)</a:t>
+            </a:r>
+            <a:endParaRPr lang="ko-KR" altLang="en-US" sz="1700" dirty="0"/>
+          </a:p>
+          <a:p>
+            <a:pPr marL="685800" lvl="1" indent="-228631">
+              <a:lnSpc>
+                <a:spcPct val="125000"/>
+              </a:lnSpc>
+              <a:spcBef>
+                <a:spcPts val="200"/>
+              </a:spcBef>
+              <a:buSzPct val="100000"/>
+            </a:pPr>
+            <a:r>
+              <a:rPr lang="ko-KR" altLang="en-US" sz="1700" dirty="0"/>
+              <a:t>기말고사</a:t>
+            </a:r>
+            <a:r>
+              <a:rPr lang="en-US" altLang="ko-KR" sz="1700" dirty="0"/>
+              <a:t>: CHAPTER 05~06 (50%) + </a:t>
+            </a:r>
+            <a:r>
+              <a:rPr lang="ko-KR" altLang="en-US" sz="1700" dirty="0"/>
+              <a:t>바이브코딩 </a:t>
+            </a:r>
+            <a:r>
+              <a:rPr lang="en-US" altLang="ko-KR" sz="1700" dirty="0"/>
+              <a:t>(50%)</a:t>
+            </a:r>
+            <a:endParaRPr lang="ko-KR" altLang="en-US" sz="1700" dirty="0"/>
+          </a:p>
+          <a:p>
+            <a:pPr marL="228600" lvl="0" indent="-228600">
+              <a:lnSpc>
+                <a:spcPct val="125000"/>
+              </a:lnSpc>
+              <a:spcBef>
+                <a:spcPts val="300"/>
+              </a:spcBef>
+              <a:buSzPct val="100000"/>
+            </a:pPr>
+            <a:r>
+              <a:rPr lang="ko-KR" altLang="en-US" dirty="0"/>
+              <a:t>과제</a:t>
+            </a:r>
+          </a:p>
+          <a:p>
+            <a:pPr marL="685800" lvl="1" indent="-228631">
+              <a:lnSpc>
+                <a:spcPct val="125000"/>
+              </a:lnSpc>
+              <a:spcBef>
+                <a:spcPts val="200"/>
+              </a:spcBef>
+              <a:buSzPct val="100000"/>
+            </a:pPr>
+            <a:r>
+              <a:rPr lang="ko-KR" altLang="en-US" sz="1700" dirty="0"/>
+              <a:t>매 </a:t>
+            </a:r>
+            <a:r>
+              <a:rPr lang="en-US" altLang="ko-KR" sz="1700" dirty="0"/>
+              <a:t>CHAPTER </a:t>
+            </a:r>
+            <a:r>
+              <a:rPr lang="ko-KR" altLang="en-US" sz="1700" dirty="0"/>
+              <a:t>종료 후 코딩 과제 제출 </a:t>
+            </a:r>
+            <a:r>
+              <a:rPr lang="en-US" altLang="ko-KR" sz="1700" dirty="0"/>
+              <a:t>(GitHub Classroom)</a:t>
+            </a:r>
+            <a:endParaRPr lang="ko-KR" altLang="en-US" sz="1700" dirty="0"/>
+          </a:p>
+          <a:p>
+            <a:pPr marL="685800" lvl="1" indent="-228631">
+              <a:lnSpc>
+                <a:spcPct val="125000"/>
+              </a:lnSpc>
+              <a:spcBef>
+                <a:spcPts val="200"/>
+              </a:spcBef>
+              <a:buSzPct val="100000"/>
+            </a:pPr>
+            <a:r>
+              <a:rPr lang="ko-KR" altLang="en-US" sz="1700" dirty="0"/>
+              <a:t>과제 제출 기한</a:t>
+            </a:r>
+            <a:r>
+              <a:rPr lang="en-US" altLang="ko-KR" sz="1700" dirty="0"/>
               <a:t>: </a:t>
             </a:r>
             <a:r>
-              <a:rPr lang="ko-KR" altLang="en-US" sz="1600" dirty="0"/>
-              <a:t>기말고사</a:t>
-            </a:r>
-            <a:endParaRPr sz="1600" dirty="0"/>
+              <a:rPr lang="ko-KR" altLang="en-US" sz="1700" dirty="0"/>
+              <a:t>해당 주차 종료 후 </a:t>
+            </a:r>
+            <a:r>
+              <a:rPr lang="en-US" altLang="ko-KR" sz="1700" dirty="0"/>
+              <a:t>1</a:t>
+            </a:r>
+            <a:r>
+              <a:rPr lang="ko-KR" altLang="en-US" sz="1700" dirty="0"/>
+              <a:t>주일 이내</a:t>
+            </a:r>
+          </a:p>
+          <a:p>
+            <a:pPr marL="228600" lvl="0" indent="-228600">
+              <a:lnSpc>
+                <a:spcPct val="125000"/>
+              </a:lnSpc>
+              <a:spcBef>
+                <a:spcPts val="300"/>
+              </a:spcBef>
+              <a:buSzPct val="100000"/>
+            </a:pPr>
+            <a:r>
+              <a:rPr lang="ko-KR" altLang="en-US" dirty="0"/>
+              <a:t>기말</a:t>
+            </a:r>
+            <a:r>
+              <a:rPr lang="en-US" altLang="ko-KR" dirty="0"/>
+              <a:t> </a:t>
+            </a:r>
+            <a:r>
+              <a:rPr lang="ko-KR" altLang="en-US" dirty="0"/>
+              <a:t>프로젝트</a:t>
+            </a:r>
+          </a:p>
+          <a:p>
+            <a:pPr marL="685800" lvl="1" indent="-228631">
+              <a:lnSpc>
+                <a:spcPct val="125000"/>
+              </a:lnSpc>
+              <a:spcBef>
+                <a:spcPts val="200"/>
+              </a:spcBef>
+              <a:buSzPct val="100000"/>
+            </a:pPr>
+            <a:r>
+              <a:rPr lang="ko-KR" altLang="en-US" sz="1700" dirty="0"/>
+              <a:t>기말 프로젝트 (13~14주차)</a:t>
+            </a:r>
+          </a:p>
+          <a:p>
+            <a:pPr marL="685800" lvl="1" indent="-228631">
+              <a:lnSpc>
+                <a:spcPct val="125000"/>
+              </a:lnSpc>
+              <a:spcBef>
+                <a:spcPts val="200"/>
+              </a:spcBef>
+              <a:buSzPct val="100000"/>
+            </a:pPr>
+            <a:r>
+              <a:rPr lang="ko-KR" altLang="en-US" sz="1700" dirty="0"/>
+              <a:t>결과물 제출 및 발표 (14주차)</a:t>
+            </a:r>
+          </a:p>
+          <a:p>
+            <a:pPr marL="228600" lvl="0" indent="-228600">
+              <a:lnSpc>
+                <a:spcPct val="125000"/>
+              </a:lnSpc>
+              <a:spcBef>
+                <a:spcPts val="300"/>
+              </a:spcBef>
+              <a:buSzPct val="100000"/>
+            </a:pPr>
+            <a:r>
+              <a:rPr lang="ko-KR" altLang="en-US" dirty="0"/>
+              <a:t>출석</a:t>
+            </a:r>
+          </a:p>
+          <a:p>
+            <a:pPr marL="685800" lvl="1" indent="-228631">
+              <a:lnSpc>
+                <a:spcPct val="125000"/>
+              </a:lnSpc>
+              <a:spcBef>
+                <a:spcPts val="200"/>
+              </a:spcBef>
+              <a:buSzPct val="100000"/>
+            </a:pPr>
+            <a:r>
+              <a:rPr lang="ko-KR" altLang="en-US" sz="1700" dirty="0"/>
+              <a:t>지각 </a:t>
+            </a:r>
+            <a:r>
+              <a:rPr lang="en-US" altLang="ko-KR" sz="1700" dirty="0"/>
+              <a:t>3</a:t>
+            </a:r>
+            <a:r>
+              <a:rPr lang="ko-KR" altLang="en-US" sz="1700" dirty="0"/>
+              <a:t>회 </a:t>
+            </a:r>
+            <a:r>
+              <a:rPr lang="en-US" altLang="ko-KR" sz="1700" dirty="0"/>
+              <a:t>= </a:t>
+            </a:r>
+            <a:r>
+              <a:rPr lang="ko-KR" altLang="en-US" sz="1700" dirty="0"/>
+              <a:t>결석 </a:t>
+            </a:r>
+            <a:r>
+              <a:rPr lang="en-US" altLang="ko-KR" sz="1700" dirty="0"/>
+              <a:t>1</a:t>
+            </a:r>
+            <a:r>
+              <a:rPr lang="ko-KR" altLang="en-US" sz="1700" dirty="0"/>
+              <a:t>회</a:t>
+            </a:r>
+            <a:r>
+              <a:rPr lang="en-US" altLang="ko-KR" sz="1700" dirty="0"/>
+              <a:t>, </a:t>
+            </a:r>
+            <a:r>
+              <a:rPr lang="ko-KR" altLang="en-US" sz="1700" dirty="0"/>
+              <a:t>결석 </a:t>
+            </a:r>
+            <a:r>
+              <a:rPr lang="en-US" altLang="ko-KR" sz="1700" dirty="0"/>
+              <a:t>2</a:t>
+            </a:r>
+            <a:r>
+              <a:rPr lang="ko-KR" altLang="en-US" sz="1700" dirty="0"/>
+              <a:t>회까지는 </a:t>
+            </a:r>
+            <a:r>
+              <a:rPr lang="en-US" altLang="ko-KR" sz="1700" dirty="0"/>
+              <a:t>5</a:t>
+            </a:r>
+            <a:r>
+              <a:rPr lang="ko-KR" altLang="en-US" sz="1700" dirty="0"/>
+              <a:t>점 만점</a:t>
+            </a:r>
+            <a:r>
+              <a:rPr lang="en-US" altLang="ko-KR" sz="1700" dirty="0"/>
+              <a:t>, </a:t>
+            </a:r>
+            <a:r>
+              <a:rPr lang="ko-KR" altLang="en-US" sz="1700" dirty="0"/>
+              <a:t>결석 </a:t>
+            </a:r>
+            <a:r>
+              <a:rPr lang="en-US" altLang="ko-KR" sz="1700" dirty="0"/>
+              <a:t>3</a:t>
+            </a:r>
+            <a:r>
+              <a:rPr lang="ko-KR" altLang="en-US" sz="1700" dirty="0"/>
+              <a:t>회부터 결석 </a:t>
+            </a:r>
+            <a:r>
+              <a:rPr lang="en-US" altLang="ko-KR" sz="1700" dirty="0"/>
+              <a:t>2</a:t>
+            </a:r>
+            <a:r>
+              <a:rPr lang="ko-KR" altLang="en-US" sz="1700" dirty="0"/>
+              <a:t>회마다 </a:t>
+            </a:r>
+            <a:r>
+              <a:rPr lang="en-US" altLang="ko-KR" sz="1700" dirty="0"/>
+              <a:t>1</a:t>
+            </a:r>
+            <a:r>
+              <a:rPr lang="ko-KR" altLang="en-US" sz="1700" dirty="0" err="1"/>
+              <a:t>점씩</a:t>
+            </a:r>
+            <a:r>
+              <a:rPr lang="ko-KR" altLang="en-US" sz="1700" dirty="0"/>
+              <a:t> 차감</a:t>
+            </a:r>
           </a:p>
         </p:txBody>
       </p:sp>
@@ -13331,7 +13419,7 @@
             </a:pPr>
             <a:r>
               <a:rPr lang="ko-KR" dirty="0"/>
-              <a:t>평가 방법</a:t>
+              <a:t>수업 규칙 및 유의사항</a:t>
             </a:r>
             <a:endParaRPr dirty="0"/>
           </a:p>
@@ -13378,620 +13466,6 @@
             <a:fld id="{00000000-1234-1234-1234-123412341234}" type="slidenum">
               <a:rPr lang="en-US" altLang="ko-KR"/>
               <a:t>7</a:t>
-            </a:fld>
-            <a:endParaRPr/>
-          </a:p>
-        </p:txBody>
-      </p:sp>
-      <p:sp>
-        <p:nvSpPr>
-          <p:cNvPr id="903" name="Body"/>
-          <p:cNvSpPr txBox="1">
-            <a:spLocks noGrp="1"/>
-          </p:cNvSpPr>
-          <p:nvPr>
-            <p:ph type="body" idx="1"/>
-          </p:nvPr>
-        </p:nvSpPr>
-        <p:spPr>
-          <a:xfrm>
-            <a:off x="468000" y="1079999"/>
-            <a:ext cx="11624609" cy="5670043"/>
-          </a:xfrm>
-          <a:prstGeom prst="rect">
-            <a:avLst/>
-          </a:prstGeom>
-          <a:noFill/>
-          <a:ln>
-            <a:noFill/>
-          </a:ln>
-        </p:spPr>
-        <p:txBody>
-          <a:bodyPr spcFirstLastPara="1" wrap="square" lIns="91425" tIns="45700" rIns="91425" bIns="45700" anchor="t" anchorCtr="0">
-            <a:normAutofit fontScale="92500" lnSpcReduction="10000"/>
-          </a:bodyPr>
-          <a:lstStyle/>
-          <a:p>
-            <a:pPr marL="228600" lvl="0" indent="-228600">
-              <a:lnSpc>
-                <a:spcPct val="125000"/>
-              </a:lnSpc>
-              <a:spcBef>
-                <a:spcPts val="300"/>
-              </a:spcBef>
-              <a:buSzPct val="100000"/>
-            </a:pPr>
-            <a:r>
-              <a:rPr lang="ko-KR" altLang="en-US" dirty="0"/>
-              <a:t>평가 항목 및 배점</a:t>
-            </a:r>
-          </a:p>
-          <a:p>
-            <a:pPr marL="685800" lvl="1" indent="-228631">
-              <a:lnSpc>
-                <a:spcPct val="125000"/>
-              </a:lnSpc>
-              <a:spcBef>
-                <a:spcPts val="200"/>
-              </a:spcBef>
-              <a:buSzPct val="100000"/>
-            </a:pPr>
-            <a:r>
-              <a:rPr lang="ko-KR" altLang="en-US" sz="1700" dirty="0"/>
-              <a:t>중간고사</a:t>
-            </a:r>
-            <a:r>
-              <a:rPr lang="en-US" altLang="ko-KR" sz="1700" dirty="0"/>
-              <a:t>: 30</a:t>
-            </a:r>
-            <a:r>
-              <a:rPr lang="ko-KR" altLang="en-US" sz="1700" dirty="0"/>
-              <a:t>점</a:t>
-            </a:r>
-          </a:p>
-          <a:p>
-            <a:pPr marL="685800" lvl="1" indent="-228631">
-              <a:lnSpc>
-                <a:spcPct val="125000"/>
-              </a:lnSpc>
-              <a:spcBef>
-                <a:spcPts val="200"/>
-              </a:spcBef>
-              <a:buSzPct val="100000"/>
-            </a:pPr>
-            <a:r>
-              <a:rPr lang="ko-KR" altLang="en-US" sz="1700" dirty="0"/>
-              <a:t>기말고사</a:t>
-            </a:r>
-            <a:r>
-              <a:rPr lang="en-US" altLang="ko-KR" sz="1700" dirty="0"/>
-              <a:t>: 30</a:t>
-            </a:r>
-            <a:r>
-              <a:rPr lang="ko-KR" altLang="en-US" sz="1700" dirty="0"/>
-              <a:t>점</a:t>
-            </a:r>
-          </a:p>
-          <a:p>
-            <a:pPr marL="685800" lvl="1" indent="-228631">
-              <a:lnSpc>
-                <a:spcPct val="125000"/>
-              </a:lnSpc>
-              <a:spcBef>
-                <a:spcPts val="200"/>
-              </a:spcBef>
-              <a:buSzPct val="100000"/>
-            </a:pPr>
-            <a:r>
-              <a:rPr lang="ko-KR" altLang="en-US" sz="1700" dirty="0"/>
-              <a:t>퀴즈</a:t>
-            </a:r>
-            <a:r>
-              <a:rPr lang="en-US" altLang="ko-KR" sz="1700" dirty="0"/>
-              <a:t>: 10</a:t>
-            </a:r>
-            <a:r>
-              <a:rPr lang="ko-KR" altLang="en-US" sz="1700" dirty="0"/>
-              <a:t>점 </a:t>
-            </a:r>
-            <a:endParaRPr lang="en-US" altLang="ko-KR" sz="1700" dirty="0"/>
-          </a:p>
-          <a:p>
-            <a:pPr marL="685800" lvl="1" indent="-228631">
-              <a:lnSpc>
-                <a:spcPct val="125000"/>
-              </a:lnSpc>
-              <a:spcBef>
-                <a:spcPts val="200"/>
-              </a:spcBef>
-              <a:buSzPct val="100000"/>
-            </a:pPr>
-            <a:r>
-              <a:rPr lang="ko-KR" altLang="en-US" sz="1700" dirty="0"/>
-              <a:t>기말 프로젝트</a:t>
-            </a:r>
-            <a:r>
-              <a:rPr lang="en-US" altLang="ko-KR" sz="1700" dirty="0"/>
-              <a:t>: 20</a:t>
-            </a:r>
-            <a:r>
-              <a:rPr lang="ko-KR" altLang="en-US" sz="1700" dirty="0"/>
-              <a:t>점</a:t>
-            </a:r>
-          </a:p>
-          <a:p>
-            <a:pPr marL="685800" lvl="1" indent="-228631">
-              <a:lnSpc>
-                <a:spcPct val="125000"/>
-              </a:lnSpc>
-              <a:spcBef>
-                <a:spcPts val="200"/>
-              </a:spcBef>
-              <a:buSzPct val="100000"/>
-            </a:pPr>
-            <a:r>
-              <a:rPr lang="ko-KR" altLang="en-US" sz="1700" dirty="0"/>
-              <a:t>출석 </a:t>
-            </a:r>
-            <a:r>
-              <a:rPr lang="en-US" altLang="ko-KR" sz="1700" dirty="0"/>
-              <a:t>+ </a:t>
-            </a:r>
-            <a:r>
-              <a:rPr lang="ko-KR" altLang="en-US" sz="1700" dirty="0"/>
-              <a:t>핵심역량평가</a:t>
-            </a:r>
-            <a:r>
-              <a:rPr lang="en-US" altLang="ko-KR" sz="1700" dirty="0"/>
-              <a:t>: 10</a:t>
-            </a:r>
-            <a:r>
-              <a:rPr lang="ko-KR" altLang="en-US" sz="1700" dirty="0"/>
-              <a:t>점</a:t>
-            </a:r>
-          </a:p>
-          <a:p>
-            <a:pPr marL="228600" lvl="0" indent="-228600">
-              <a:lnSpc>
-                <a:spcPct val="125000"/>
-              </a:lnSpc>
-              <a:spcBef>
-                <a:spcPts val="300"/>
-              </a:spcBef>
-              <a:buSzPct val="100000"/>
-            </a:pPr>
-            <a:r>
-              <a:rPr lang="ko-KR" altLang="en-US" dirty="0"/>
-              <a:t>시험</a:t>
-            </a:r>
-          </a:p>
-          <a:p>
-            <a:pPr marL="685800" lvl="1" indent="-228631">
-              <a:lnSpc>
-                <a:spcPct val="125000"/>
-              </a:lnSpc>
-              <a:spcBef>
-                <a:spcPts val="200"/>
-              </a:spcBef>
-              <a:buSzPct val="100000"/>
-            </a:pPr>
-            <a:r>
-              <a:rPr lang="ko-KR" altLang="en-US" sz="1700" dirty="0"/>
-              <a:t>중간고사</a:t>
-            </a:r>
-            <a:r>
-              <a:rPr lang="en-US" altLang="ko-KR" sz="1700" dirty="0"/>
-              <a:t>: CHAPTER 01~04 </a:t>
-            </a:r>
-            <a:r>
-              <a:rPr lang="ko-KR" altLang="en-US" sz="1700" dirty="0"/>
-              <a:t>범위 </a:t>
-            </a:r>
-            <a:r>
-              <a:rPr lang="en-US" altLang="ko-KR" sz="1700" dirty="0"/>
-              <a:t>(8</a:t>
-            </a:r>
-            <a:r>
-              <a:rPr lang="ko-KR" altLang="en-US" sz="1700" dirty="0"/>
-              <a:t>주차</a:t>
-            </a:r>
-            <a:r>
-              <a:rPr lang="en-US" altLang="ko-KR" sz="1700" dirty="0"/>
-              <a:t>)</a:t>
-            </a:r>
-            <a:endParaRPr lang="ko-KR" altLang="en-US" sz="1700" dirty="0"/>
-          </a:p>
-          <a:p>
-            <a:pPr marL="685800" lvl="1" indent="-228631">
-              <a:lnSpc>
-                <a:spcPct val="125000"/>
-              </a:lnSpc>
-              <a:spcBef>
-                <a:spcPts val="200"/>
-              </a:spcBef>
-              <a:buSzPct val="100000"/>
-            </a:pPr>
-            <a:r>
-              <a:rPr lang="ko-KR" altLang="en-US" sz="1700" dirty="0"/>
-              <a:t>기말고사</a:t>
-            </a:r>
-            <a:r>
-              <a:rPr lang="en-US" altLang="ko-KR" sz="1700" dirty="0"/>
-              <a:t>: CHAPTER 05~06 (50%) + </a:t>
-            </a:r>
-            <a:r>
-              <a:rPr lang="ko-KR" altLang="en-US" sz="1700" dirty="0"/>
-              <a:t>바이브코딩 </a:t>
-            </a:r>
-            <a:r>
-              <a:rPr lang="en-US" altLang="ko-KR" sz="1700" dirty="0"/>
-              <a:t>(50%)</a:t>
-            </a:r>
-            <a:endParaRPr lang="ko-KR" altLang="en-US" sz="1700" dirty="0"/>
-          </a:p>
-          <a:p>
-            <a:pPr marL="228600" lvl="0" indent="-228600">
-              <a:lnSpc>
-                <a:spcPct val="125000"/>
-              </a:lnSpc>
-              <a:spcBef>
-                <a:spcPts val="300"/>
-              </a:spcBef>
-              <a:buSzPct val="100000"/>
-            </a:pPr>
-            <a:r>
-              <a:rPr lang="ko-KR" altLang="en-US" dirty="0"/>
-              <a:t>과제</a:t>
-            </a:r>
-          </a:p>
-          <a:p>
-            <a:pPr marL="685800" lvl="1" indent="-228631">
-              <a:lnSpc>
-                <a:spcPct val="125000"/>
-              </a:lnSpc>
-              <a:spcBef>
-                <a:spcPts val="200"/>
-              </a:spcBef>
-              <a:buSzPct val="100000"/>
-            </a:pPr>
-            <a:r>
-              <a:rPr lang="ko-KR" altLang="en-US" sz="1700" dirty="0"/>
-              <a:t>매 </a:t>
-            </a:r>
-            <a:r>
-              <a:rPr lang="en-US" altLang="ko-KR" sz="1700" dirty="0"/>
-              <a:t>CHAPTER </a:t>
-            </a:r>
-            <a:r>
-              <a:rPr lang="ko-KR" altLang="en-US" sz="1700" dirty="0"/>
-              <a:t>종료 후 코딩 과제 제출 </a:t>
-            </a:r>
-            <a:r>
-              <a:rPr lang="en-US" altLang="ko-KR" sz="1700" dirty="0"/>
-              <a:t>(GitHub Classroom)</a:t>
-            </a:r>
-            <a:endParaRPr lang="ko-KR" altLang="en-US" sz="1700" dirty="0"/>
-          </a:p>
-          <a:p>
-            <a:pPr marL="685800" lvl="1" indent="-228631">
-              <a:lnSpc>
-                <a:spcPct val="125000"/>
-              </a:lnSpc>
-              <a:spcBef>
-                <a:spcPts val="200"/>
-              </a:spcBef>
-              <a:buSzPct val="100000"/>
-            </a:pPr>
-            <a:r>
-              <a:rPr lang="ko-KR" altLang="en-US" sz="1700" dirty="0"/>
-              <a:t>과제 제출 기한</a:t>
-            </a:r>
-            <a:r>
-              <a:rPr lang="en-US" altLang="ko-KR" sz="1700" dirty="0"/>
-              <a:t>: </a:t>
-            </a:r>
-            <a:r>
-              <a:rPr lang="ko-KR" altLang="en-US" sz="1700" dirty="0"/>
-              <a:t>해당 주차 종료 후 </a:t>
-            </a:r>
-            <a:r>
-              <a:rPr lang="en-US" altLang="ko-KR" sz="1700" dirty="0"/>
-              <a:t>1</a:t>
-            </a:r>
-            <a:r>
-              <a:rPr lang="ko-KR" altLang="en-US" sz="1700" dirty="0"/>
-              <a:t>주일 이내</a:t>
-            </a:r>
-          </a:p>
-          <a:p>
-            <a:pPr marL="228600" lvl="0" indent="-228600">
-              <a:lnSpc>
-                <a:spcPct val="125000"/>
-              </a:lnSpc>
-              <a:spcBef>
-                <a:spcPts val="300"/>
-              </a:spcBef>
-              <a:buSzPct val="100000"/>
-            </a:pPr>
-            <a:r>
-              <a:rPr lang="ko-KR" altLang="en-US" dirty="0"/>
-              <a:t>기말</a:t>
-            </a:r>
-            <a:r>
-              <a:rPr lang="en-US" altLang="ko-KR" dirty="0"/>
-              <a:t> </a:t>
-            </a:r>
-            <a:r>
-              <a:rPr lang="ko-KR" altLang="en-US" dirty="0"/>
-              <a:t>프로젝트</a:t>
-            </a:r>
-          </a:p>
-          <a:p>
-            <a:pPr marL="685800" lvl="1" indent="-228631">
-              <a:lnSpc>
-                <a:spcPct val="125000"/>
-              </a:lnSpc>
-              <a:spcBef>
-                <a:spcPts val="200"/>
-              </a:spcBef>
-              <a:buSzPct val="100000"/>
-            </a:pPr>
-            <a:r>
-              <a:rPr lang="ko-KR" altLang="en-US" sz="1700" dirty="0"/>
-              <a:t>기말 프로젝트 (13~14주차)</a:t>
-            </a:r>
-          </a:p>
-          <a:p>
-            <a:pPr marL="685800" lvl="1" indent="-228631">
-              <a:lnSpc>
-                <a:spcPct val="125000"/>
-              </a:lnSpc>
-              <a:spcBef>
-                <a:spcPts val="200"/>
-              </a:spcBef>
-              <a:buSzPct val="100000"/>
-            </a:pPr>
-            <a:r>
-              <a:rPr lang="ko-KR" altLang="en-US" sz="1700" dirty="0"/>
-              <a:t>결과물 제출 및 발표 (14주차)</a:t>
-            </a:r>
-          </a:p>
-          <a:p>
-            <a:pPr marL="228600" lvl="0" indent="-228600">
-              <a:lnSpc>
-                <a:spcPct val="125000"/>
-              </a:lnSpc>
-              <a:spcBef>
-                <a:spcPts val="300"/>
-              </a:spcBef>
-              <a:buSzPct val="100000"/>
-            </a:pPr>
-            <a:r>
-              <a:rPr lang="ko-KR" altLang="en-US" dirty="0"/>
-              <a:t>출석</a:t>
-            </a:r>
-          </a:p>
-          <a:p>
-            <a:pPr marL="685800" lvl="1" indent="-228631">
-              <a:lnSpc>
-                <a:spcPct val="125000"/>
-              </a:lnSpc>
-              <a:spcBef>
-                <a:spcPts val="200"/>
-              </a:spcBef>
-              <a:buSzPct val="100000"/>
-            </a:pPr>
-            <a:r>
-              <a:rPr lang="ko-KR" altLang="en-US" sz="1700" dirty="0"/>
-              <a:t>지각 </a:t>
-            </a:r>
-            <a:r>
-              <a:rPr lang="en-US" altLang="ko-KR" sz="1700" dirty="0"/>
-              <a:t>3</a:t>
-            </a:r>
-            <a:r>
-              <a:rPr lang="ko-KR" altLang="en-US" sz="1700" dirty="0"/>
-              <a:t>회 </a:t>
-            </a:r>
-            <a:r>
-              <a:rPr lang="en-US" altLang="ko-KR" sz="1700" dirty="0"/>
-              <a:t>= </a:t>
-            </a:r>
-            <a:r>
-              <a:rPr lang="ko-KR" altLang="en-US" sz="1700" dirty="0"/>
-              <a:t>결석 </a:t>
-            </a:r>
-            <a:r>
-              <a:rPr lang="en-US" altLang="ko-KR" sz="1700" dirty="0"/>
-              <a:t>1</a:t>
-            </a:r>
-            <a:r>
-              <a:rPr lang="ko-KR" altLang="en-US" sz="1700" dirty="0"/>
-              <a:t>회</a:t>
-            </a:r>
-            <a:r>
-              <a:rPr lang="en-US" altLang="ko-KR" sz="1700" dirty="0"/>
-              <a:t>, </a:t>
-            </a:r>
-            <a:r>
-              <a:rPr lang="ko-KR" altLang="en-US" sz="1700" dirty="0"/>
-              <a:t>결석 </a:t>
-            </a:r>
-            <a:r>
-              <a:rPr lang="en-US" altLang="ko-KR" sz="1700" dirty="0"/>
-              <a:t>2</a:t>
-            </a:r>
-            <a:r>
-              <a:rPr lang="ko-KR" altLang="en-US" sz="1700" dirty="0"/>
-              <a:t>회까지는 </a:t>
-            </a:r>
-            <a:r>
-              <a:rPr lang="en-US" altLang="ko-KR" sz="1700" dirty="0"/>
-              <a:t>5</a:t>
-            </a:r>
-            <a:r>
-              <a:rPr lang="ko-KR" altLang="en-US" sz="1700" dirty="0"/>
-              <a:t>점 만점</a:t>
-            </a:r>
-            <a:r>
-              <a:rPr lang="en-US" altLang="ko-KR" sz="1700" dirty="0"/>
-              <a:t>, </a:t>
-            </a:r>
-            <a:r>
-              <a:rPr lang="ko-KR" altLang="en-US" sz="1700" dirty="0"/>
-              <a:t>결석 </a:t>
-            </a:r>
-            <a:r>
-              <a:rPr lang="en-US" altLang="ko-KR" sz="1700" dirty="0"/>
-              <a:t>3</a:t>
-            </a:r>
-            <a:r>
-              <a:rPr lang="ko-KR" altLang="en-US" sz="1700" dirty="0"/>
-              <a:t>회부터 결석 </a:t>
-            </a:r>
-            <a:r>
-              <a:rPr lang="en-US" altLang="ko-KR" sz="1700" dirty="0"/>
-              <a:t>2</a:t>
-            </a:r>
-            <a:r>
-              <a:rPr lang="ko-KR" altLang="en-US" sz="1700" dirty="0"/>
-              <a:t>회마다 </a:t>
-            </a:r>
-            <a:r>
-              <a:rPr lang="en-US" altLang="ko-KR" sz="1700" dirty="0"/>
-              <a:t>1</a:t>
-            </a:r>
-            <a:r>
-              <a:rPr lang="ko-KR" altLang="en-US" sz="1700" dirty="0" err="1"/>
-              <a:t>점씩</a:t>
-            </a:r>
-            <a:r>
-              <a:rPr lang="ko-KR" altLang="en-US" sz="1700" dirty="0"/>
-              <a:t> 차감</a:t>
-            </a:r>
-          </a:p>
-        </p:txBody>
-      </p:sp>
-    </p:spTree>
-  </p:cSld>
-  <p:clrMapOvr>
-    <a:masterClrMapping/>
-  </p:clrMapOvr>
-</p:sld>
-</file>
-
-<file path=ppt/slides/slide8.xml><?xml version="1.0" encoding="utf-8"?>
-<p:sld xmlns:a="http://schemas.openxmlformats.org/drawingml/2006/main" xmlns:r="http://schemas.openxmlformats.org/officeDocument/2006/relationships" xmlns:p="http://schemas.openxmlformats.org/presentationml/2006/main">
-  <p:cSld>
-    <p:spTree>
-      <p:nvGrpSpPr>
-        <p:cNvPr id="1" name="Shape 900"/>
-        <p:cNvGrpSpPr/>
-        <p:nvPr/>
-      </p:nvGrpSpPr>
-      <p:grpSpPr>
-        <a:xfrm>
-          <a:off x="0" y="0"/>
-          <a:ext cx="0" cy="0"/>
-          <a:chOff x="0" y="0"/>
-          <a:chExt cx="0" cy="0"/>
-        </a:xfrm>
-      </p:grpSpPr>
-      <p:sp>
-        <p:nvSpPr>
-          <p:cNvPr id="901" name="Title"/>
-          <p:cNvSpPr txBox="1">
-            <a:spLocks noGrp="1"/>
-          </p:cNvSpPr>
-          <p:nvPr>
-            <p:ph type="title"/>
-          </p:nvPr>
-        </p:nvSpPr>
-        <p:spPr>
-          <a:xfrm>
-            <a:off x="487015" y="107957"/>
-            <a:ext cx="11281052" cy="671349"/>
-          </a:xfrm>
-          <a:prstGeom prst="rect">
-            <a:avLst/>
-          </a:prstGeom>
-          <a:noFill/>
-          <a:ln>
-            <a:noFill/>
-          </a:ln>
-        </p:spPr>
-        <p:txBody>
-          <a:bodyPr spcFirstLastPara="1" wrap="square" lIns="91425" tIns="45700" rIns="91425" bIns="45700" anchor="ctr" anchorCtr="0">
-            <a:normAutofit/>
-          </a:bodyPr>
-          <a:lstStyle/>
-          <a:p>
-            <a:pPr marL="0" lvl="0" indent="0" algn="l" rtl="0">
-              <a:lnSpc>
-                <a:spcPct val="90000"/>
-              </a:lnSpc>
-              <a:spcBef>
-                <a:spcPts val="0"/>
-              </a:spcBef>
-              <a:spcAft>
-                <a:spcPts val="0"/>
-              </a:spcAft>
-              <a:buClr>
-                <a:srgbClr val="F06436"/>
-              </a:buClr>
-              <a:buSzPts val="3000"/>
-              <a:buFont typeface="Malgun Gothic"/>
-              <a:buNone/>
-            </a:pPr>
-            <a:r>
-              <a:rPr lang="ko-KR" dirty="0"/>
-              <a:t>수업 규칙 및 유의사항</a:t>
-            </a:r>
-            <a:endParaRPr dirty="0"/>
-          </a:p>
-        </p:txBody>
-      </p:sp>
-      <p:sp>
-        <p:nvSpPr>
-          <p:cNvPr id="902" name="SlideNum"/>
-          <p:cNvSpPr txBox="1">
-            <a:spLocks noGrp="1"/>
-          </p:cNvSpPr>
-          <p:nvPr>
-            <p:ph type="sldNum" idx="12"/>
-          </p:nvPr>
-        </p:nvSpPr>
-        <p:spPr>
-          <a:xfrm>
-            <a:off x="11691731" y="6472308"/>
-            <a:ext cx="400878" cy="365125"/>
-          </a:xfrm>
-          <a:prstGeom prst="rect">
-            <a:avLst/>
-          </a:prstGeom>
-          <a:noFill/>
-          <a:ln>
-            <a:noFill/>
-          </a:ln>
-        </p:spPr>
-        <p:txBody>
-          <a:bodyPr spcFirstLastPara="1" wrap="square" lIns="91425" tIns="45700" rIns="91425" bIns="45700" anchor="ctr" anchorCtr="0">
-            <a:noAutofit/>
-          </a:bodyPr>
-          <a:lstStyle/>
-          <a:p>
-            <a:pPr marL="0" lvl="0" indent="0" algn="r" rtl="0">
-              <a:spcBef>
-                <a:spcPts val="0"/>
-              </a:spcBef>
-              <a:spcAft>
-                <a:spcPts val="0"/>
-              </a:spcAft>
-              <a:buNone/>
-            </a:pPr>
-            <a:fld id="{00000000-1234-1234-1234-123412341234}" type="slidenum">
-              <a:rPr lang="en-US" altLang="ko-KR"/>
-              <a:t>8</a:t>
             </a:fld>
             <a:endParaRPr/>
           </a:p>

--- a/data/인공지능/00 - preview.pptx
+++ b/data/인공지능/00 - preview.pptx
@@ -331,7 +331,7 @@
       </p15:notesGuideLst>
     </p:ext>
     <p:ext uri="GoogleSlidesCustomDataVersion2">
-      <go:slidesCustomData xmlns:go="http://customooxmlschemas.google.com/" xmlns:ahyp="http://schemas.microsoft.com/office/drawing/2018/hyperlinkcolor" xmlns:p15="http://schemas.microsoft.com/office/powerpoint/2012/main" xmlns:p14="http://schemas.microsoft.com/office/powerpoint/2010/main" xmlns:com="http://schemas.openxmlformats.org/drawingml/2006/compatibility" xmlns:pvml="urn:schemas-microsoft-com:office:powerpoint" xmlns:v="urn:schemas-microsoft-com:vml" xmlns:o="urn:schemas-microsoft-com:office:office" xmlns:dgm="http://schemas.openxmlformats.org/drawingml/2006/diagram" xmlns:c="http://schemas.openxmlformats.org/drawingml/2006/chart" xmlns:mv="urn:schemas-microsoft-com:mac:vml" xmlns:mc="http://schemas.openxmlformats.org/markup-compatibility/2006" xmlns="" r:id="rId61" roundtripDataSignature="AMtx7mgQh/JTZB+tcnoesXfhZuEldfv5OQ=="/>
+      <go:slidesCustomData xmlns="" xmlns:mc="http://schemas.openxmlformats.org/markup-compatibility/2006" xmlns:mv="urn:schemas-microsoft-com:mac:vml" xmlns:c="http://schemas.openxmlformats.org/drawingml/2006/chart" xmlns:dgm="http://schemas.openxmlformats.org/drawingml/2006/diagram" xmlns:o="urn:schemas-microsoft-com:office:office" xmlns:v="urn:schemas-microsoft-com:vml" xmlns:pvml="urn:schemas-microsoft-com:office:powerpoint" xmlns:com="http://schemas.openxmlformats.org/drawingml/2006/compatibility" xmlns:p14="http://schemas.microsoft.com/office/powerpoint/2010/main" xmlns:p15="http://schemas.microsoft.com/office/powerpoint/2012/main" xmlns:ahyp="http://schemas.microsoft.com/office/drawing/2018/hyperlinkcolor" xmlns:go="http://customooxmlschemas.google.com/" r:id="rId61" roundtripDataSignature="AMtx7mgQh/JTZB+tcnoesXfhZuEldfv5OQ=="/>
     </p:ext>
   </p:extLst>
 </p:presentation>
@@ -12571,7 +12571,15 @@
             </a:r>
             <a:r>
               <a:rPr lang="ko-KR" altLang="en-US" sz="1600" dirty="0"/>
-              <a:t> 통한 기말 프로젝트 </a:t>
+              <a:t> 통한 </a:t>
+            </a:r>
+            <a:r>
+              <a:rPr lang="en-US" altLang="ko-KR" sz="1600" dirty="0"/>
+              <a:t>AI</a:t>
+            </a:r>
+            <a:r>
+              <a:rPr lang="ko-KR" altLang="en-US" sz="1600" dirty="0"/>
+              <a:t> 프로젝트 </a:t>
             </a:r>
             <a:r>
               <a:rPr lang="en-US" altLang="ko-KR" sz="1600" dirty="0"/>
@@ -12630,7 +12638,15 @@
             </a:r>
             <a:r>
               <a:rPr lang="ko-KR" altLang="en-US" sz="1600" dirty="0"/>
-              <a:t> 통한 기말 프로젝트 </a:t>
+              <a:t> 통한 </a:t>
+            </a:r>
+            <a:r>
+              <a:rPr lang="en-US" altLang="ko-KR" sz="1600" dirty="0"/>
+              <a:t>AI</a:t>
+            </a:r>
+            <a:r>
+              <a:rPr lang="ko-KR" altLang="en-US" sz="1600" dirty="0"/>
+              <a:t> 프로젝트 </a:t>
             </a:r>
             <a:r>
               <a:rPr lang="en-US" altLang="ko-KR" sz="1600" dirty="0"/>
@@ -12677,15 +12693,19 @@
             </a:r>
             <a:r>
               <a:rPr lang="ko-KR" altLang="en-US" sz="1600" dirty="0"/>
-              <a:t>보강 및 기말 프로젝트 </a:t>
+              <a:t>보강 및 </a:t>
             </a:r>
             <a:r>
               <a:rPr lang="en-US" altLang="ko-KR" sz="1600" dirty="0"/>
-              <a:t>(3)</a:t>
+              <a:t>AI</a:t>
+            </a:r>
+            <a:r>
+              <a:rPr lang="ko-KR" altLang="en-US" sz="1600"/>
+              <a:t> 프로젝트 </a:t>
             </a:r>
             <a:r>
               <a:rPr lang="ko-KR" altLang="en-US" sz="1600" dirty="0"/>
-              <a:t> 수행</a:t>
+              <a:t>수행</a:t>
             </a:r>
           </a:p>
           <a:p>

--- a/data/인공지능/00 - preview.pptx
+++ b/data/인공지능/00 - preview.pptx
@@ -331,7 +331,7 @@
       </p15:notesGuideLst>
     </p:ext>
     <p:ext uri="GoogleSlidesCustomDataVersion2">
-      <go:slidesCustomData xmlns="" xmlns:mc="http://schemas.openxmlformats.org/markup-compatibility/2006" xmlns:mv="urn:schemas-microsoft-com:mac:vml" xmlns:c="http://schemas.openxmlformats.org/drawingml/2006/chart" xmlns:dgm="http://schemas.openxmlformats.org/drawingml/2006/diagram" xmlns:o="urn:schemas-microsoft-com:office:office" xmlns:v="urn:schemas-microsoft-com:vml" xmlns:pvml="urn:schemas-microsoft-com:office:powerpoint" xmlns:com="http://schemas.openxmlformats.org/drawingml/2006/compatibility" xmlns:p14="http://schemas.microsoft.com/office/powerpoint/2010/main" xmlns:p15="http://schemas.microsoft.com/office/powerpoint/2012/main" xmlns:ahyp="http://schemas.microsoft.com/office/drawing/2018/hyperlinkcolor" xmlns:go="http://customooxmlschemas.google.com/" r:id="rId61" roundtripDataSignature="AMtx7mgQh/JTZB+tcnoesXfhZuEldfv5OQ=="/>
+      <go:slidesCustomData xmlns:go="http://customooxmlschemas.google.com/" xmlns:ahyp="http://schemas.microsoft.com/office/drawing/2018/hyperlinkcolor" xmlns:p15="http://schemas.microsoft.com/office/powerpoint/2012/main" xmlns:p14="http://schemas.microsoft.com/office/powerpoint/2010/main" xmlns:com="http://schemas.openxmlformats.org/drawingml/2006/compatibility" xmlns:pvml="urn:schemas-microsoft-com:office:powerpoint" xmlns:v="urn:schemas-microsoft-com:vml" xmlns:o="urn:schemas-microsoft-com:office:office" xmlns:dgm="http://schemas.openxmlformats.org/drawingml/2006/diagram" xmlns:c="http://schemas.openxmlformats.org/drawingml/2006/chart" xmlns:mv="urn:schemas-microsoft-com:mac:vml" xmlns:mc="http://schemas.openxmlformats.org/markup-compatibility/2006" xmlns="" r:id="rId61" roundtripDataSignature="AMtx7mgQh/JTZB+tcnoesXfhZuEldfv5OQ=="/>
     </p:ext>
   </p:extLst>
 </p:presentation>
